--- a/presentations/point-allocation-discussion.pptx
+++ b/presentations/point-allocation-discussion.pptx
@@ -9,9 +9,12 @@
     <p:sldId id="257" r:id="rId3"/>
     <p:sldId id="258" r:id="rId4"/>
     <p:sldId id="259" r:id="rId5"/>
+    <p:sldId id="260" r:id="rId6"/>
+    <p:sldId id="261" r:id="rId7"/>
+    <p:sldId id="262" r:id="rId8"/>
   </p:sldIdLst>
   <p:notesMasterIdLst>
-    <p:notesMasterId r:id="rId6"/>
+    <p:notesMasterId r:id="rId9"/>
   </p:notesMasterIdLst>
   <p:sldSz cx="12192000" cy="6858000"/>
   <p:notesSz cx="6858000" cy="12192000"/>
@@ -811,6 +814,270 @@
 </p:notes>
 </file>
 
+<file path=ppt/notesSlides/notesSlide5.xml><?xml version="1.0" encoding="utf-8"?>
+<p:notes xmlns:a="http://schemas.openxmlformats.org/drawingml/2006/main" xmlns:r="http://schemas.openxmlformats.org/officeDocument/2006/relationships" xmlns:p="http://schemas.openxmlformats.org/presentationml/2006/main">
+  <p:cSld>
+    <p:spTree>
+      <p:nvGrpSpPr>
+        <p:cNvPr id="1" name=""/>
+        <p:cNvGrpSpPr/>
+        <p:nvPr/>
+      </p:nvGrpSpPr>
+      <p:grpSpPr>
+        <a:xfrm>
+          <a:off x="0" y="0"/>
+          <a:ext cx="0" cy="0"/>
+          <a:chOff x="0" y="0"/>
+          <a:chExt cx="0" cy="0"/>
+        </a:xfrm>
+      </p:grpSpPr>
+      <p:sp>
+        <p:nvSpPr>
+          <p:cNvPr id="2" name="Slide Image Placeholder 1"/>
+          <p:cNvSpPr>
+            <a:spLocks noGrp="1" noRot="1" noChangeAspect="1"/>
+          </p:cNvSpPr>
+          <p:nvPr>
+            <p:ph type="sldImg"/>
+          </p:nvPr>
+        </p:nvSpPr>
+        <p:spPr/>
+      </p:sp>
+      <p:sp>
+        <p:nvSpPr>
+          <p:cNvPr id="3" name="Notes Placeholder 2"/>
+          <p:cNvSpPr>
+            <a:spLocks noGrp="1"/>
+          </p:cNvSpPr>
+          <p:nvPr>
+            <p:ph type="body" idx="1"/>
+          </p:nvPr>
+        </p:nvSpPr>
+        <p:spPr/>
+        <p:txBody>
+          <a:bodyPr/>
+          <a:lstStyle/>
+          <a:p>
+            <a:r>
+              <a:rPr lang="en-US" dirty="0"/>
+              <a:t/>
+            </a:r>
+            <a:endParaRPr lang="en-US" dirty="0"/>
+          </a:p>
+        </p:txBody>
+      </p:sp>
+      <p:sp>
+        <p:nvSpPr>
+          <p:cNvPr id="4" name="Slide Number Placeholder 3"/>
+          <p:cNvSpPr>
+            <a:spLocks noGrp="1"/>
+          </p:cNvSpPr>
+          <p:nvPr>
+            <p:ph type="sldNum" sz="quarter" idx="10"/>
+          </p:nvPr>
+        </p:nvSpPr>
+        <p:spPr/>
+        <p:txBody>
+          <a:bodyPr/>
+          <a:lstStyle/>
+          <a:p>
+            <a:fld id="{F7021451-1387-4CA6-816F-3879F97B5CBC}" type="slidenum">
+              <a:rPr lang="en-US"/>
+              <a:t>5</a:t>
+            </a:fld>
+            <a:endParaRPr lang="en-US"/>
+          </a:p>
+        </p:txBody>
+      </p:sp>
+    </p:spTree>
+    <p:extLst>
+      <p:ext uri="{BB962C8B-B14F-4D97-AF65-F5344CB8AC3E}">
+        <p14:creationId xmlns:p14="http://schemas.microsoft.com/office/powerpoint/2010/main" val="1024086991"/>
+      </p:ext>
+    </p:extLst>
+  </p:cSld>
+  <p:clrMapOvr>
+    <a:masterClrMapping/>
+  </p:clrMapOvr>
+</p:notes>
+</file>
+
+<file path=ppt/notesSlides/notesSlide6.xml><?xml version="1.0" encoding="utf-8"?>
+<p:notes xmlns:a="http://schemas.openxmlformats.org/drawingml/2006/main" xmlns:r="http://schemas.openxmlformats.org/officeDocument/2006/relationships" xmlns:p="http://schemas.openxmlformats.org/presentationml/2006/main">
+  <p:cSld>
+    <p:spTree>
+      <p:nvGrpSpPr>
+        <p:cNvPr id="1" name=""/>
+        <p:cNvGrpSpPr/>
+        <p:nvPr/>
+      </p:nvGrpSpPr>
+      <p:grpSpPr>
+        <a:xfrm>
+          <a:off x="0" y="0"/>
+          <a:ext cx="0" cy="0"/>
+          <a:chOff x="0" y="0"/>
+          <a:chExt cx="0" cy="0"/>
+        </a:xfrm>
+      </p:grpSpPr>
+      <p:sp>
+        <p:nvSpPr>
+          <p:cNvPr id="2" name="Slide Image Placeholder 1"/>
+          <p:cNvSpPr>
+            <a:spLocks noGrp="1" noRot="1" noChangeAspect="1"/>
+          </p:cNvSpPr>
+          <p:nvPr>
+            <p:ph type="sldImg"/>
+          </p:nvPr>
+        </p:nvSpPr>
+        <p:spPr/>
+      </p:sp>
+      <p:sp>
+        <p:nvSpPr>
+          <p:cNvPr id="3" name="Notes Placeholder 2"/>
+          <p:cNvSpPr>
+            <a:spLocks noGrp="1"/>
+          </p:cNvSpPr>
+          <p:nvPr>
+            <p:ph type="body" idx="1"/>
+          </p:nvPr>
+        </p:nvSpPr>
+        <p:spPr/>
+        <p:txBody>
+          <a:bodyPr/>
+          <a:lstStyle/>
+          <a:p>
+            <a:r>
+              <a:rPr lang="en-US" dirty="0"/>
+              <a:t/>
+            </a:r>
+            <a:endParaRPr lang="en-US" dirty="0"/>
+          </a:p>
+        </p:txBody>
+      </p:sp>
+      <p:sp>
+        <p:nvSpPr>
+          <p:cNvPr id="4" name="Slide Number Placeholder 3"/>
+          <p:cNvSpPr>
+            <a:spLocks noGrp="1"/>
+          </p:cNvSpPr>
+          <p:nvPr>
+            <p:ph type="sldNum" sz="quarter" idx="10"/>
+          </p:nvPr>
+        </p:nvSpPr>
+        <p:spPr/>
+        <p:txBody>
+          <a:bodyPr/>
+          <a:lstStyle/>
+          <a:p>
+            <a:fld id="{F7021451-1387-4CA6-816F-3879F97B5CBC}" type="slidenum">
+              <a:rPr lang="en-US"/>
+              <a:t>6</a:t>
+            </a:fld>
+            <a:endParaRPr lang="en-US"/>
+          </a:p>
+        </p:txBody>
+      </p:sp>
+    </p:spTree>
+    <p:extLst>
+      <p:ext uri="{BB962C8B-B14F-4D97-AF65-F5344CB8AC3E}">
+        <p14:creationId xmlns:p14="http://schemas.microsoft.com/office/powerpoint/2010/main" val="1024086991"/>
+      </p:ext>
+    </p:extLst>
+  </p:cSld>
+  <p:clrMapOvr>
+    <a:masterClrMapping/>
+  </p:clrMapOvr>
+</p:notes>
+</file>
+
+<file path=ppt/notesSlides/notesSlide7.xml><?xml version="1.0" encoding="utf-8"?>
+<p:notes xmlns:a="http://schemas.openxmlformats.org/drawingml/2006/main" xmlns:r="http://schemas.openxmlformats.org/officeDocument/2006/relationships" xmlns:p="http://schemas.openxmlformats.org/presentationml/2006/main">
+  <p:cSld>
+    <p:spTree>
+      <p:nvGrpSpPr>
+        <p:cNvPr id="1" name=""/>
+        <p:cNvGrpSpPr/>
+        <p:nvPr/>
+      </p:nvGrpSpPr>
+      <p:grpSpPr>
+        <a:xfrm>
+          <a:off x="0" y="0"/>
+          <a:ext cx="0" cy="0"/>
+          <a:chOff x="0" y="0"/>
+          <a:chExt cx="0" cy="0"/>
+        </a:xfrm>
+      </p:grpSpPr>
+      <p:sp>
+        <p:nvSpPr>
+          <p:cNvPr id="2" name="Slide Image Placeholder 1"/>
+          <p:cNvSpPr>
+            <a:spLocks noGrp="1" noRot="1" noChangeAspect="1"/>
+          </p:cNvSpPr>
+          <p:nvPr>
+            <p:ph type="sldImg"/>
+          </p:nvPr>
+        </p:nvSpPr>
+        <p:spPr/>
+      </p:sp>
+      <p:sp>
+        <p:nvSpPr>
+          <p:cNvPr id="3" name="Notes Placeholder 2"/>
+          <p:cNvSpPr>
+            <a:spLocks noGrp="1"/>
+          </p:cNvSpPr>
+          <p:nvPr>
+            <p:ph type="body" idx="1"/>
+          </p:nvPr>
+        </p:nvSpPr>
+        <p:spPr/>
+        <p:txBody>
+          <a:bodyPr/>
+          <a:lstStyle/>
+          <a:p>
+            <a:r>
+              <a:rPr lang="en-US" dirty="0"/>
+              <a:t/>
+            </a:r>
+            <a:endParaRPr lang="en-US" dirty="0"/>
+          </a:p>
+        </p:txBody>
+      </p:sp>
+      <p:sp>
+        <p:nvSpPr>
+          <p:cNvPr id="4" name="Slide Number Placeholder 3"/>
+          <p:cNvSpPr>
+            <a:spLocks noGrp="1"/>
+          </p:cNvSpPr>
+          <p:nvPr>
+            <p:ph type="sldNum" sz="quarter" idx="10"/>
+          </p:nvPr>
+        </p:nvSpPr>
+        <p:spPr/>
+        <p:txBody>
+          <a:bodyPr/>
+          <a:lstStyle/>
+          <a:p>
+            <a:fld id="{F7021451-1387-4CA6-816F-3879F97B5CBC}" type="slidenum">
+              <a:rPr lang="en-US"/>
+              <a:t>7</a:t>
+            </a:fld>
+            <a:endParaRPr lang="en-US"/>
+          </a:p>
+        </p:txBody>
+      </p:sp>
+    </p:spTree>
+    <p:extLst>
+      <p:ext uri="{BB962C8B-B14F-4D97-AF65-F5344CB8AC3E}">
+        <p14:creationId xmlns:p14="http://schemas.microsoft.com/office/powerpoint/2010/main" val="1024086991"/>
+      </p:ext>
+    </p:extLst>
+  </p:cSld>
+  <p:clrMapOvr>
+    <a:masterClrMapping/>
+  </p:clrMapOvr>
+</p:notes>
+</file>
+
 <file path=ppt/slideLayouts/slideLayout1.xml><?xml version="1.0" encoding="utf-8"?>
 <p:sldLayout xmlns:a="http://schemas.openxmlformats.org/drawingml/2006/main" xmlns:r="http://schemas.openxmlformats.org/officeDocument/2006/relationships" xmlns:p="http://schemas.openxmlformats.org/presentationml/2006/main" preserve="1">
   <p:cSld name="DEFAULT">
@@ -1239,7 +1506,7 @@
                 <a:ea typeface="Calibri" pitchFamily="34" charset="-122"/>
                 <a:cs typeface="Calibri" pitchFamily="34" charset="-120"/>
               </a:rPr>
-              <a:t>1 / 4</a:t>
+              <a:t>1 / 7</a:t>
             </a:r>
             <a:endParaRPr lang="en-US" sz="1000" dirty="0"/>
           </a:p>
@@ -1367,7 +1634,7 @@
               <a:buNone/>
             </a:pPr>
             <a:r>
-              <a:rPr lang="en-US" sz="2000" dirty="0">
+              <a:rPr lang="en-US" sz="1800" dirty="0">
                 <a:solidFill>
                   <a:srgbClr val="A7A9AC"/>
                 </a:solidFill>
@@ -1375,9 +1642,9 @@
                 <a:ea typeface="Calibri" pitchFamily="34" charset="-122"/>
                 <a:cs typeface="Calibri" pitchFamily="34" charset="-120"/>
               </a:rPr>
-              <a:t>Why the current earning rate prevents customers from redeeming a single cup of coffee.</a:t>
+              <a:t>Why the current earning rate prevents customers from redeeming a single cup of coffee — and what to do about it.</a:t>
             </a:r>
-            <a:endParaRPr lang="en-US" sz="2000" dirty="0"/>
+            <a:endParaRPr lang="en-US" sz="1800" dirty="0"/>
           </a:p>
         </p:txBody>
       </p:sp>
@@ -1510,7 +1777,7 @@
                 <a:ea typeface="Calibri" pitchFamily="34" charset="-122"/>
                 <a:cs typeface="Calibri" pitchFamily="34" charset="-120"/>
               </a:rPr>
-              <a:t>2 / 4</a:t>
+              <a:t>2 / 7</a:t>
             </a:r>
             <a:endParaRPr lang="en-US" sz="1000" dirty="0"/>
           </a:p>
@@ -2585,7 +2852,7 @@
                 <a:ea typeface="Calibri" pitchFamily="34" charset="-122"/>
                 <a:cs typeface="Calibri" pitchFamily="34" charset="-120"/>
               </a:rPr>
-              <a:t>3 / 4</a:t>
+              <a:t>3 / 7</a:t>
             </a:r>
             <a:endParaRPr lang="en-US" sz="1000" dirty="0"/>
           </a:p>
@@ -2616,7 +2883,7 @@
               <a:buNone/>
             </a:pPr>
             <a:r>
-              <a:rPr lang="en-US" sz="2800" b="1" dirty="0">
+              <a:rPr lang="en-US" sz="3200" b="1" dirty="0">
                 <a:solidFill>
                   <a:srgbClr val="3C3C3B"/>
                 </a:solidFill>
@@ -2626,7 +2893,7 @@
               </a:rPr>
               <a:t>The Problem: A Cup of Coffee Costs 5 294 Points</a:t>
             </a:r>
-            <a:endParaRPr lang="en-US" sz="2800" dirty="0"/>
+            <a:endParaRPr lang="en-US" sz="3200" dirty="0"/>
           </a:p>
         </p:txBody>
       </p:sp>
@@ -3490,7 +3757,7 @@
                 <a:ea typeface="Calibri" pitchFamily="34" charset="-122"/>
                 <a:cs typeface="Calibri" pitchFamily="34" charset="-120"/>
               </a:rPr>
-              <a:t>4 / 4</a:t>
+              <a:t>4 / 7</a:t>
             </a:r>
             <a:endParaRPr lang="en-US" sz="1000" dirty="0"/>
           </a:p>
@@ -3529,7 +3796,7 @@
                 <a:ea typeface="Calibri" pitchFamily="34" charset="-122"/>
                 <a:cs typeface="Calibri" pitchFamily="34" charset="-120"/>
               </a:rPr>
-              <a:t>Recommendation</a:t>
+              <a:t>How We Compare to the Market</a:t>
             </a:r>
             <a:endParaRPr lang="en-US" sz="3200" dirty="0"/>
           </a:p>
@@ -3544,7 +3811,7 @@
         <p:spPr>
           <a:xfrm>
             <a:off x="457200" y="960120"/>
-            <a:ext cx="1828800" cy="45720"/>
+            <a:ext cx="2743200" cy="45720"/>
           </a:xfrm>
           <a:prstGeom prst="rect">
             <a:avLst/>
@@ -3569,7 +3836,7 @@
         <p:spPr>
           <a:xfrm>
             <a:off x="457200" y="1234440"/>
-            <a:ext cx="11274552" cy="548640"/>
+            <a:ext cx="11274552" cy="640080"/>
           </a:xfrm>
           <a:prstGeom prst="rect">
             <a:avLst/>
@@ -3593,32 +3860,1483 @@
                 <a:ea typeface="Calibri" pitchFamily="34" charset="-122"/>
                 <a:cs typeface="Calibri" pitchFamily="34" charset="-120"/>
               </a:rPr>
-              <a:t>Increase the airtime earning rate to bring rewards within reach without devaluing the catalogue.</a:t>
+              <a:t>Effective reward rate = the cash value a customer gets back per R1 spent. Maverick currently sits well below typical SA telco programmes.</a:t>
             </a:r>
             <a:endParaRPr lang="en-US" sz="1700" dirty="0"/>
           </a:p>
         </p:txBody>
       </p:sp>
+      <p:graphicFrame>
+        <p:nvGraphicFramePr>
+          <p:cNvPr id="5" name="Table 0"/>
+          <p:cNvGraphicFramePr>
+            <a:graphicFrameLocks noGrp="1"/>
+          </p:cNvGraphicFramePr>
+          <p:nvPr>
+            <p:extLst>
+              <p:ext uri="{D42A27DB-BD31-4B8C-83A1-F6EECF244321}">
+                <p14:modId xmlns:p14="http://schemas.microsoft.com/office/powerpoint/2010/main" val="1579011935"/>
+              </p:ext>
+            </p:extLst>
+          </p:nvPr>
+        </p:nvGraphicFramePr>
+        <p:xfrm>
+          <a:off x="457200" y="2057400"/>
+          <a:ext cx="11274552" cy="914400"/>
+        </p:xfrm>
+        <a:graphic>
+          <a:graphicData uri="http://schemas.openxmlformats.org/drawingml/2006/table">
+            <a:tbl>
+              <a:tblPr/>
+              <a:tblGrid>
+                <a:gridCol w="3758184"/>
+                <a:gridCol w="3758184"/>
+                <a:gridCol w="3758184"/>
+              </a:tblGrid>
+              <a:tr h="0">
+                <a:tc>
+                  <a:txBody>
+                    <a:bodyPr/>
+                    <a:lstStyle/>
+                    <a:p>
+                      <a:pPr indent="0" marL="0">
+                        <a:buNone/>
+                      </a:pPr>
+                      <a:r>
+                        <a:rPr lang="en-US" sz="1500" b="1" dirty="0">
+                          <a:solidFill>
+                            <a:srgbClr val="3C3C3B"/>
+                          </a:solidFill>
+                          <a:latin typeface="Calibri" pitchFamily="34" charset="0"/>
+                          <a:ea typeface="Calibri" pitchFamily="34" charset="-122"/>
+                          <a:cs typeface="Calibri" pitchFamily="34" charset="-120"/>
+                        </a:rPr>
+                        <a:t>Programme</a:t>
+                      </a:r>
+                      <a:endParaRPr lang="en-US" sz="1500" dirty="0">
+                        <a:latin typeface="Calibri" charset="0"/>
+                        <a:ea typeface="Calibri" charset="0"/>
+                        <a:cs typeface="Calibri" charset="0"/>
+                      </a:endParaRPr>
+                    </a:p>
+                  </a:txBody>
+                  <a:tcPr marL="91440" marR="91440" marT="45720" marB="45720">
+                    <a:lnL w="6350" cap="flat" cmpd="sng" algn="ctr">
+                      <a:solidFill>
+                        <a:srgbClr val="E5E7EB"/>
+                      </a:solidFill>
+                      <a:prstDash val="solid"/>
+                      <a:round/>
+                      <a:headEnd type="none" w="med" len="med"/>
+                      <a:tailEnd type="none" w="med" len="med"/>
+                    </a:lnL>
+                    <a:lnR w="6350" cap="flat" cmpd="sng" algn="ctr">
+                      <a:solidFill>
+                        <a:srgbClr val="E5E7EB"/>
+                      </a:solidFill>
+                      <a:prstDash val="solid"/>
+                      <a:round/>
+                      <a:headEnd type="none" w="med" len="med"/>
+                      <a:tailEnd type="none" w="med" len="med"/>
+                    </a:lnR>
+                    <a:lnT w="6350" cap="flat" cmpd="sng" algn="ctr">
+                      <a:solidFill>
+                        <a:srgbClr val="E5E7EB"/>
+                      </a:solidFill>
+                      <a:prstDash val="solid"/>
+                      <a:round/>
+                      <a:headEnd type="none" w="med" len="med"/>
+                      <a:tailEnd type="none" w="med" len="med"/>
+                    </a:lnT>
+                    <a:lnB w="6350" cap="flat" cmpd="sng" algn="ctr">
+                      <a:solidFill>
+                        <a:srgbClr val="E5E7EB"/>
+                      </a:solidFill>
+                      <a:prstDash val="solid"/>
+                      <a:round/>
+                      <a:headEnd type="none" w="med" len="med"/>
+                      <a:tailEnd type="none" w="med" len="med"/>
+                    </a:lnB>
+                    <a:solidFill>
+                      <a:srgbClr val="FDC800"/>
+                    </a:solidFill>
+                  </a:tcPr>
+                </a:tc>
+                <a:tc>
+                  <a:txBody>
+                    <a:bodyPr/>
+                    <a:lstStyle/>
+                    <a:p>
+                      <a:pPr indent="0" marL="0">
+                        <a:buNone/>
+                      </a:pPr>
+                      <a:r>
+                        <a:rPr lang="en-US" sz="1500" b="1" dirty="0">
+                          <a:solidFill>
+                            <a:srgbClr val="3C3C3B"/>
+                          </a:solidFill>
+                          <a:latin typeface="Calibri" pitchFamily="34" charset="0"/>
+                          <a:ea typeface="Calibri" pitchFamily="34" charset="-122"/>
+                          <a:cs typeface="Calibri" pitchFamily="34" charset="-120"/>
+                        </a:rPr>
+                        <a:t>Effective Reward Rate</a:t>
+                      </a:r>
+                      <a:endParaRPr lang="en-US" sz="1500" dirty="0">
+                        <a:latin typeface="Calibri" charset="0"/>
+                        <a:ea typeface="Calibri" charset="0"/>
+                        <a:cs typeface="Calibri" charset="0"/>
+                      </a:endParaRPr>
+                    </a:p>
+                  </a:txBody>
+                  <a:tcPr marL="91440" marR="91440" marT="45720" marB="45720">
+                    <a:lnL w="6350" cap="flat" cmpd="sng" algn="ctr">
+                      <a:solidFill>
+                        <a:srgbClr val="E5E7EB"/>
+                      </a:solidFill>
+                      <a:prstDash val="solid"/>
+                      <a:round/>
+                      <a:headEnd type="none" w="med" len="med"/>
+                      <a:tailEnd type="none" w="med" len="med"/>
+                    </a:lnL>
+                    <a:lnR w="6350" cap="flat" cmpd="sng" algn="ctr">
+                      <a:solidFill>
+                        <a:srgbClr val="E5E7EB"/>
+                      </a:solidFill>
+                      <a:prstDash val="solid"/>
+                      <a:round/>
+                      <a:headEnd type="none" w="med" len="med"/>
+                      <a:tailEnd type="none" w="med" len="med"/>
+                    </a:lnR>
+                    <a:lnT w="6350" cap="flat" cmpd="sng" algn="ctr">
+                      <a:solidFill>
+                        <a:srgbClr val="E5E7EB"/>
+                      </a:solidFill>
+                      <a:prstDash val="solid"/>
+                      <a:round/>
+                      <a:headEnd type="none" w="med" len="med"/>
+                      <a:tailEnd type="none" w="med" len="med"/>
+                    </a:lnT>
+                    <a:lnB w="6350" cap="flat" cmpd="sng" algn="ctr">
+                      <a:solidFill>
+                        <a:srgbClr val="E5E7EB"/>
+                      </a:solidFill>
+                      <a:prstDash val="solid"/>
+                      <a:round/>
+                      <a:headEnd type="none" w="med" len="med"/>
+                      <a:tailEnd type="none" w="med" len="med"/>
+                    </a:lnB>
+                    <a:solidFill>
+                      <a:srgbClr val="FDC800"/>
+                    </a:solidFill>
+                  </a:tcPr>
+                </a:tc>
+                <a:tc>
+                  <a:txBody>
+                    <a:bodyPr/>
+                    <a:lstStyle/>
+                    <a:p>
+                      <a:pPr indent="0" marL="0">
+                        <a:buNone/>
+                      </a:pPr>
+                      <a:r>
+                        <a:rPr lang="en-US" sz="1500" b="1" dirty="0">
+                          <a:solidFill>
+                            <a:srgbClr val="3C3C3B"/>
+                          </a:solidFill>
+                          <a:latin typeface="Calibri" pitchFamily="34" charset="0"/>
+                          <a:ea typeface="Calibri" pitchFamily="34" charset="-122"/>
+                          <a:cs typeface="Calibri" pitchFamily="34" charset="-120"/>
+                        </a:rPr>
+                        <a:t>Notes</a:t>
+                      </a:r>
+                      <a:endParaRPr lang="en-US" sz="1500" dirty="0">
+                        <a:latin typeface="Calibri" charset="0"/>
+                        <a:ea typeface="Calibri" charset="0"/>
+                        <a:cs typeface="Calibri" charset="0"/>
+                      </a:endParaRPr>
+                    </a:p>
+                  </a:txBody>
+                  <a:tcPr marL="91440" marR="91440" marT="45720" marB="45720">
+                    <a:lnL w="6350" cap="flat" cmpd="sng" algn="ctr">
+                      <a:solidFill>
+                        <a:srgbClr val="E5E7EB"/>
+                      </a:solidFill>
+                      <a:prstDash val="solid"/>
+                      <a:round/>
+                      <a:headEnd type="none" w="med" len="med"/>
+                      <a:tailEnd type="none" w="med" len="med"/>
+                    </a:lnL>
+                    <a:lnR w="6350" cap="flat" cmpd="sng" algn="ctr">
+                      <a:solidFill>
+                        <a:srgbClr val="E5E7EB"/>
+                      </a:solidFill>
+                      <a:prstDash val="solid"/>
+                      <a:round/>
+                      <a:headEnd type="none" w="med" len="med"/>
+                      <a:tailEnd type="none" w="med" len="med"/>
+                    </a:lnR>
+                    <a:lnT w="6350" cap="flat" cmpd="sng" algn="ctr">
+                      <a:solidFill>
+                        <a:srgbClr val="E5E7EB"/>
+                      </a:solidFill>
+                      <a:prstDash val="solid"/>
+                      <a:round/>
+                      <a:headEnd type="none" w="med" len="med"/>
+                      <a:tailEnd type="none" w="med" len="med"/>
+                    </a:lnT>
+                    <a:lnB w="6350" cap="flat" cmpd="sng" algn="ctr">
+                      <a:solidFill>
+                        <a:srgbClr val="E5E7EB"/>
+                      </a:solidFill>
+                      <a:prstDash val="solid"/>
+                      <a:round/>
+                      <a:headEnd type="none" w="med" len="med"/>
+                      <a:tailEnd type="none" w="med" len="med"/>
+                    </a:lnB>
+                    <a:solidFill>
+                      <a:srgbClr val="FDC800"/>
+                    </a:solidFill>
+                  </a:tcPr>
+                </a:tc>
+              </a:tr>
+              <a:tr h="0">
+                <a:tc>
+                  <a:txBody>
+                    <a:bodyPr/>
+                    <a:lstStyle/>
+                    <a:p>
+                      <a:pPr indent="0" marL="0">
+                        <a:buNone/>
+                      </a:pPr>
+                      <a:r>
+                        <a:rPr lang="en-US" sz="1500" b="1" dirty="0">
+                          <a:solidFill>
+                            <a:srgbClr val="B91C1C"/>
+                          </a:solidFill>
+                          <a:latin typeface="Calibri" pitchFamily="34" charset="0"/>
+                          <a:ea typeface="Calibri" pitchFamily="34" charset="-122"/>
+                          <a:cs typeface="Calibri" pitchFamily="34" charset="-120"/>
+                        </a:rPr>
+                        <a:t>Maverick (current)</a:t>
+                      </a:r>
+                      <a:endParaRPr lang="en-US" sz="1500" dirty="0">
+                        <a:latin typeface="Calibri" charset="0"/>
+                        <a:ea typeface="Calibri" charset="0"/>
+                        <a:cs typeface="Calibri" charset="0"/>
+                      </a:endParaRPr>
+                    </a:p>
+                  </a:txBody>
+                  <a:tcPr marL="91440" marR="91440" marT="45720" marB="45720">
+                    <a:lnL w="6350" cap="flat" cmpd="sng" algn="ctr">
+                      <a:solidFill>
+                        <a:srgbClr val="E5E7EB"/>
+                      </a:solidFill>
+                      <a:prstDash val="solid"/>
+                      <a:round/>
+                      <a:headEnd type="none" w="med" len="med"/>
+                      <a:tailEnd type="none" w="med" len="med"/>
+                    </a:lnL>
+                    <a:lnR w="6350" cap="flat" cmpd="sng" algn="ctr">
+                      <a:solidFill>
+                        <a:srgbClr val="E5E7EB"/>
+                      </a:solidFill>
+                      <a:prstDash val="solid"/>
+                      <a:round/>
+                      <a:headEnd type="none" w="med" len="med"/>
+                      <a:tailEnd type="none" w="med" len="med"/>
+                    </a:lnR>
+                    <a:lnT w="6350" cap="flat" cmpd="sng" algn="ctr">
+                      <a:solidFill>
+                        <a:srgbClr val="E5E7EB"/>
+                      </a:solidFill>
+                      <a:prstDash val="solid"/>
+                      <a:round/>
+                      <a:headEnd type="none" w="med" len="med"/>
+                      <a:tailEnd type="none" w="med" len="med"/>
+                    </a:lnT>
+                    <a:lnB w="6350" cap="flat" cmpd="sng" algn="ctr">
+                      <a:solidFill>
+                        <a:srgbClr val="E5E7EB"/>
+                      </a:solidFill>
+                      <a:prstDash val="solid"/>
+                      <a:round/>
+                      <a:headEnd type="none" w="med" len="med"/>
+                      <a:tailEnd type="none" w="med" len="med"/>
+                    </a:lnB>
+                  </a:tcPr>
+                </a:tc>
+                <a:tc>
+                  <a:txBody>
+                    <a:bodyPr/>
+                    <a:lstStyle/>
+                    <a:p>
+                      <a:pPr indent="0" marL="0">
+                        <a:buNone/>
+                      </a:pPr>
+                      <a:r>
+                        <a:rPr lang="en-US" sz="1500" b="1" dirty="0">
+                          <a:solidFill>
+                            <a:srgbClr val="B91C1C"/>
+                          </a:solidFill>
+                          <a:latin typeface="Calibri" pitchFamily="34" charset="0"/>
+                          <a:ea typeface="Calibri" pitchFamily="34" charset="-122"/>
+                          <a:cs typeface="Calibri" pitchFamily="34" charset="-120"/>
+                        </a:rPr>
+                        <a:t>~0.85%</a:t>
+                      </a:r>
+                      <a:endParaRPr lang="en-US" sz="1500" dirty="0">
+                        <a:latin typeface="Calibri" charset="0"/>
+                        <a:ea typeface="Calibri" charset="0"/>
+                        <a:cs typeface="Calibri" charset="0"/>
+                      </a:endParaRPr>
+                    </a:p>
+                  </a:txBody>
+                  <a:tcPr marL="91440" marR="91440" marT="45720" marB="45720">
+                    <a:lnL w="6350" cap="flat" cmpd="sng" algn="ctr">
+                      <a:solidFill>
+                        <a:srgbClr val="E5E7EB"/>
+                      </a:solidFill>
+                      <a:prstDash val="solid"/>
+                      <a:round/>
+                      <a:headEnd type="none" w="med" len="med"/>
+                      <a:tailEnd type="none" w="med" len="med"/>
+                    </a:lnL>
+                    <a:lnR w="6350" cap="flat" cmpd="sng" algn="ctr">
+                      <a:solidFill>
+                        <a:srgbClr val="E5E7EB"/>
+                      </a:solidFill>
+                      <a:prstDash val="solid"/>
+                      <a:round/>
+                      <a:headEnd type="none" w="med" len="med"/>
+                      <a:tailEnd type="none" w="med" len="med"/>
+                    </a:lnR>
+                    <a:lnT w="6350" cap="flat" cmpd="sng" algn="ctr">
+                      <a:solidFill>
+                        <a:srgbClr val="E5E7EB"/>
+                      </a:solidFill>
+                      <a:prstDash val="solid"/>
+                      <a:round/>
+                      <a:headEnd type="none" w="med" len="med"/>
+                      <a:tailEnd type="none" w="med" len="med"/>
+                    </a:lnT>
+                    <a:lnB w="6350" cap="flat" cmpd="sng" algn="ctr">
+                      <a:solidFill>
+                        <a:srgbClr val="E5E7EB"/>
+                      </a:solidFill>
+                      <a:prstDash val="solid"/>
+                      <a:round/>
+                      <a:headEnd type="none" w="med" len="med"/>
+                      <a:tailEnd type="none" w="med" len="med"/>
+                    </a:lnB>
+                  </a:tcPr>
+                </a:tc>
+                <a:tc>
+                  <a:txBody>
+                    <a:bodyPr/>
+                    <a:lstStyle/>
+                    <a:p>
+                      <a:pPr indent="0" marL="0">
+                        <a:buNone/>
+                      </a:pPr>
+                      <a:r>
+                        <a:rPr lang="en-US" sz="1500" dirty="0">
+                          <a:solidFill>
+                            <a:srgbClr val="4A4A4A"/>
+                          </a:solidFill>
+                          <a:latin typeface="Calibri" pitchFamily="34" charset="0"/>
+                          <a:ea typeface="Calibri" pitchFamily="34" charset="-122"/>
+                          <a:cs typeface="Calibri" pitchFamily="34" charset="-120"/>
+                        </a:rPr>
+                        <a:t>Below market</a:t>
+                      </a:r>
+                      <a:endParaRPr lang="en-US" sz="1500" dirty="0">
+                        <a:latin typeface="Calibri" charset="0"/>
+                        <a:ea typeface="Calibri" charset="0"/>
+                        <a:cs typeface="Calibri" charset="0"/>
+                      </a:endParaRPr>
+                    </a:p>
+                  </a:txBody>
+                  <a:tcPr marL="91440" marR="91440" marT="45720" marB="45720">
+                    <a:lnL w="6350" cap="flat" cmpd="sng" algn="ctr">
+                      <a:solidFill>
+                        <a:srgbClr val="E5E7EB"/>
+                      </a:solidFill>
+                      <a:prstDash val="solid"/>
+                      <a:round/>
+                      <a:headEnd type="none" w="med" len="med"/>
+                      <a:tailEnd type="none" w="med" len="med"/>
+                    </a:lnL>
+                    <a:lnR w="6350" cap="flat" cmpd="sng" algn="ctr">
+                      <a:solidFill>
+                        <a:srgbClr val="E5E7EB"/>
+                      </a:solidFill>
+                      <a:prstDash val="solid"/>
+                      <a:round/>
+                      <a:headEnd type="none" w="med" len="med"/>
+                      <a:tailEnd type="none" w="med" len="med"/>
+                    </a:lnR>
+                    <a:lnT w="6350" cap="flat" cmpd="sng" algn="ctr">
+                      <a:solidFill>
+                        <a:srgbClr val="E5E7EB"/>
+                      </a:solidFill>
+                      <a:prstDash val="solid"/>
+                      <a:round/>
+                      <a:headEnd type="none" w="med" len="med"/>
+                      <a:tailEnd type="none" w="med" len="med"/>
+                    </a:lnT>
+                    <a:lnB w="6350" cap="flat" cmpd="sng" algn="ctr">
+                      <a:solidFill>
+                        <a:srgbClr val="E5E7EB"/>
+                      </a:solidFill>
+                      <a:prstDash val="solid"/>
+                      <a:round/>
+                      <a:headEnd type="none" w="med" len="med"/>
+                      <a:tailEnd type="none" w="med" len="med"/>
+                    </a:lnB>
+                  </a:tcPr>
+                </a:tc>
+              </a:tr>
+              <a:tr h="0">
+                <a:tc>
+                  <a:txBody>
+                    <a:bodyPr/>
+                    <a:lstStyle/>
+                    <a:p>
+                      <a:pPr indent="0" marL="0">
+                        <a:buNone/>
+                      </a:pPr>
+                      <a:r>
+                        <a:rPr lang="en-US" sz="1500" dirty="0">
+                          <a:solidFill>
+                            <a:srgbClr val="4A4A4A"/>
+                          </a:solidFill>
+                          <a:latin typeface="Calibri" pitchFamily="34" charset="0"/>
+                          <a:ea typeface="Calibri" pitchFamily="34" charset="-122"/>
+                          <a:cs typeface="Calibri" pitchFamily="34" charset="-120"/>
+                        </a:rPr>
+                        <a:t>Vodacom Vodabucks</a:t>
+                      </a:r>
+                      <a:endParaRPr lang="en-US" sz="1500" dirty="0">
+                        <a:latin typeface="Calibri" charset="0"/>
+                        <a:ea typeface="Calibri" charset="0"/>
+                        <a:cs typeface="Calibri" charset="0"/>
+                      </a:endParaRPr>
+                    </a:p>
+                  </a:txBody>
+                  <a:tcPr marL="91440" marR="91440" marT="45720" marB="45720">
+                    <a:lnL w="6350" cap="flat" cmpd="sng" algn="ctr">
+                      <a:solidFill>
+                        <a:srgbClr val="E5E7EB"/>
+                      </a:solidFill>
+                      <a:prstDash val="solid"/>
+                      <a:round/>
+                      <a:headEnd type="none" w="med" len="med"/>
+                      <a:tailEnd type="none" w="med" len="med"/>
+                    </a:lnL>
+                    <a:lnR w="6350" cap="flat" cmpd="sng" algn="ctr">
+                      <a:solidFill>
+                        <a:srgbClr val="E5E7EB"/>
+                      </a:solidFill>
+                      <a:prstDash val="solid"/>
+                      <a:round/>
+                      <a:headEnd type="none" w="med" len="med"/>
+                      <a:tailEnd type="none" w="med" len="med"/>
+                    </a:lnR>
+                    <a:lnT w="6350" cap="flat" cmpd="sng" algn="ctr">
+                      <a:solidFill>
+                        <a:srgbClr val="E5E7EB"/>
+                      </a:solidFill>
+                      <a:prstDash val="solid"/>
+                      <a:round/>
+                      <a:headEnd type="none" w="med" len="med"/>
+                      <a:tailEnd type="none" w="med" len="med"/>
+                    </a:lnT>
+                    <a:lnB w="6350" cap="flat" cmpd="sng" algn="ctr">
+                      <a:solidFill>
+                        <a:srgbClr val="E5E7EB"/>
+                      </a:solidFill>
+                      <a:prstDash val="solid"/>
+                      <a:round/>
+                      <a:headEnd type="none" w="med" len="med"/>
+                      <a:tailEnd type="none" w="med" len="med"/>
+                    </a:lnB>
+                  </a:tcPr>
+                </a:tc>
+                <a:tc>
+                  <a:txBody>
+                    <a:bodyPr/>
+                    <a:lstStyle/>
+                    <a:p>
+                      <a:pPr indent="0" marL="0">
+                        <a:buNone/>
+                      </a:pPr>
+                      <a:r>
+                        <a:rPr lang="en-US" sz="1500" dirty="0">
+                          <a:solidFill>
+                            <a:srgbClr val="4A4A4A"/>
+                          </a:solidFill>
+                          <a:latin typeface="Calibri" pitchFamily="34" charset="0"/>
+                          <a:ea typeface="Calibri" pitchFamily="34" charset="-122"/>
+                          <a:cs typeface="Calibri" pitchFamily="34" charset="-120"/>
+                        </a:rPr>
+                        <a:t>~2 – 3%</a:t>
+                      </a:r>
+                      <a:endParaRPr lang="en-US" sz="1500" dirty="0">
+                        <a:latin typeface="Calibri" charset="0"/>
+                        <a:ea typeface="Calibri" charset="0"/>
+                        <a:cs typeface="Calibri" charset="0"/>
+                      </a:endParaRPr>
+                    </a:p>
+                  </a:txBody>
+                  <a:tcPr marL="91440" marR="91440" marT="45720" marB="45720">
+                    <a:lnL w="6350" cap="flat" cmpd="sng" algn="ctr">
+                      <a:solidFill>
+                        <a:srgbClr val="E5E7EB"/>
+                      </a:solidFill>
+                      <a:prstDash val="solid"/>
+                      <a:round/>
+                      <a:headEnd type="none" w="med" len="med"/>
+                      <a:tailEnd type="none" w="med" len="med"/>
+                    </a:lnL>
+                    <a:lnR w="6350" cap="flat" cmpd="sng" algn="ctr">
+                      <a:solidFill>
+                        <a:srgbClr val="E5E7EB"/>
+                      </a:solidFill>
+                      <a:prstDash val="solid"/>
+                      <a:round/>
+                      <a:headEnd type="none" w="med" len="med"/>
+                      <a:tailEnd type="none" w="med" len="med"/>
+                    </a:lnR>
+                    <a:lnT w="6350" cap="flat" cmpd="sng" algn="ctr">
+                      <a:solidFill>
+                        <a:srgbClr val="E5E7EB"/>
+                      </a:solidFill>
+                      <a:prstDash val="solid"/>
+                      <a:round/>
+                      <a:headEnd type="none" w="med" len="med"/>
+                      <a:tailEnd type="none" w="med" len="med"/>
+                    </a:lnT>
+                    <a:lnB w="6350" cap="flat" cmpd="sng" algn="ctr">
+                      <a:solidFill>
+                        <a:srgbClr val="E5E7EB"/>
+                      </a:solidFill>
+                      <a:prstDash val="solid"/>
+                      <a:round/>
+                      <a:headEnd type="none" w="med" len="med"/>
+                      <a:tailEnd type="none" w="med" len="med"/>
+                    </a:lnB>
+                  </a:tcPr>
+                </a:tc>
+                <a:tc>
+                  <a:txBody>
+                    <a:bodyPr/>
+                    <a:lstStyle/>
+                    <a:p>
+                      <a:pPr indent="0" marL="0">
+                        <a:buNone/>
+                      </a:pPr>
+                      <a:r>
+                        <a:rPr lang="en-US" sz="1500" dirty="0">
+                          <a:solidFill>
+                            <a:srgbClr val="4A4A4A"/>
+                          </a:solidFill>
+                          <a:latin typeface="Calibri" pitchFamily="34" charset="0"/>
+                          <a:ea typeface="Calibri" pitchFamily="34" charset="-122"/>
+                          <a:cs typeface="Calibri" pitchFamily="34" charset="-120"/>
+                        </a:rPr>
+                        <a:t>Telco benchmark</a:t>
+                      </a:r>
+                      <a:endParaRPr lang="en-US" sz="1500" dirty="0">
+                        <a:latin typeface="Calibri" charset="0"/>
+                        <a:ea typeface="Calibri" charset="0"/>
+                        <a:cs typeface="Calibri" charset="0"/>
+                      </a:endParaRPr>
+                    </a:p>
+                  </a:txBody>
+                  <a:tcPr marL="91440" marR="91440" marT="45720" marB="45720">
+                    <a:lnL w="6350" cap="flat" cmpd="sng" algn="ctr">
+                      <a:solidFill>
+                        <a:srgbClr val="E5E7EB"/>
+                      </a:solidFill>
+                      <a:prstDash val="solid"/>
+                      <a:round/>
+                      <a:headEnd type="none" w="med" len="med"/>
+                      <a:tailEnd type="none" w="med" len="med"/>
+                    </a:lnL>
+                    <a:lnR w="6350" cap="flat" cmpd="sng" algn="ctr">
+                      <a:solidFill>
+                        <a:srgbClr val="E5E7EB"/>
+                      </a:solidFill>
+                      <a:prstDash val="solid"/>
+                      <a:round/>
+                      <a:headEnd type="none" w="med" len="med"/>
+                      <a:tailEnd type="none" w="med" len="med"/>
+                    </a:lnR>
+                    <a:lnT w="6350" cap="flat" cmpd="sng" algn="ctr">
+                      <a:solidFill>
+                        <a:srgbClr val="E5E7EB"/>
+                      </a:solidFill>
+                      <a:prstDash val="solid"/>
+                      <a:round/>
+                      <a:headEnd type="none" w="med" len="med"/>
+                      <a:tailEnd type="none" w="med" len="med"/>
+                    </a:lnT>
+                    <a:lnB w="6350" cap="flat" cmpd="sng" algn="ctr">
+                      <a:solidFill>
+                        <a:srgbClr val="E5E7EB"/>
+                      </a:solidFill>
+                      <a:prstDash val="solid"/>
+                      <a:round/>
+                      <a:headEnd type="none" w="med" len="med"/>
+                      <a:tailEnd type="none" w="med" len="med"/>
+                    </a:lnB>
+                  </a:tcPr>
+                </a:tc>
+              </a:tr>
+              <a:tr h="0">
+                <a:tc>
+                  <a:txBody>
+                    <a:bodyPr/>
+                    <a:lstStyle/>
+                    <a:p>
+                      <a:pPr indent="0" marL="0">
+                        <a:buNone/>
+                      </a:pPr>
+                      <a:r>
+                        <a:rPr lang="en-US" sz="1500" dirty="0">
+                          <a:solidFill>
+                            <a:srgbClr val="4A4A4A"/>
+                          </a:solidFill>
+                          <a:latin typeface="Calibri" pitchFamily="34" charset="0"/>
+                          <a:ea typeface="Calibri" pitchFamily="34" charset="-122"/>
+                          <a:cs typeface="Calibri" pitchFamily="34" charset="-120"/>
+                        </a:rPr>
+                        <a:t>MTN 1-4-1</a:t>
+                      </a:r>
+                      <a:endParaRPr lang="en-US" sz="1500" dirty="0">
+                        <a:latin typeface="Calibri" charset="0"/>
+                        <a:ea typeface="Calibri" charset="0"/>
+                        <a:cs typeface="Calibri" charset="0"/>
+                      </a:endParaRPr>
+                    </a:p>
+                  </a:txBody>
+                  <a:tcPr marL="91440" marR="91440" marT="45720" marB="45720">
+                    <a:lnL w="6350" cap="flat" cmpd="sng" algn="ctr">
+                      <a:solidFill>
+                        <a:srgbClr val="E5E7EB"/>
+                      </a:solidFill>
+                      <a:prstDash val="solid"/>
+                      <a:round/>
+                      <a:headEnd type="none" w="med" len="med"/>
+                      <a:tailEnd type="none" w="med" len="med"/>
+                    </a:lnL>
+                    <a:lnR w="6350" cap="flat" cmpd="sng" algn="ctr">
+                      <a:solidFill>
+                        <a:srgbClr val="E5E7EB"/>
+                      </a:solidFill>
+                      <a:prstDash val="solid"/>
+                      <a:round/>
+                      <a:headEnd type="none" w="med" len="med"/>
+                      <a:tailEnd type="none" w="med" len="med"/>
+                    </a:lnR>
+                    <a:lnT w="6350" cap="flat" cmpd="sng" algn="ctr">
+                      <a:solidFill>
+                        <a:srgbClr val="E5E7EB"/>
+                      </a:solidFill>
+                      <a:prstDash val="solid"/>
+                      <a:round/>
+                      <a:headEnd type="none" w="med" len="med"/>
+                      <a:tailEnd type="none" w="med" len="med"/>
+                    </a:lnT>
+                    <a:lnB w="6350" cap="flat" cmpd="sng" algn="ctr">
+                      <a:solidFill>
+                        <a:srgbClr val="E5E7EB"/>
+                      </a:solidFill>
+                      <a:prstDash val="solid"/>
+                      <a:round/>
+                      <a:headEnd type="none" w="med" len="med"/>
+                      <a:tailEnd type="none" w="med" len="med"/>
+                    </a:lnB>
+                  </a:tcPr>
+                </a:tc>
+                <a:tc>
+                  <a:txBody>
+                    <a:bodyPr/>
+                    <a:lstStyle/>
+                    <a:p>
+                      <a:pPr indent="0" marL="0">
+                        <a:buNone/>
+                      </a:pPr>
+                      <a:r>
+                        <a:rPr lang="en-US" sz="1500" dirty="0">
+                          <a:solidFill>
+                            <a:srgbClr val="4A4A4A"/>
+                          </a:solidFill>
+                          <a:latin typeface="Calibri" pitchFamily="34" charset="0"/>
+                          <a:ea typeface="Calibri" pitchFamily="34" charset="-122"/>
+                          <a:cs typeface="Calibri" pitchFamily="34" charset="-120"/>
+                        </a:rPr>
+                        <a:t>~1 – 2%</a:t>
+                      </a:r>
+                      <a:endParaRPr lang="en-US" sz="1500" dirty="0">
+                        <a:latin typeface="Calibri" charset="0"/>
+                        <a:ea typeface="Calibri" charset="0"/>
+                        <a:cs typeface="Calibri" charset="0"/>
+                      </a:endParaRPr>
+                    </a:p>
+                  </a:txBody>
+                  <a:tcPr marL="91440" marR="91440" marT="45720" marB="45720">
+                    <a:lnL w="6350" cap="flat" cmpd="sng" algn="ctr">
+                      <a:solidFill>
+                        <a:srgbClr val="E5E7EB"/>
+                      </a:solidFill>
+                      <a:prstDash val="solid"/>
+                      <a:round/>
+                      <a:headEnd type="none" w="med" len="med"/>
+                      <a:tailEnd type="none" w="med" len="med"/>
+                    </a:lnL>
+                    <a:lnR w="6350" cap="flat" cmpd="sng" algn="ctr">
+                      <a:solidFill>
+                        <a:srgbClr val="E5E7EB"/>
+                      </a:solidFill>
+                      <a:prstDash val="solid"/>
+                      <a:round/>
+                      <a:headEnd type="none" w="med" len="med"/>
+                      <a:tailEnd type="none" w="med" len="med"/>
+                    </a:lnR>
+                    <a:lnT w="6350" cap="flat" cmpd="sng" algn="ctr">
+                      <a:solidFill>
+                        <a:srgbClr val="E5E7EB"/>
+                      </a:solidFill>
+                      <a:prstDash val="solid"/>
+                      <a:round/>
+                      <a:headEnd type="none" w="med" len="med"/>
+                      <a:tailEnd type="none" w="med" len="med"/>
+                    </a:lnT>
+                    <a:lnB w="6350" cap="flat" cmpd="sng" algn="ctr">
+                      <a:solidFill>
+                        <a:srgbClr val="E5E7EB"/>
+                      </a:solidFill>
+                      <a:prstDash val="solid"/>
+                      <a:round/>
+                      <a:headEnd type="none" w="med" len="med"/>
+                      <a:tailEnd type="none" w="med" len="med"/>
+                    </a:lnB>
+                  </a:tcPr>
+                </a:tc>
+                <a:tc>
+                  <a:txBody>
+                    <a:bodyPr/>
+                    <a:lstStyle/>
+                    <a:p>
+                      <a:pPr indent="0" marL="0">
+                        <a:buNone/>
+                      </a:pPr>
+                      <a:r>
+                        <a:rPr lang="en-US" sz="1500" dirty="0">
+                          <a:solidFill>
+                            <a:srgbClr val="4A4A4A"/>
+                          </a:solidFill>
+                          <a:latin typeface="Calibri" pitchFamily="34" charset="0"/>
+                          <a:ea typeface="Calibri" pitchFamily="34" charset="-122"/>
+                          <a:cs typeface="Calibri" pitchFamily="34" charset="-120"/>
+                        </a:rPr>
+                        <a:t>Telco benchmark</a:t>
+                      </a:r>
+                      <a:endParaRPr lang="en-US" sz="1500" dirty="0">
+                        <a:latin typeface="Calibri" charset="0"/>
+                        <a:ea typeface="Calibri" charset="0"/>
+                        <a:cs typeface="Calibri" charset="0"/>
+                      </a:endParaRPr>
+                    </a:p>
+                  </a:txBody>
+                  <a:tcPr marL="91440" marR="91440" marT="45720" marB="45720">
+                    <a:lnL w="6350" cap="flat" cmpd="sng" algn="ctr">
+                      <a:solidFill>
+                        <a:srgbClr val="E5E7EB"/>
+                      </a:solidFill>
+                      <a:prstDash val="solid"/>
+                      <a:round/>
+                      <a:headEnd type="none" w="med" len="med"/>
+                      <a:tailEnd type="none" w="med" len="med"/>
+                    </a:lnL>
+                    <a:lnR w="6350" cap="flat" cmpd="sng" algn="ctr">
+                      <a:solidFill>
+                        <a:srgbClr val="E5E7EB"/>
+                      </a:solidFill>
+                      <a:prstDash val="solid"/>
+                      <a:round/>
+                      <a:headEnd type="none" w="med" len="med"/>
+                      <a:tailEnd type="none" w="med" len="med"/>
+                    </a:lnR>
+                    <a:lnT w="6350" cap="flat" cmpd="sng" algn="ctr">
+                      <a:solidFill>
+                        <a:srgbClr val="E5E7EB"/>
+                      </a:solidFill>
+                      <a:prstDash val="solid"/>
+                      <a:round/>
+                      <a:headEnd type="none" w="med" len="med"/>
+                      <a:tailEnd type="none" w="med" len="med"/>
+                    </a:lnT>
+                    <a:lnB w="6350" cap="flat" cmpd="sng" algn="ctr">
+                      <a:solidFill>
+                        <a:srgbClr val="E5E7EB"/>
+                      </a:solidFill>
+                      <a:prstDash val="solid"/>
+                      <a:round/>
+                      <a:headEnd type="none" w="med" len="med"/>
+                      <a:tailEnd type="none" w="med" len="med"/>
+                    </a:lnB>
+                  </a:tcPr>
+                </a:tc>
+              </a:tr>
+              <a:tr h="0">
+                <a:tc>
+                  <a:txBody>
+                    <a:bodyPr/>
+                    <a:lstStyle/>
+                    <a:p>
+                      <a:pPr indent="0" marL="0">
+                        <a:buNone/>
+                      </a:pPr>
+                      <a:r>
+                        <a:rPr lang="en-US" sz="1500" dirty="0">
+                          <a:solidFill>
+                            <a:srgbClr val="4A4A4A"/>
+                          </a:solidFill>
+                          <a:latin typeface="Calibri" pitchFamily="34" charset="0"/>
+                          <a:ea typeface="Calibri" pitchFamily="34" charset="-122"/>
+                          <a:cs typeface="Calibri" pitchFamily="34" charset="-120"/>
+                        </a:rPr>
+                        <a:t>Pick n Pay Smart Shopper</a:t>
+                      </a:r>
+                      <a:endParaRPr lang="en-US" sz="1500" dirty="0">
+                        <a:latin typeface="Calibri" charset="0"/>
+                        <a:ea typeface="Calibri" charset="0"/>
+                        <a:cs typeface="Calibri" charset="0"/>
+                      </a:endParaRPr>
+                    </a:p>
+                  </a:txBody>
+                  <a:tcPr marL="91440" marR="91440" marT="45720" marB="45720">
+                    <a:lnL w="6350" cap="flat" cmpd="sng" algn="ctr">
+                      <a:solidFill>
+                        <a:srgbClr val="E5E7EB"/>
+                      </a:solidFill>
+                      <a:prstDash val="solid"/>
+                      <a:round/>
+                      <a:headEnd type="none" w="med" len="med"/>
+                      <a:tailEnd type="none" w="med" len="med"/>
+                    </a:lnL>
+                    <a:lnR w="6350" cap="flat" cmpd="sng" algn="ctr">
+                      <a:solidFill>
+                        <a:srgbClr val="E5E7EB"/>
+                      </a:solidFill>
+                      <a:prstDash val="solid"/>
+                      <a:round/>
+                      <a:headEnd type="none" w="med" len="med"/>
+                      <a:tailEnd type="none" w="med" len="med"/>
+                    </a:lnR>
+                    <a:lnT w="6350" cap="flat" cmpd="sng" algn="ctr">
+                      <a:solidFill>
+                        <a:srgbClr val="E5E7EB"/>
+                      </a:solidFill>
+                      <a:prstDash val="solid"/>
+                      <a:round/>
+                      <a:headEnd type="none" w="med" len="med"/>
+                      <a:tailEnd type="none" w="med" len="med"/>
+                    </a:lnT>
+                    <a:lnB w="6350" cap="flat" cmpd="sng" algn="ctr">
+                      <a:solidFill>
+                        <a:srgbClr val="E5E7EB"/>
+                      </a:solidFill>
+                      <a:prstDash val="solid"/>
+                      <a:round/>
+                      <a:headEnd type="none" w="med" len="med"/>
+                      <a:tailEnd type="none" w="med" len="med"/>
+                    </a:lnB>
+                  </a:tcPr>
+                </a:tc>
+                <a:tc>
+                  <a:txBody>
+                    <a:bodyPr/>
+                    <a:lstStyle/>
+                    <a:p>
+                      <a:pPr indent="0" marL="0">
+                        <a:buNone/>
+                      </a:pPr>
+                      <a:r>
+                        <a:rPr lang="en-US" sz="1500" dirty="0">
+                          <a:solidFill>
+                            <a:srgbClr val="4A4A4A"/>
+                          </a:solidFill>
+                          <a:latin typeface="Calibri" pitchFamily="34" charset="0"/>
+                          <a:ea typeface="Calibri" pitchFamily="34" charset="-122"/>
+                          <a:cs typeface="Calibri" pitchFamily="34" charset="-120"/>
+                        </a:rPr>
+                        <a:t>~0.5 – 1%</a:t>
+                      </a:r>
+                      <a:endParaRPr lang="en-US" sz="1500" dirty="0">
+                        <a:latin typeface="Calibri" charset="0"/>
+                        <a:ea typeface="Calibri" charset="0"/>
+                        <a:cs typeface="Calibri" charset="0"/>
+                      </a:endParaRPr>
+                    </a:p>
+                  </a:txBody>
+                  <a:tcPr marL="91440" marR="91440" marT="45720" marB="45720">
+                    <a:lnL w="6350" cap="flat" cmpd="sng" algn="ctr">
+                      <a:solidFill>
+                        <a:srgbClr val="E5E7EB"/>
+                      </a:solidFill>
+                      <a:prstDash val="solid"/>
+                      <a:round/>
+                      <a:headEnd type="none" w="med" len="med"/>
+                      <a:tailEnd type="none" w="med" len="med"/>
+                    </a:lnL>
+                    <a:lnR w="6350" cap="flat" cmpd="sng" algn="ctr">
+                      <a:solidFill>
+                        <a:srgbClr val="E5E7EB"/>
+                      </a:solidFill>
+                      <a:prstDash val="solid"/>
+                      <a:round/>
+                      <a:headEnd type="none" w="med" len="med"/>
+                      <a:tailEnd type="none" w="med" len="med"/>
+                    </a:lnR>
+                    <a:lnT w="6350" cap="flat" cmpd="sng" algn="ctr">
+                      <a:solidFill>
+                        <a:srgbClr val="E5E7EB"/>
+                      </a:solidFill>
+                      <a:prstDash val="solid"/>
+                      <a:round/>
+                      <a:headEnd type="none" w="med" len="med"/>
+                      <a:tailEnd type="none" w="med" len="med"/>
+                    </a:lnT>
+                    <a:lnB w="6350" cap="flat" cmpd="sng" algn="ctr">
+                      <a:solidFill>
+                        <a:srgbClr val="E5E7EB"/>
+                      </a:solidFill>
+                      <a:prstDash val="solid"/>
+                      <a:round/>
+                      <a:headEnd type="none" w="med" len="med"/>
+                      <a:tailEnd type="none" w="med" len="med"/>
+                    </a:lnB>
+                  </a:tcPr>
+                </a:tc>
+                <a:tc>
+                  <a:txBody>
+                    <a:bodyPr/>
+                    <a:lstStyle/>
+                    <a:p>
+                      <a:pPr indent="0" marL="0">
+                        <a:buNone/>
+                      </a:pPr>
+                      <a:r>
+                        <a:rPr lang="en-US" sz="1500" dirty="0">
+                          <a:solidFill>
+                            <a:srgbClr val="4A4A4A"/>
+                          </a:solidFill>
+                          <a:latin typeface="Calibri" pitchFamily="34" charset="0"/>
+                          <a:ea typeface="Calibri" pitchFamily="34" charset="-122"/>
+                          <a:cs typeface="Calibri" pitchFamily="34" charset="-120"/>
+                        </a:rPr>
+                        <a:t>Grocery retail</a:t>
+                      </a:r>
+                      <a:endParaRPr lang="en-US" sz="1500" dirty="0">
+                        <a:latin typeface="Calibri" charset="0"/>
+                        <a:ea typeface="Calibri" charset="0"/>
+                        <a:cs typeface="Calibri" charset="0"/>
+                      </a:endParaRPr>
+                    </a:p>
+                  </a:txBody>
+                  <a:tcPr marL="91440" marR="91440" marT="45720" marB="45720">
+                    <a:lnL w="6350" cap="flat" cmpd="sng" algn="ctr">
+                      <a:solidFill>
+                        <a:srgbClr val="E5E7EB"/>
+                      </a:solidFill>
+                      <a:prstDash val="solid"/>
+                      <a:round/>
+                      <a:headEnd type="none" w="med" len="med"/>
+                      <a:tailEnd type="none" w="med" len="med"/>
+                    </a:lnL>
+                    <a:lnR w="6350" cap="flat" cmpd="sng" algn="ctr">
+                      <a:solidFill>
+                        <a:srgbClr val="E5E7EB"/>
+                      </a:solidFill>
+                      <a:prstDash val="solid"/>
+                      <a:round/>
+                      <a:headEnd type="none" w="med" len="med"/>
+                      <a:tailEnd type="none" w="med" len="med"/>
+                    </a:lnR>
+                    <a:lnT w="6350" cap="flat" cmpd="sng" algn="ctr">
+                      <a:solidFill>
+                        <a:srgbClr val="E5E7EB"/>
+                      </a:solidFill>
+                      <a:prstDash val="solid"/>
+                      <a:round/>
+                      <a:headEnd type="none" w="med" len="med"/>
+                      <a:tailEnd type="none" w="med" len="med"/>
+                    </a:lnT>
+                    <a:lnB w="6350" cap="flat" cmpd="sng" algn="ctr">
+                      <a:solidFill>
+                        <a:srgbClr val="E5E7EB"/>
+                      </a:solidFill>
+                      <a:prstDash val="solid"/>
+                      <a:round/>
+                      <a:headEnd type="none" w="med" len="med"/>
+                      <a:tailEnd type="none" w="med" len="med"/>
+                    </a:lnB>
+                  </a:tcPr>
+                </a:tc>
+              </a:tr>
+              <a:tr h="0">
+                <a:tc>
+                  <a:txBody>
+                    <a:bodyPr/>
+                    <a:lstStyle/>
+                    <a:p>
+                      <a:pPr indent="0" marL="0">
+                        <a:buNone/>
+                      </a:pPr>
+                      <a:r>
+                        <a:rPr lang="en-US" sz="1500" dirty="0">
+                          <a:solidFill>
+                            <a:srgbClr val="4A4A4A"/>
+                          </a:solidFill>
+                          <a:latin typeface="Calibri" pitchFamily="34" charset="0"/>
+                          <a:ea typeface="Calibri" pitchFamily="34" charset="-122"/>
+                          <a:cs typeface="Calibri" pitchFamily="34" charset="-120"/>
+                        </a:rPr>
+                        <a:t>Starbucks Rewards</a:t>
+                      </a:r>
+                      <a:endParaRPr lang="en-US" sz="1500" dirty="0">
+                        <a:latin typeface="Calibri" charset="0"/>
+                        <a:ea typeface="Calibri" charset="0"/>
+                        <a:cs typeface="Calibri" charset="0"/>
+                      </a:endParaRPr>
+                    </a:p>
+                  </a:txBody>
+                  <a:tcPr marL="91440" marR="91440" marT="45720" marB="45720">
+                    <a:lnL w="6350" cap="flat" cmpd="sng" algn="ctr">
+                      <a:solidFill>
+                        <a:srgbClr val="E5E7EB"/>
+                      </a:solidFill>
+                      <a:prstDash val="solid"/>
+                      <a:round/>
+                      <a:headEnd type="none" w="med" len="med"/>
+                      <a:tailEnd type="none" w="med" len="med"/>
+                    </a:lnL>
+                    <a:lnR w="6350" cap="flat" cmpd="sng" algn="ctr">
+                      <a:solidFill>
+                        <a:srgbClr val="E5E7EB"/>
+                      </a:solidFill>
+                      <a:prstDash val="solid"/>
+                      <a:round/>
+                      <a:headEnd type="none" w="med" len="med"/>
+                      <a:tailEnd type="none" w="med" len="med"/>
+                    </a:lnR>
+                    <a:lnT w="6350" cap="flat" cmpd="sng" algn="ctr">
+                      <a:solidFill>
+                        <a:srgbClr val="E5E7EB"/>
+                      </a:solidFill>
+                      <a:prstDash val="solid"/>
+                      <a:round/>
+                      <a:headEnd type="none" w="med" len="med"/>
+                      <a:tailEnd type="none" w="med" len="med"/>
+                    </a:lnT>
+                    <a:lnB w="6350" cap="flat" cmpd="sng" algn="ctr">
+                      <a:solidFill>
+                        <a:srgbClr val="E5E7EB"/>
+                      </a:solidFill>
+                      <a:prstDash val="solid"/>
+                      <a:round/>
+                      <a:headEnd type="none" w="med" len="med"/>
+                      <a:tailEnd type="none" w="med" len="med"/>
+                    </a:lnB>
+                  </a:tcPr>
+                </a:tc>
+                <a:tc>
+                  <a:txBody>
+                    <a:bodyPr/>
+                    <a:lstStyle/>
+                    <a:p>
+                      <a:pPr indent="0" marL="0">
+                        <a:buNone/>
+                      </a:pPr>
+                      <a:r>
+                        <a:rPr lang="en-US" sz="1500" dirty="0">
+                          <a:solidFill>
+                            <a:srgbClr val="4A4A4A"/>
+                          </a:solidFill>
+                          <a:latin typeface="Calibri" pitchFamily="34" charset="0"/>
+                          <a:ea typeface="Calibri" pitchFamily="34" charset="-122"/>
+                          <a:cs typeface="Calibri" pitchFamily="34" charset="-120"/>
+                        </a:rPr>
+                        <a:t>~4 – 5%</a:t>
+                      </a:r>
+                      <a:endParaRPr lang="en-US" sz="1500" dirty="0">
+                        <a:latin typeface="Calibri" charset="0"/>
+                        <a:ea typeface="Calibri" charset="0"/>
+                        <a:cs typeface="Calibri" charset="0"/>
+                      </a:endParaRPr>
+                    </a:p>
+                  </a:txBody>
+                  <a:tcPr marL="91440" marR="91440" marT="45720" marB="45720">
+                    <a:lnL w="6350" cap="flat" cmpd="sng" algn="ctr">
+                      <a:solidFill>
+                        <a:srgbClr val="E5E7EB"/>
+                      </a:solidFill>
+                      <a:prstDash val="solid"/>
+                      <a:round/>
+                      <a:headEnd type="none" w="med" len="med"/>
+                      <a:tailEnd type="none" w="med" len="med"/>
+                    </a:lnL>
+                    <a:lnR w="6350" cap="flat" cmpd="sng" algn="ctr">
+                      <a:solidFill>
+                        <a:srgbClr val="E5E7EB"/>
+                      </a:solidFill>
+                      <a:prstDash val="solid"/>
+                      <a:round/>
+                      <a:headEnd type="none" w="med" len="med"/>
+                      <a:tailEnd type="none" w="med" len="med"/>
+                    </a:lnR>
+                    <a:lnT w="6350" cap="flat" cmpd="sng" algn="ctr">
+                      <a:solidFill>
+                        <a:srgbClr val="E5E7EB"/>
+                      </a:solidFill>
+                      <a:prstDash val="solid"/>
+                      <a:round/>
+                      <a:headEnd type="none" w="med" len="med"/>
+                      <a:tailEnd type="none" w="med" len="med"/>
+                    </a:lnT>
+                    <a:lnB w="6350" cap="flat" cmpd="sng" algn="ctr">
+                      <a:solidFill>
+                        <a:srgbClr val="E5E7EB"/>
+                      </a:solidFill>
+                      <a:prstDash val="solid"/>
+                      <a:round/>
+                      <a:headEnd type="none" w="med" len="med"/>
+                      <a:tailEnd type="none" w="med" len="med"/>
+                    </a:lnB>
+                  </a:tcPr>
+                </a:tc>
+                <a:tc>
+                  <a:txBody>
+                    <a:bodyPr/>
+                    <a:lstStyle/>
+                    <a:p>
+                      <a:pPr indent="0" marL="0">
+                        <a:buNone/>
+                      </a:pPr>
+                      <a:r>
+                        <a:rPr lang="en-US" sz="1500" dirty="0">
+                          <a:solidFill>
+                            <a:srgbClr val="4A4A4A"/>
+                          </a:solidFill>
+                          <a:latin typeface="Calibri" pitchFamily="34" charset="0"/>
+                          <a:ea typeface="Calibri" pitchFamily="34" charset="-122"/>
+                          <a:cs typeface="Calibri" pitchFamily="34" charset="-120"/>
+                        </a:rPr>
+                        <a:t>High-engagement target</a:t>
+                      </a:r>
+                      <a:endParaRPr lang="en-US" sz="1500" dirty="0">
+                        <a:latin typeface="Calibri" charset="0"/>
+                        <a:ea typeface="Calibri" charset="0"/>
+                        <a:cs typeface="Calibri" charset="0"/>
+                      </a:endParaRPr>
+                    </a:p>
+                  </a:txBody>
+                  <a:tcPr marL="91440" marR="91440" marT="45720" marB="45720">
+                    <a:lnL w="6350" cap="flat" cmpd="sng" algn="ctr">
+                      <a:solidFill>
+                        <a:srgbClr val="E5E7EB"/>
+                      </a:solidFill>
+                      <a:prstDash val="solid"/>
+                      <a:round/>
+                      <a:headEnd type="none" w="med" len="med"/>
+                      <a:tailEnd type="none" w="med" len="med"/>
+                    </a:lnL>
+                    <a:lnR w="6350" cap="flat" cmpd="sng" algn="ctr">
+                      <a:solidFill>
+                        <a:srgbClr val="E5E7EB"/>
+                      </a:solidFill>
+                      <a:prstDash val="solid"/>
+                      <a:round/>
+                      <a:headEnd type="none" w="med" len="med"/>
+                      <a:tailEnd type="none" w="med" len="med"/>
+                    </a:lnR>
+                    <a:lnT w="6350" cap="flat" cmpd="sng" algn="ctr">
+                      <a:solidFill>
+                        <a:srgbClr val="E5E7EB"/>
+                      </a:solidFill>
+                      <a:prstDash val="solid"/>
+                      <a:round/>
+                      <a:headEnd type="none" w="med" len="med"/>
+                      <a:tailEnd type="none" w="med" len="med"/>
+                    </a:lnT>
+                    <a:lnB w="6350" cap="flat" cmpd="sng" algn="ctr">
+                      <a:solidFill>
+                        <a:srgbClr val="E5E7EB"/>
+                      </a:solidFill>
+                      <a:prstDash val="solid"/>
+                      <a:round/>
+                      <a:headEnd type="none" w="med" len="med"/>
+                      <a:tailEnd type="none" w="med" len="med"/>
+                    </a:lnB>
+                  </a:tcPr>
+                </a:tc>
+              </a:tr>
+              <a:tr h="0">
+                <a:tc>
+                  <a:txBody>
+                    <a:bodyPr/>
+                    <a:lstStyle/>
+                    <a:p>
+                      <a:pPr indent="0" marL="0">
+                        <a:buNone/>
+                      </a:pPr>
+                      <a:r>
+                        <a:rPr lang="en-US" sz="1500" b="1" dirty="0">
+                          <a:solidFill>
+                            <a:srgbClr val="047857"/>
+                          </a:solidFill>
+                          <a:latin typeface="Calibri" pitchFamily="34" charset="0"/>
+                          <a:ea typeface="Calibri" pitchFamily="34" charset="-122"/>
+                          <a:cs typeface="Calibri" pitchFamily="34" charset="-120"/>
+                        </a:rPr>
+                        <a:t>Maverick (proposed)</a:t>
+                      </a:r>
+                      <a:endParaRPr lang="en-US" sz="1500" dirty="0">
+                        <a:latin typeface="Calibri" charset="0"/>
+                        <a:ea typeface="Calibri" charset="0"/>
+                        <a:cs typeface="Calibri" charset="0"/>
+                      </a:endParaRPr>
+                    </a:p>
+                  </a:txBody>
+                  <a:tcPr marL="91440" marR="91440" marT="45720" marB="45720">
+                    <a:lnL w="6350" cap="flat" cmpd="sng" algn="ctr">
+                      <a:solidFill>
+                        <a:srgbClr val="E5E7EB"/>
+                      </a:solidFill>
+                      <a:prstDash val="solid"/>
+                      <a:round/>
+                      <a:headEnd type="none" w="med" len="med"/>
+                      <a:tailEnd type="none" w="med" len="med"/>
+                    </a:lnL>
+                    <a:lnR w="6350" cap="flat" cmpd="sng" algn="ctr">
+                      <a:solidFill>
+                        <a:srgbClr val="E5E7EB"/>
+                      </a:solidFill>
+                      <a:prstDash val="solid"/>
+                      <a:round/>
+                      <a:headEnd type="none" w="med" len="med"/>
+                      <a:tailEnd type="none" w="med" len="med"/>
+                    </a:lnR>
+                    <a:lnT w="6350" cap="flat" cmpd="sng" algn="ctr">
+                      <a:solidFill>
+                        <a:srgbClr val="E5E7EB"/>
+                      </a:solidFill>
+                      <a:prstDash val="solid"/>
+                      <a:round/>
+                      <a:headEnd type="none" w="med" len="med"/>
+                      <a:tailEnd type="none" w="med" len="med"/>
+                    </a:lnT>
+                    <a:lnB w="6350" cap="flat" cmpd="sng" algn="ctr">
+                      <a:solidFill>
+                        <a:srgbClr val="E5E7EB"/>
+                      </a:solidFill>
+                      <a:prstDash val="solid"/>
+                      <a:round/>
+                      <a:headEnd type="none" w="med" len="med"/>
+                      <a:tailEnd type="none" w="med" len="med"/>
+                    </a:lnB>
+                  </a:tcPr>
+                </a:tc>
+                <a:tc>
+                  <a:txBody>
+                    <a:bodyPr/>
+                    <a:lstStyle/>
+                    <a:p>
+                      <a:pPr indent="0" marL="0">
+                        <a:buNone/>
+                      </a:pPr>
+                      <a:r>
+                        <a:rPr lang="en-US" sz="1500" b="1" dirty="0">
+                          <a:solidFill>
+                            <a:srgbClr val="047857"/>
+                          </a:solidFill>
+                          <a:latin typeface="Calibri" pitchFamily="34" charset="0"/>
+                          <a:ea typeface="Calibri" pitchFamily="34" charset="-122"/>
+                          <a:cs typeface="Calibri" pitchFamily="34" charset="-120"/>
+                        </a:rPr>
+                        <a:t>~2.2%</a:t>
+                      </a:r>
+                      <a:endParaRPr lang="en-US" sz="1500" dirty="0">
+                        <a:latin typeface="Calibri" charset="0"/>
+                        <a:ea typeface="Calibri" charset="0"/>
+                        <a:cs typeface="Calibri" charset="0"/>
+                      </a:endParaRPr>
+                    </a:p>
+                  </a:txBody>
+                  <a:tcPr marL="91440" marR="91440" marT="45720" marB="45720">
+                    <a:lnL w="6350" cap="flat" cmpd="sng" algn="ctr">
+                      <a:solidFill>
+                        <a:srgbClr val="E5E7EB"/>
+                      </a:solidFill>
+                      <a:prstDash val="solid"/>
+                      <a:round/>
+                      <a:headEnd type="none" w="med" len="med"/>
+                      <a:tailEnd type="none" w="med" len="med"/>
+                    </a:lnL>
+                    <a:lnR w="6350" cap="flat" cmpd="sng" algn="ctr">
+                      <a:solidFill>
+                        <a:srgbClr val="E5E7EB"/>
+                      </a:solidFill>
+                      <a:prstDash val="solid"/>
+                      <a:round/>
+                      <a:headEnd type="none" w="med" len="med"/>
+                      <a:tailEnd type="none" w="med" len="med"/>
+                    </a:lnR>
+                    <a:lnT w="6350" cap="flat" cmpd="sng" algn="ctr">
+                      <a:solidFill>
+                        <a:srgbClr val="E5E7EB"/>
+                      </a:solidFill>
+                      <a:prstDash val="solid"/>
+                      <a:round/>
+                      <a:headEnd type="none" w="med" len="med"/>
+                      <a:tailEnd type="none" w="med" len="med"/>
+                    </a:lnT>
+                    <a:lnB w="6350" cap="flat" cmpd="sng" algn="ctr">
+                      <a:solidFill>
+                        <a:srgbClr val="E5E7EB"/>
+                      </a:solidFill>
+                      <a:prstDash val="solid"/>
+                      <a:round/>
+                      <a:headEnd type="none" w="med" len="med"/>
+                      <a:tailEnd type="none" w="med" len="med"/>
+                    </a:lnB>
+                  </a:tcPr>
+                </a:tc>
+                <a:tc>
+                  <a:txBody>
+                    <a:bodyPr/>
+                    <a:lstStyle/>
+                    <a:p>
+                      <a:pPr indent="0" marL="0">
+                        <a:buNone/>
+                      </a:pPr>
+                      <a:r>
+                        <a:rPr lang="en-US" sz="1500" dirty="0">
+                          <a:solidFill>
+                            <a:srgbClr val="4A4A4A"/>
+                          </a:solidFill>
+                          <a:latin typeface="Calibri" pitchFamily="34" charset="0"/>
+                          <a:ea typeface="Calibri" pitchFamily="34" charset="-122"/>
+                          <a:cs typeface="Calibri" pitchFamily="34" charset="-120"/>
+                        </a:rPr>
+                        <a:t>Sweet spot</a:t>
+                      </a:r>
+                      <a:endParaRPr lang="en-US" sz="1500" dirty="0">
+                        <a:latin typeface="Calibri" charset="0"/>
+                        <a:ea typeface="Calibri" charset="0"/>
+                        <a:cs typeface="Calibri" charset="0"/>
+                      </a:endParaRPr>
+                    </a:p>
+                  </a:txBody>
+                  <a:tcPr marL="91440" marR="91440" marT="45720" marB="45720">
+                    <a:lnL w="6350" cap="flat" cmpd="sng" algn="ctr">
+                      <a:solidFill>
+                        <a:srgbClr val="E5E7EB"/>
+                      </a:solidFill>
+                      <a:prstDash val="solid"/>
+                      <a:round/>
+                      <a:headEnd type="none" w="med" len="med"/>
+                      <a:tailEnd type="none" w="med" len="med"/>
+                    </a:lnL>
+                    <a:lnR w="6350" cap="flat" cmpd="sng" algn="ctr">
+                      <a:solidFill>
+                        <a:srgbClr val="E5E7EB"/>
+                      </a:solidFill>
+                      <a:prstDash val="solid"/>
+                      <a:round/>
+                      <a:headEnd type="none" w="med" len="med"/>
+                      <a:tailEnd type="none" w="med" len="med"/>
+                    </a:lnR>
+                    <a:lnT w="6350" cap="flat" cmpd="sng" algn="ctr">
+                      <a:solidFill>
+                        <a:srgbClr val="E5E7EB"/>
+                      </a:solidFill>
+                      <a:prstDash val="solid"/>
+                      <a:round/>
+                      <a:headEnd type="none" w="med" len="med"/>
+                      <a:tailEnd type="none" w="med" len="med"/>
+                    </a:lnT>
+                    <a:lnB w="6350" cap="flat" cmpd="sng" algn="ctr">
+                      <a:solidFill>
+                        <a:srgbClr val="E5E7EB"/>
+                      </a:solidFill>
+                      <a:prstDash val="solid"/>
+                      <a:round/>
+                      <a:headEnd type="none" w="med" len="med"/>
+                      <a:tailEnd type="none" w="med" len="med"/>
+                    </a:lnB>
+                  </a:tcPr>
+                </a:tc>
+              </a:tr>
+            </a:tbl>
+          </a:graphicData>
+        </a:graphic>
+      </p:graphicFrame>
+    </p:spTree>
+  </p:cSld>
+  <p:clrMapOvr>
+    <a:masterClrMapping/>
+  </p:clrMapOvr>
+</p:sld>
+</file>
+
+<file path=ppt/slides/slide5.xml><?xml version="1.0" encoding="utf-8"?>
+<p:sld xmlns:a="http://schemas.openxmlformats.org/drawingml/2006/main" xmlns:r="http://schemas.openxmlformats.org/officeDocument/2006/relationships" xmlns:p="http://schemas.openxmlformats.org/presentationml/2006/main">
+  <p:cSld name="Slide 5">
+    <p:bg>
+      <p:bgPr>
+        <a:solidFill>
+          <a:srgbClr val="FFFFFF"/>
+        </a:solidFill>
+      </p:bgPr>
+    </p:bg>
+    <p:spTree>
+      <p:nvGrpSpPr>
+        <p:cNvPr id="1" name=""/>
+        <p:cNvGrpSpPr/>
+        <p:nvPr/>
+      </p:nvGrpSpPr>
+      <p:grpSpPr>
+        <a:xfrm>
+          <a:off x="0" y="0"/>
+          <a:ext cx="0" cy="0"/>
+          <a:chOff x="0" y="0"/>
+          <a:chExt cx="0" cy="0"/>
+        </a:xfrm>
+      </p:grpSpPr>
       <p:sp>
         <p:nvSpPr>
-          <p:cNvPr id="8" name="Shape 6"/>
+          <p:cNvPr id="2" name="Shape 0"/>
           <p:cNvSpPr/>
           <p:nvPr/>
         </p:nvSpPr>
         <p:spPr>
           <a:xfrm>
-            <a:off x="914400" y="2103120"/>
-            <a:ext cx="5029200" cy="2377440"/>
+            <a:off x="0" y="0"/>
+            <a:ext cx="12188952" cy="109728"/>
           </a:xfrm>
           <a:prstGeom prst="rect">
             <a:avLst/>
           </a:prstGeom>
           <a:solidFill>
-            <a:srgbClr val="F9FAFB"/>
+            <a:srgbClr val="FDC800"/>
           </a:solidFill>
-          <a:ln w="25400">
+          <a:ln w="12700">
             <a:solidFill>
-              <a:srgbClr val="E5E7EB"/>
+              <a:srgbClr val="FDC800"/>
             </a:solidFill>
             <a:prstDash val="solid"/>
           </a:ln>
@@ -3626,14 +5344,14 @@
       </p:sp>
       <p:sp>
         <p:nvSpPr>
-          <p:cNvPr id="9" name="Text 7"/>
+          <p:cNvPr id="3" name="Text 1"/>
           <p:cNvSpPr/>
           <p:nvPr/>
         </p:nvSpPr>
         <p:spPr>
           <a:xfrm>
-            <a:off x="914400" y="2286000"/>
-            <a:ext cx="5029200" cy="914400"/>
+            <a:off x="457200" y="6446520"/>
+            <a:ext cx="4572000" cy="274320"/>
           </a:xfrm>
           <a:prstGeom prst="rect">
             <a:avLst/>
@@ -3645,34 +5363,34 @@
           <a:bodyPr wrap="square" rtlCol="0" anchor="ctr"/>
           <a:lstStyle/>
           <a:p>
-            <a:pPr algn="ctr" indent="0" marL="0">
+            <a:pPr indent="0" marL="0">
               <a:buNone/>
             </a:pPr>
             <a:r>
-              <a:rPr lang="en-US" sz="5400" b="1" dirty="0">
+              <a:rPr lang="en-US" sz="1000" b="1" dirty="0">
                 <a:solidFill>
-                  <a:srgbClr val="3C3C3B"/>
+                  <a:srgbClr val="A7A9AC"/>
                 </a:solidFill>
                 <a:latin typeface="Calibri" pitchFamily="34" charset="0"/>
                 <a:ea typeface="Calibri" pitchFamily="34" charset="-122"/>
                 <a:cs typeface="Calibri" pitchFamily="34" charset="-120"/>
               </a:rPr>
-              <a:t>10×</a:t>
+              <a:t>MAVERICK LOYALTY</a:t>
             </a:r>
-            <a:endParaRPr lang="en-US" sz="5400" dirty="0"/>
+            <a:endParaRPr lang="en-US" sz="1000" dirty="0"/>
           </a:p>
         </p:txBody>
       </p:sp>
       <p:sp>
         <p:nvSpPr>
-          <p:cNvPr id="10" name="Text 8"/>
+          <p:cNvPr id="4" name="Text 2"/>
           <p:cNvSpPr/>
           <p:nvPr/>
         </p:nvSpPr>
         <p:spPr>
           <a:xfrm>
-            <a:off x="914400" y="3291840"/>
-            <a:ext cx="5029200" cy="365760"/>
+            <a:off x="10817352" y="6446520"/>
+            <a:ext cx="914400" cy="274320"/>
           </a:xfrm>
           <a:prstGeom prst="rect">
             <a:avLst/>
@@ -3684,11 +5402,11 @@
           <a:bodyPr wrap="square" rtlCol="0" anchor="ctr"/>
           <a:lstStyle/>
           <a:p>
-            <a:pPr algn="ctr" indent="0" marL="0">
+            <a:pPr algn="r" indent="0" marL="0">
               <a:buNone/>
             </a:pPr>
             <a:r>
-              <a:rPr lang="en-US" sz="1300" b="1" dirty="0">
+              <a:rPr lang="en-US" sz="1000" dirty="0">
                 <a:solidFill>
                   <a:srgbClr val="A7A9AC"/>
                 </a:solidFill>
@@ -3696,22 +5414,22 @@
                 <a:ea typeface="Calibri" pitchFamily="34" charset="-122"/>
                 <a:cs typeface="Calibri" pitchFamily="34" charset="-120"/>
               </a:rPr>
-              <a:t>10 PTS PER R1 AIRTIME</a:t>
+              <a:t>5 / 7</a:t>
             </a:r>
-            <a:endParaRPr lang="en-US" sz="1300" dirty="0"/>
+            <a:endParaRPr lang="en-US" sz="1000" dirty="0"/>
           </a:p>
         </p:txBody>
       </p:sp>
       <p:sp>
         <p:nvSpPr>
-          <p:cNvPr id="11" name="Text 9"/>
+          <p:cNvPr id="5" name="Text 3"/>
           <p:cNvSpPr/>
           <p:nvPr/>
         </p:nvSpPr>
         <p:spPr>
           <a:xfrm>
-            <a:off x="1097280" y="3703320"/>
-            <a:ext cx="4663440" cy="640080"/>
+            <a:off x="457200" y="365760"/>
+            <a:ext cx="11274552" cy="640080"/>
           </a:xfrm>
           <a:prstGeom prst="rect">
             <a:avLst/>
@@ -3723,44 +5441,44 @@
           <a:bodyPr wrap="square" rtlCol="0" anchor="ctr"/>
           <a:lstStyle/>
           <a:p>
-            <a:pPr algn="ctr" indent="0" marL="0">
+            <a:pPr indent="0" marL="0">
               <a:buNone/>
             </a:pPr>
             <a:r>
-              <a:rPr lang="en-US" sz="1400" dirty="0">
+              <a:rPr lang="en-US" sz="3200" b="1" dirty="0">
                 <a:solidFill>
-                  <a:srgbClr val="4A4A4A"/>
+                  <a:srgbClr val="3C3C3B"/>
                 </a:solidFill>
                 <a:latin typeface="Calibri" pitchFamily="34" charset="0"/>
                 <a:ea typeface="Calibri" pitchFamily="34" charset="-122"/>
                 <a:cs typeface="Calibri" pitchFamily="34" charset="-120"/>
               </a:rPr>
-              <a:t>Cheapest reward reachable after ~R530 in airtime spend.</a:t>
+              <a:t>Recommendation: Adjust Both Dials</a:t>
             </a:r>
-            <a:endParaRPr lang="en-US" sz="1400" dirty="0"/>
+            <a:endParaRPr lang="en-US" sz="3200" dirty="0"/>
           </a:p>
         </p:txBody>
       </p:sp>
       <p:sp>
         <p:nvSpPr>
-          <p:cNvPr id="12" name="Shape 10"/>
+          <p:cNvPr id="6" name="Shape 4"/>
           <p:cNvSpPr/>
           <p:nvPr/>
         </p:nvSpPr>
         <p:spPr>
           <a:xfrm>
-            <a:off x="6245352" y="2103120"/>
-            <a:ext cx="5029200" cy="2377440"/>
+            <a:off x="457200" y="960120"/>
+            <a:ext cx="2743200" cy="45720"/>
           </a:xfrm>
           <a:prstGeom prst="rect">
             <a:avLst/>
           </a:prstGeom>
           <a:solidFill>
-            <a:srgbClr val="F9FAFB"/>
+            <a:srgbClr val="FDC800"/>
           </a:solidFill>
-          <a:ln w="25400">
+          <a:ln w="12700">
             <a:solidFill>
-              <a:srgbClr val="E5E7EB"/>
+              <a:srgbClr val="FDC800"/>
             </a:solidFill>
             <a:prstDash val="solid"/>
           </a:ln>
@@ -3768,14 +5486,14 @@
       </p:sp>
       <p:sp>
         <p:nvSpPr>
-          <p:cNvPr id="13" name="Text 11"/>
+          <p:cNvPr id="7" name="Text 5"/>
           <p:cNvSpPr/>
           <p:nvPr/>
         </p:nvSpPr>
         <p:spPr>
           <a:xfrm>
-            <a:off x="6245352" y="2286000"/>
-            <a:ext cx="5029200" cy="914400"/>
+            <a:off x="457200" y="1234440"/>
+            <a:ext cx="11274552" cy="640080"/>
           </a:xfrm>
           <a:prstGeom prst="rect">
             <a:avLst/>
@@ -3787,34 +5505,1413 @@
           <a:bodyPr wrap="square" rtlCol="0" anchor="ctr"/>
           <a:lstStyle/>
           <a:p>
-            <a:pPr algn="ctr" indent="0" marL="0">
+            <a:pPr indent="0" marL="0">
               <a:buNone/>
             </a:pPr>
             <a:r>
-              <a:rPr lang="en-US" sz="5400" b="1" dirty="0">
+              <a:rPr lang="en-US" sz="1700" dirty="0">
                 <a:solidFill>
-                  <a:srgbClr val="3C3C3B"/>
+                  <a:srgbClr val="4A4A4A"/>
                 </a:solidFill>
                 <a:latin typeface="Calibri" pitchFamily="34" charset="0"/>
                 <a:ea typeface="Calibri" pitchFamily="34" charset="-122"/>
                 <a:cs typeface="Calibri" pitchFamily="34" charset="-120"/>
               </a:rPr>
-              <a:t>20×</a:t>
+              <a:t>The earn rate alone is not the issue — the redemption conversion is overly punitive. Move both for a balanced fix.</a:t>
             </a:r>
-            <a:endParaRPr lang="en-US" sz="5400" dirty="0"/>
+            <a:endParaRPr lang="en-US" sz="1700" dirty="0"/>
           </a:p>
         </p:txBody>
       </p:sp>
+      <p:graphicFrame>
+        <p:nvGraphicFramePr>
+          <p:cNvPr id="6" name="Table 0"/>
+          <p:cNvGraphicFramePr>
+            <a:graphicFrameLocks noGrp="1"/>
+          </p:cNvGraphicFramePr>
+          <p:nvPr>
+            <p:extLst>
+              <p:ext uri="{D42A27DB-BD31-4B8C-83A1-F6EECF244321}">
+                <p14:modId xmlns:p14="http://schemas.microsoft.com/office/powerpoint/2010/main" val="1579011935"/>
+              </p:ext>
+            </p:extLst>
+          </p:nvPr>
+        </p:nvGraphicFramePr>
+        <p:xfrm>
+          <a:off x="457200" y="2057400"/>
+          <a:ext cx="11274552" cy="914400"/>
+        </p:xfrm>
+        <a:graphic>
+          <a:graphicData uri="http://schemas.openxmlformats.org/drawingml/2006/table">
+            <a:tbl>
+              <a:tblPr/>
+              <a:tblGrid>
+                <a:gridCol w="2818638"/>
+                <a:gridCol w="2818638"/>
+                <a:gridCol w="2818638"/>
+                <a:gridCol w="2818638"/>
+              </a:tblGrid>
+              <a:tr h="0">
+                <a:tc>
+                  <a:txBody>
+                    <a:bodyPr/>
+                    <a:lstStyle/>
+                    <a:p>
+                      <a:pPr indent="0" marL="0">
+                        <a:buNone/>
+                      </a:pPr>
+                      <a:r>
+                        <a:rPr lang="en-US" sz="1500" b="1" dirty="0">
+                          <a:solidFill>
+                            <a:srgbClr val="3C3C3B"/>
+                          </a:solidFill>
+                          <a:latin typeface="Calibri" pitchFamily="34" charset="0"/>
+                          <a:ea typeface="Calibri" pitchFamily="34" charset="-122"/>
+                          <a:cs typeface="Calibri" pitchFamily="34" charset="-120"/>
+                        </a:rPr>
+                        <a:t>Dial</a:t>
+                      </a:r>
+                      <a:endParaRPr lang="en-US" sz="1500" dirty="0">
+                        <a:latin typeface="Calibri" charset="0"/>
+                        <a:ea typeface="Calibri" charset="0"/>
+                        <a:cs typeface="Calibri" charset="0"/>
+                      </a:endParaRPr>
+                    </a:p>
+                  </a:txBody>
+                  <a:tcPr marL="91440" marR="91440" marT="45720" marB="45720">
+                    <a:lnL w="6350" cap="flat" cmpd="sng" algn="ctr">
+                      <a:solidFill>
+                        <a:srgbClr val="E5E7EB"/>
+                      </a:solidFill>
+                      <a:prstDash val="solid"/>
+                      <a:round/>
+                      <a:headEnd type="none" w="med" len="med"/>
+                      <a:tailEnd type="none" w="med" len="med"/>
+                    </a:lnL>
+                    <a:lnR w="6350" cap="flat" cmpd="sng" algn="ctr">
+                      <a:solidFill>
+                        <a:srgbClr val="E5E7EB"/>
+                      </a:solidFill>
+                      <a:prstDash val="solid"/>
+                      <a:round/>
+                      <a:headEnd type="none" w="med" len="med"/>
+                      <a:tailEnd type="none" w="med" len="med"/>
+                    </a:lnR>
+                    <a:lnT w="6350" cap="flat" cmpd="sng" algn="ctr">
+                      <a:solidFill>
+                        <a:srgbClr val="E5E7EB"/>
+                      </a:solidFill>
+                      <a:prstDash val="solid"/>
+                      <a:round/>
+                      <a:headEnd type="none" w="med" len="med"/>
+                      <a:tailEnd type="none" w="med" len="med"/>
+                    </a:lnT>
+                    <a:lnB w="6350" cap="flat" cmpd="sng" algn="ctr">
+                      <a:solidFill>
+                        <a:srgbClr val="E5E7EB"/>
+                      </a:solidFill>
+                      <a:prstDash val="solid"/>
+                      <a:round/>
+                      <a:headEnd type="none" w="med" len="med"/>
+                      <a:tailEnd type="none" w="med" len="med"/>
+                    </a:lnB>
+                    <a:solidFill>
+                      <a:srgbClr val="FDC800"/>
+                    </a:solidFill>
+                  </a:tcPr>
+                </a:tc>
+                <a:tc>
+                  <a:txBody>
+                    <a:bodyPr/>
+                    <a:lstStyle/>
+                    <a:p>
+                      <a:pPr indent="0" marL="0">
+                        <a:buNone/>
+                      </a:pPr>
+                      <a:r>
+                        <a:rPr lang="en-US" sz="1500" b="1" dirty="0">
+                          <a:solidFill>
+                            <a:srgbClr val="3C3C3B"/>
+                          </a:solidFill>
+                          <a:latin typeface="Calibri" pitchFamily="34" charset="0"/>
+                          <a:ea typeface="Calibri" pitchFamily="34" charset="-122"/>
+                          <a:cs typeface="Calibri" pitchFamily="34" charset="-120"/>
+                        </a:rPr>
+                        <a:t>Current</a:t>
+                      </a:r>
+                      <a:endParaRPr lang="en-US" sz="1500" dirty="0">
+                        <a:latin typeface="Calibri" charset="0"/>
+                        <a:ea typeface="Calibri" charset="0"/>
+                        <a:cs typeface="Calibri" charset="0"/>
+                      </a:endParaRPr>
+                    </a:p>
+                  </a:txBody>
+                  <a:tcPr marL="91440" marR="91440" marT="45720" marB="45720">
+                    <a:lnL w="6350" cap="flat" cmpd="sng" algn="ctr">
+                      <a:solidFill>
+                        <a:srgbClr val="E5E7EB"/>
+                      </a:solidFill>
+                      <a:prstDash val="solid"/>
+                      <a:round/>
+                      <a:headEnd type="none" w="med" len="med"/>
+                      <a:tailEnd type="none" w="med" len="med"/>
+                    </a:lnL>
+                    <a:lnR w="6350" cap="flat" cmpd="sng" algn="ctr">
+                      <a:solidFill>
+                        <a:srgbClr val="E5E7EB"/>
+                      </a:solidFill>
+                      <a:prstDash val="solid"/>
+                      <a:round/>
+                      <a:headEnd type="none" w="med" len="med"/>
+                      <a:tailEnd type="none" w="med" len="med"/>
+                    </a:lnR>
+                    <a:lnT w="6350" cap="flat" cmpd="sng" algn="ctr">
+                      <a:solidFill>
+                        <a:srgbClr val="E5E7EB"/>
+                      </a:solidFill>
+                      <a:prstDash val="solid"/>
+                      <a:round/>
+                      <a:headEnd type="none" w="med" len="med"/>
+                      <a:tailEnd type="none" w="med" len="med"/>
+                    </a:lnT>
+                    <a:lnB w="6350" cap="flat" cmpd="sng" algn="ctr">
+                      <a:solidFill>
+                        <a:srgbClr val="E5E7EB"/>
+                      </a:solidFill>
+                      <a:prstDash val="solid"/>
+                      <a:round/>
+                      <a:headEnd type="none" w="med" len="med"/>
+                      <a:tailEnd type="none" w="med" len="med"/>
+                    </a:lnB>
+                    <a:solidFill>
+                      <a:srgbClr val="FDC800"/>
+                    </a:solidFill>
+                  </a:tcPr>
+                </a:tc>
+                <a:tc>
+                  <a:txBody>
+                    <a:bodyPr/>
+                    <a:lstStyle/>
+                    <a:p>
+                      <a:pPr indent="0" marL="0">
+                        <a:buNone/>
+                      </a:pPr>
+                      <a:r>
+                        <a:rPr lang="en-US" sz="1500" b="1" dirty="0">
+                          <a:solidFill>
+                            <a:srgbClr val="3C3C3B"/>
+                          </a:solidFill>
+                          <a:latin typeface="Calibri" pitchFamily="34" charset="0"/>
+                          <a:ea typeface="Calibri" pitchFamily="34" charset="-122"/>
+                          <a:cs typeface="Calibri" pitchFamily="34" charset="-120"/>
+                        </a:rPr>
+                        <a:t>Recommended</a:t>
+                      </a:r>
+                      <a:endParaRPr lang="en-US" sz="1500" dirty="0">
+                        <a:latin typeface="Calibri" charset="0"/>
+                        <a:ea typeface="Calibri" charset="0"/>
+                        <a:cs typeface="Calibri" charset="0"/>
+                      </a:endParaRPr>
+                    </a:p>
+                  </a:txBody>
+                  <a:tcPr marL="91440" marR="91440" marT="45720" marB="45720">
+                    <a:lnL w="6350" cap="flat" cmpd="sng" algn="ctr">
+                      <a:solidFill>
+                        <a:srgbClr val="E5E7EB"/>
+                      </a:solidFill>
+                      <a:prstDash val="solid"/>
+                      <a:round/>
+                      <a:headEnd type="none" w="med" len="med"/>
+                      <a:tailEnd type="none" w="med" len="med"/>
+                    </a:lnL>
+                    <a:lnR w="6350" cap="flat" cmpd="sng" algn="ctr">
+                      <a:solidFill>
+                        <a:srgbClr val="E5E7EB"/>
+                      </a:solidFill>
+                      <a:prstDash val="solid"/>
+                      <a:round/>
+                      <a:headEnd type="none" w="med" len="med"/>
+                      <a:tailEnd type="none" w="med" len="med"/>
+                    </a:lnR>
+                    <a:lnT w="6350" cap="flat" cmpd="sng" algn="ctr">
+                      <a:solidFill>
+                        <a:srgbClr val="E5E7EB"/>
+                      </a:solidFill>
+                      <a:prstDash val="solid"/>
+                      <a:round/>
+                      <a:headEnd type="none" w="med" len="med"/>
+                      <a:tailEnd type="none" w="med" len="med"/>
+                    </a:lnT>
+                    <a:lnB w="6350" cap="flat" cmpd="sng" algn="ctr">
+                      <a:solidFill>
+                        <a:srgbClr val="E5E7EB"/>
+                      </a:solidFill>
+                      <a:prstDash val="solid"/>
+                      <a:round/>
+                      <a:headEnd type="none" w="med" len="med"/>
+                      <a:tailEnd type="none" w="med" len="med"/>
+                    </a:lnB>
+                    <a:solidFill>
+                      <a:srgbClr val="FDC800"/>
+                    </a:solidFill>
+                  </a:tcPr>
+                </a:tc>
+                <a:tc>
+                  <a:txBody>
+                    <a:bodyPr/>
+                    <a:lstStyle/>
+                    <a:p>
+                      <a:pPr indent="0" marL="0">
+                        <a:buNone/>
+                      </a:pPr>
+                      <a:r>
+                        <a:rPr lang="en-US" sz="1500" b="1" dirty="0">
+                          <a:solidFill>
+                            <a:srgbClr val="3C3C3B"/>
+                          </a:solidFill>
+                          <a:latin typeface="Calibri" pitchFamily="34" charset="0"/>
+                          <a:ea typeface="Calibri" pitchFamily="34" charset="-122"/>
+                          <a:cs typeface="Calibri" pitchFamily="34" charset="-120"/>
+                        </a:rPr>
+                        <a:t>Why</a:t>
+                      </a:r>
+                      <a:endParaRPr lang="en-US" sz="1500" dirty="0">
+                        <a:latin typeface="Calibri" charset="0"/>
+                        <a:ea typeface="Calibri" charset="0"/>
+                        <a:cs typeface="Calibri" charset="0"/>
+                      </a:endParaRPr>
+                    </a:p>
+                  </a:txBody>
+                  <a:tcPr marL="91440" marR="91440" marT="45720" marB="45720">
+                    <a:lnL w="6350" cap="flat" cmpd="sng" algn="ctr">
+                      <a:solidFill>
+                        <a:srgbClr val="E5E7EB"/>
+                      </a:solidFill>
+                      <a:prstDash val="solid"/>
+                      <a:round/>
+                      <a:headEnd type="none" w="med" len="med"/>
+                      <a:tailEnd type="none" w="med" len="med"/>
+                    </a:lnL>
+                    <a:lnR w="6350" cap="flat" cmpd="sng" algn="ctr">
+                      <a:solidFill>
+                        <a:srgbClr val="E5E7EB"/>
+                      </a:solidFill>
+                      <a:prstDash val="solid"/>
+                      <a:round/>
+                      <a:headEnd type="none" w="med" len="med"/>
+                      <a:tailEnd type="none" w="med" len="med"/>
+                    </a:lnR>
+                    <a:lnT w="6350" cap="flat" cmpd="sng" algn="ctr">
+                      <a:solidFill>
+                        <a:srgbClr val="E5E7EB"/>
+                      </a:solidFill>
+                      <a:prstDash val="solid"/>
+                      <a:round/>
+                      <a:headEnd type="none" w="med" len="med"/>
+                      <a:tailEnd type="none" w="med" len="med"/>
+                    </a:lnT>
+                    <a:lnB w="6350" cap="flat" cmpd="sng" algn="ctr">
+                      <a:solidFill>
+                        <a:srgbClr val="E5E7EB"/>
+                      </a:solidFill>
+                      <a:prstDash val="solid"/>
+                      <a:round/>
+                      <a:headEnd type="none" w="med" len="med"/>
+                      <a:tailEnd type="none" w="med" len="med"/>
+                    </a:lnB>
+                    <a:solidFill>
+                      <a:srgbClr val="FDC800"/>
+                    </a:solidFill>
+                  </a:tcPr>
+                </a:tc>
+              </a:tr>
+              <a:tr h="0">
+                <a:tc>
+                  <a:txBody>
+                    <a:bodyPr/>
+                    <a:lstStyle/>
+                    <a:p>
+                      <a:pPr indent="0" marL="0">
+                        <a:buNone/>
+                      </a:pPr>
+                      <a:r>
+                        <a:rPr lang="en-US" sz="1500" dirty="0">
+                          <a:solidFill>
+                            <a:srgbClr val="4A4A4A"/>
+                          </a:solidFill>
+                          <a:latin typeface="Calibri" pitchFamily="34" charset="0"/>
+                          <a:ea typeface="Calibri" pitchFamily="34" charset="-122"/>
+                          <a:cs typeface="Calibri" pitchFamily="34" charset="-120"/>
+                        </a:rPr>
+                        <a:t>Airtime earn rate</a:t>
+                      </a:r>
+                      <a:endParaRPr lang="en-US" sz="1500" dirty="0">
+                        <a:latin typeface="Calibri" charset="0"/>
+                        <a:ea typeface="Calibri" charset="0"/>
+                        <a:cs typeface="Calibri" charset="0"/>
+                      </a:endParaRPr>
+                    </a:p>
+                  </a:txBody>
+                  <a:tcPr marL="91440" marR="91440" marT="45720" marB="45720">
+                    <a:lnL w="6350" cap="flat" cmpd="sng" algn="ctr">
+                      <a:solidFill>
+                        <a:srgbClr val="E5E7EB"/>
+                      </a:solidFill>
+                      <a:prstDash val="solid"/>
+                      <a:round/>
+                      <a:headEnd type="none" w="med" len="med"/>
+                      <a:tailEnd type="none" w="med" len="med"/>
+                    </a:lnL>
+                    <a:lnR w="6350" cap="flat" cmpd="sng" algn="ctr">
+                      <a:solidFill>
+                        <a:srgbClr val="E5E7EB"/>
+                      </a:solidFill>
+                      <a:prstDash val="solid"/>
+                      <a:round/>
+                      <a:headEnd type="none" w="med" len="med"/>
+                      <a:tailEnd type="none" w="med" len="med"/>
+                    </a:lnR>
+                    <a:lnT w="6350" cap="flat" cmpd="sng" algn="ctr">
+                      <a:solidFill>
+                        <a:srgbClr val="E5E7EB"/>
+                      </a:solidFill>
+                      <a:prstDash val="solid"/>
+                      <a:round/>
+                      <a:headEnd type="none" w="med" len="med"/>
+                      <a:tailEnd type="none" w="med" len="med"/>
+                    </a:lnT>
+                    <a:lnB w="6350" cap="flat" cmpd="sng" algn="ctr">
+                      <a:solidFill>
+                        <a:srgbClr val="E5E7EB"/>
+                      </a:solidFill>
+                      <a:prstDash val="solid"/>
+                      <a:round/>
+                      <a:headEnd type="none" w="med" len="med"/>
+                      <a:tailEnd type="none" w="med" len="med"/>
+                    </a:lnB>
+                  </a:tcPr>
+                </a:tc>
+                <a:tc>
+                  <a:txBody>
+                    <a:bodyPr/>
+                    <a:lstStyle/>
+                    <a:p>
+                      <a:pPr indent="0" marL="0">
+                        <a:buNone/>
+                      </a:pPr>
+                      <a:r>
+                        <a:rPr lang="en-US" sz="1500" dirty="0">
+                          <a:solidFill>
+                            <a:srgbClr val="4A4A4A"/>
+                          </a:solidFill>
+                          <a:latin typeface="Calibri" pitchFamily="34" charset="0"/>
+                          <a:ea typeface="Calibri" pitchFamily="34" charset="-122"/>
+                          <a:cs typeface="Calibri" pitchFamily="34" charset="-120"/>
+                        </a:rPr>
+                        <a:t>1 pt / R1</a:t>
+                      </a:r>
+                      <a:endParaRPr lang="en-US" sz="1500" dirty="0">
+                        <a:latin typeface="Calibri" charset="0"/>
+                        <a:ea typeface="Calibri" charset="0"/>
+                        <a:cs typeface="Calibri" charset="0"/>
+                      </a:endParaRPr>
+                    </a:p>
+                  </a:txBody>
+                  <a:tcPr marL="91440" marR="91440" marT="45720" marB="45720">
+                    <a:lnL w="6350" cap="flat" cmpd="sng" algn="ctr">
+                      <a:solidFill>
+                        <a:srgbClr val="E5E7EB"/>
+                      </a:solidFill>
+                      <a:prstDash val="solid"/>
+                      <a:round/>
+                      <a:headEnd type="none" w="med" len="med"/>
+                      <a:tailEnd type="none" w="med" len="med"/>
+                    </a:lnL>
+                    <a:lnR w="6350" cap="flat" cmpd="sng" algn="ctr">
+                      <a:solidFill>
+                        <a:srgbClr val="E5E7EB"/>
+                      </a:solidFill>
+                      <a:prstDash val="solid"/>
+                      <a:round/>
+                      <a:headEnd type="none" w="med" len="med"/>
+                      <a:tailEnd type="none" w="med" len="med"/>
+                    </a:lnR>
+                    <a:lnT w="6350" cap="flat" cmpd="sng" algn="ctr">
+                      <a:solidFill>
+                        <a:srgbClr val="E5E7EB"/>
+                      </a:solidFill>
+                      <a:prstDash val="solid"/>
+                      <a:round/>
+                      <a:headEnd type="none" w="med" len="med"/>
+                      <a:tailEnd type="none" w="med" len="med"/>
+                    </a:lnT>
+                    <a:lnB w="6350" cap="flat" cmpd="sng" algn="ctr">
+                      <a:solidFill>
+                        <a:srgbClr val="E5E7EB"/>
+                      </a:solidFill>
+                      <a:prstDash val="solid"/>
+                      <a:round/>
+                      <a:headEnd type="none" w="med" len="med"/>
+                      <a:tailEnd type="none" w="med" len="med"/>
+                    </a:lnB>
+                  </a:tcPr>
+                </a:tc>
+                <a:tc>
+                  <a:txBody>
+                    <a:bodyPr/>
+                    <a:lstStyle/>
+                    <a:p>
+                      <a:pPr indent="0" marL="0">
+                        <a:buNone/>
+                      </a:pPr>
+                      <a:r>
+                        <a:rPr lang="en-US" sz="1500" b="1" dirty="0">
+                          <a:solidFill>
+                            <a:srgbClr val="4A4A4A"/>
+                          </a:solidFill>
+                          <a:latin typeface="Calibri" pitchFamily="34" charset="0"/>
+                          <a:ea typeface="Calibri" pitchFamily="34" charset="-122"/>
+                          <a:cs typeface="Calibri" pitchFamily="34" charset="-120"/>
+                        </a:rPr>
+                        <a:t>2 pts / R1</a:t>
+                      </a:r>
+                      <a:endParaRPr lang="en-US" sz="1500" dirty="0">
+                        <a:latin typeface="Calibri" charset="0"/>
+                        <a:ea typeface="Calibri" charset="0"/>
+                        <a:cs typeface="Calibri" charset="0"/>
+                      </a:endParaRPr>
+                    </a:p>
+                  </a:txBody>
+                  <a:tcPr marL="91440" marR="91440" marT="45720" marB="45720">
+                    <a:lnL w="6350" cap="flat" cmpd="sng" algn="ctr">
+                      <a:solidFill>
+                        <a:srgbClr val="E5E7EB"/>
+                      </a:solidFill>
+                      <a:prstDash val="solid"/>
+                      <a:round/>
+                      <a:headEnd type="none" w="med" len="med"/>
+                      <a:tailEnd type="none" w="med" len="med"/>
+                    </a:lnL>
+                    <a:lnR w="6350" cap="flat" cmpd="sng" algn="ctr">
+                      <a:solidFill>
+                        <a:srgbClr val="E5E7EB"/>
+                      </a:solidFill>
+                      <a:prstDash val="solid"/>
+                      <a:round/>
+                      <a:headEnd type="none" w="med" len="med"/>
+                      <a:tailEnd type="none" w="med" len="med"/>
+                    </a:lnR>
+                    <a:lnT w="6350" cap="flat" cmpd="sng" algn="ctr">
+                      <a:solidFill>
+                        <a:srgbClr val="E5E7EB"/>
+                      </a:solidFill>
+                      <a:prstDash val="solid"/>
+                      <a:round/>
+                      <a:headEnd type="none" w="med" len="med"/>
+                      <a:tailEnd type="none" w="med" len="med"/>
+                    </a:lnT>
+                    <a:lnB w="6350" cap="flat" cmpd="sng" algn="ctr">
+                      <a:solidFill>
+                        <a:srgbClr val="E5E7EB"/>
+                      </a:solidFill>
+                      <a:prstDash val="solid"/>
+                      <a:round/>
+                      <a:headEnd type="none" w="med" len="med"/>
+                      <a:tailEnd type="none" w="med" len="med"/>
+                    </a:lnB>
+                  </a:tcPr>
+                </a:tc>
+                <a:tc>
+                  <a:txBody>
+                    <a:bodyPr/>
+                    <a:lstStyle/>
+                    <a:p>
+                      <a:pPr indent="0" marL="0">
+                        <a:buNone/>
+                      </a:pPr>
+                      <a:r>
+                        <a:rPr lang="en-US" sz="1500" dirty="0">
+                          <a:solidFill>
+                            <a:srgbClr val="4A4A4A"/>
+                          </a:solidFill>
+                          <a:latin typeface="Calibri" pitchFamily="34" charset="0"/>
+                          <a:ea typeface="Calibri" pitchFamily="34" charset="-122"/>
+                          <a:cs typeface="Calibri" pitchFamily="34" charset="-120"/>
+                        </a:rPr>
+                        <a:t>Doubles perceived velocity without inflating cost</a:t>
+                      </a:r>
+                      <a:endParaRPr lang="en-US" sz="1500" dirty="0">
+                        <a:latin typeface="Calibri" charset="0"/>
+                        <a:ea typeface="Calibri" charset="0"/>
+                        <a:cs typeface="Calibri" charset="0"/>
+                      </a:endParaRPr>
+                    </a:p>
+                  </a:txBody>
+                  <a:tcPr marL="91440" marR="91440" marT="45720" marB="45720">
+                    <a:lnL w="6350" cap="flat" cmpd="sng" algn="ctr">
+                      <a:solidFill>
+                        <a:srgbClr val="E5E7EB"/>
+                      </a:solidFill>
+                      <a:prstDash val="solid"/>
+                      <a:round/>
+                      <a:headEnd type="none" w="med" len="med"/>
+                      <a:tailEnd type="none" w="med" len="med"/>
+                    </a:lnL>
+                    <a:lnR w="6350" cap="flat" cmpd="sng" algn="ctr">
+                      <a:solidFill>
+                        <a:srgbClr val="E5E7EB"/>
+                      </a:solidFill>
+                      <a:prstDash val="solid"/>
+                      <a:round/>
+                      <a:headEnd type="none" w="med" len="med"/>
+                      <a:tailEnd type="none" w="med" len="med"/>
+                    </a:lnR>
+                    <a:lnT w="6350" cap="flat" cmpd="sng" algn="ctr">
+                      <a:solidFill>
+                        <a:srgbClr val="E5E7EB"/>
+                      </a:solidFill>
+                      <a:prstDash val="solid"/>
+                      <a:round/>
+                      <a:headEnd type="none" w="med" len="med"/>
+                      <a:tailEnd type="none" w="med" len="med"/>
+                    </a:lnT>
+                    <a:lnB w="6350" cap="flat" cmpd="sng" algn="ctr">
+                      <a:solidFill>
+                        <a:srgbClr val="E5E7EB"/>
+                      </a:solidFill>
+                      <a:prstDash val="solid"/>
+                      <a:round/>
+                      <a:headEnd type="none" w="med" len="med"/>
+                      <a:tailEnd type="none" w="med" len="med"/>
+                    </a:lnB>
+                  </a:tcPr>
+                </a:tc>
+              </a:tr>
+              <a:tr h="0">
+                <a:tc>
+                  <a:txBody>
+                    <a:bodyPr/>
+                    <a:lstStyle/>
+                    <a:p>
+                      <a:pPr indent="0" marL="0">
+                        <a:buNone/>
+                      </a:pPr>
+                      <a:r>
+                        <a:rPr lang="en-US" sz="1500" dirty="0">
+                          <a:solidFill>
+                            <a:srgbClr val="4A4A4A"/>
+                          </a:solidFill>
+                          <a:latin typeface="Calibri" pitchFamily="34" charset="0"/>
+                          <a:ea typeface="Calibri" pitchFamily="34" charset="-122"/>
+                          <a:cs typeface="Calibri" pitchFamily="34" charset="-120"/>
+                        </a:rPr>
+                        <a:t>Redemption value</a:t>
+                      </a:r>
+                      <a:endParaRPr lang="en-US" sz="1500" dirty="0">
+                        <a:latin typeface="Calibri" charset="0"/>
+                        <a:ea typeface="Calibri" charset="0"/>
+                        <a:cs typeface="Calibri" charset="0"/>
+                      </a:endParaRPr>
+                    </a:p>
+                  </a:txBody>
+                  <a:tcPr marL="91440" marR="91440" marT="45720" marB="45720">
+                    <a:lnL w="6350" cap="flat" cmpd="sng" algn="ctr">
+                      <a:solidFill>
+                        <a:srgbClr val="E5E7EB"/>
+                      </a:solidFill>
+                      <a:prstDash val="solid"/>
+                      <a:round/>
+                      <a:headEnd type="none" w="med" len="med"/>
+                      <a:tailEnd type="none" w="med" len="med"/>
+                    </a:lnL>
+                    <a:lnR w="6350" cap="flat" cmpd="sng" algn="ctr">
+                      <a:solidFill>
+                        <a:srgbClr val="E5E7EB"/>
+                      </a:solidFill>
+                      <a:prstDash val="solid"/>
+                      <a:round/>
+                      <a:headEnd type="none" w="med" len="med"/>
+                      <a:tailEnd type="none" w="med" len="med"/>
+                    </a:lnR>
+                    <a:lnT w="6350" cap="flat" cmpd="sng" algn="ctr">
+                      <a:solidFill>
+                        <a:srgbClr val="E5E7EB"/>
+                      </a:solidFill>
+                      <a:prstDash val="solid"/>
+                      <a:round/>
+                      <a:headEnd type="none" w="med" len="med"/>
+                      <a:tailEnd type="none" w="med" len="med"/>
+                    </a:lnT>
+                    <a:lnB w="6350" cap="flat" cmpd="sng" algn="ctr">
+                      <a:solidFill>
+                        <a:srgbClr val="E5E7EB"/>
+                      </a:solidFill>
+                      <a:prstDash val="solid"/>
+                      <a:round/>
+                      <a:headEnd type="none" w="med" len="med"/>
+                      <a:tailEnd type="none" w="med" len="med"/>
+                    </a:lnB>
+                  </a:tcPr>
+                </a:tc>
+                <a:tc>
+                  <a:txBody>
+                    <a:bodyPr/>
+                    <a:lstStyle/>
+                    <a:p>
+                      <a:pPr indent="0" marL="0">
+                        <a:buNone/>
+                      </a:pPr>
+                      <a:r>
+                        <a:rPr lang="en-US" sz="1500" dirty="0">
+                          <a:solidFill>
+                            <a:srgbClr val="4A4A4A"/>
+                          </a:solidFill>
+                          <a:latin typeface="Calibri" pitchFamily="34" charset="0"/>
+                          <a:ea typeface="Calibri" pitchFamily="34" charset="-122"/>
+                          <a:cs typeface="Calibri" pitchFamily="34" charset="-120"/>
+                        </a:rPr>
+                        <a:t>1 pt ≈ R0.0085</a:t>
+                      </a:r>
+                      <a:endParaRPr lang="en-US" sz="1500" dirty="0">
+                        <a:latin typeface="Calibri" charset="0"/>
+                        <a:ea typeface="Calibri" charset="0"/>
+                        <a:cs typeface="Calibri" charset="0"/>
+                      </a:endParaRPr>
+                    </a:p>
+                  </a:txBody>
+                  <a:tcPr marL="91440" marR="91440" marT="45720" marB="45720">
+                    <a:lnL w="6350" cap="flat" cmpd="sng" algn="ctr">
+                      <a:solidFill>
+                        <a:srgbClr val="E5E7EB"/>
+                      </a:solidFill>
+                      <a:prstDash val="solid"/>
+                      <a:round/>
+                      <a:headEnd type="none" w="med" len="med"/>
+                      <a:tailEnd type="none" w="med" len="med"/>
+                    </a:lnL>
+                    <a:lnR w="6350" cap="flat" cmpd="sng" algn="ctr">
+                      <a:solidFill>
+                        <a:srgbClr val="E5E7EB"/>
+                      </a:solidFill>
+                      <a:prstDash val="solid"/>
+                      <a:round/>
+                      <a:headEnd type="none" w="med" len="med"/>
+                      <a:tailEnd type="none" w="med" len="med"/>
+                    </a:lnR>
+                    <a:lnT w="6350" cap="flat" cmpd="sng" algn="ctr">
+                      <a:solidFill>
+                        <a:srgbClr val="E5E7EB"/>
+                      </a:solidFill>
+                      <a:prstDash val="solid"/>
+                      <a:round/>
+                      <a:headEnd type="none" w="med" len="med"/>
+                      <a:tailEnd type="none" w="med" len="med"/>
+                    </a:lnT>
+                    <a:lnB w="6350" cap="flat" cmpd="sng" algn="ctr">
+                      <a:solidFill>
+                        <a:srgbClr val="E5E7EB"/>
+                      </a:solidFill>
+                      <a:prstDash val="solid"/>
+                      <a:round/>
+                      <a:headEnd type="none" w="med" len="med"/>
+                      <a:tailEnd type="none" w="med" len="med"/>
+                    </a:lnB>
+                  </a:tcPr>
+                </a:tc>
+                <a:tc>
+                  <a:txBody>
+                    <a:bodyPr/>
+                    <a:lstStyle/>
+                    <a:p>
+                      <a:pPr indent="0" marL="0">
+                        <a:buNone/>
+                      </a:pPr>
+                      <a:r>
+                        <a:rPr lang="en-US" sz="1500" b="1" dirty="0">
+                          <a:solidFill>
+                            <a:srgbClr val="4A4A4A"/>
+                          </a:solidFill>
+                          <a:latin typeface="Calibri" pitchFamily="34" charset="0"/>
+                          <a:ea typeface="Calibri" pitchFamily="34" charset="-122"/>
+                          <a:cs typeface="Calibri" pitchFamily="34" charset="-120"/>
+                        </a:rPr>
+                        <a:t>1 pt ≈ R0.05</a:t>
+                      </a:r>
+                      <a:endParaRPr lang="en-US" sz="1500" dirty="0">
+                        <a:latin typeface="Calibri" charset="0"/>
+                        <a:ea typeface="Calibri" charset="0"/>
+                        <a:cs typeface="Calibri" charset="0"/>
+                      </a:endParaRPr>
+                    </a:p>
+                  </a:txBody>
+                  <a:tcPr marL="91440" marR="91440" marT="45720" marB="45720">
+                    <a:lnL w="6350" cap="flat" cmpd="sng" algn="ctr">
+                      <a:solidFill>
+                        <a:srgbClr val="E5E7EB"/>
+                      </a:solidFill>
+                      <a:prstDash val="solid"/>
+                      <a:round/>
+                      <a:headEnd type="none" w="med" len="med"/>
+                      <a:tailEnd type="none" w="med" len="med"/>
+                    </a:lnL>
+                    <a:lnR w="6350" cap="flat" cmpd="sng" algn="ctr">
+                      <a:solidFill>
+                        <a:srgbClr val="E5E7EB"/>
+                      </a:solidFill>
+                      <a:prstDash val="solid"/>
+                      <a:round/>
+                      <a:headEnd type="none" w="med" len="med"/>
+                      <a:tailEnd type="none" w="med" len="med"/>
+                    </a:lnR>
+                    <a:lnT w="6350" cap="flat" cmpd="sng" algn="ctr">
+                      <a:solidFill>
+                        <a:srgbClr val="E5E7EB"/>
+                      </a:solidFill>
+                      <a:prstDash val="solid"/>
+                      <a:round/>
+                      <a:headEnd type="none" w="med" len="med"/>
+                      <a:tailEnd type="none" w="med" len="med"/>
+                    </a:lnT>
+                    <a:lnB w="6350" cap="flat" cmpd="sng" algn="ctr">
+                      <a:solidFill>
+                        <a:srgbClr val="E5E7EB"/>
+                      </a:solidFill>
+                      <a:prstDash val="solid"/>
+                      <a:round/>
+                      <a:headEnd type="none" w="med" len="med"/>
+                      <a:tailEnd type="none" w="med" len="med"/>
+                    </a:lnB>
+                  </a:tcPr>
+                </a:tc>
+                <a:tc>
+                  <a:txBody>
+                    <a:bodyPr/>
+                    <a:lstStyle/>
+                    <a:p>
+                      <a:pPr indent="0" marL="0">
+                        <a:buNone/>
+                      </a:pPr>
+                      <a:r>
+                        <a:rPr lang="en-US" sz="1500" dirty="0">
+                          <a:solidFill>
+                            <a:srgbClr val="4A4A4A"/>
+                          </a:solidFill>
+                          <a:latin typeface="Calibri" pitchFamily="34" charset="0"/>
+                          <a:ea typeface="Calibri" pitchFamily="34" charset="-122"/>
+                          <a:cs typeface="Calibri" pitchFamily="34" charset="-120"/>
+                        </a:rPr>
+                        <a:t>Makes points feel like real currency</a:t>
+                      </a:r>
+                      <a:endParaRPr lang="en-US" sz="1500" dirty="0">
+                        <a:latin typeface="Calibri" charset="0"/>
+                        <a:ea typeface="Calibri" charset="0"/>
+                        <a:cs typeface="Calibri" charset="0"/>
+                      </a:endParaRPr>
+                    </a:p>
+                  </a:txBody>
+                  <a:tcPr marL="91440" marR="91440" marT="45720" marB="45720">
+                    <a:lnL w="6350" cap="flat" cmpd="sng" algn="ctr">
+                      <a:solidFill>
+                        <a:srgbClr val="E5E7EB"/>
+                      </a:solidFill>
+                      <a:prstDash val="solid"/>
+                      <a:round/>
+                      <a:headEnd type="none" w="med" len="med"/>
+                      <a:tailEnd type="none" w="med" len="med"/>
+                    </a:lnL>
+                    <a:lnR w="6350" cap="flat" cmpd="sng" algn="ctr">
+                      <a:solidFill>
+                        <a:srgbClr val="E5E7EB"/>
+                      </a:solidFill>
+                      <a:prstDash val="solid"/>
+                      <a:round/>
+                      <a:headEnd type="none" w="med" len="med"/>
+                      <a:tailEnd type="none" w="med" len="med"/>
+                    </a:lnR>
+                    <a:lnT w="6350" cap="flat" cmpd="sng" algn="ctr">
+                      <a:solidFill>
+                        <a:srgbClr val="E5E7EB"/>
+                      </a:solidFill>
+                      <a:prstDash val="solid"/>
+                      <a:round/>
+                      <a:headEnd type="none" w="med" len="med"/>
+                      <a:tailEnd type="none" w="med" len="med"/>
+                    </a:lnT>
+                    <a:lnB w="6350" cap="flat" cmpd="sng" algn="ctr">
+                      <a:solidFill>
+                        <a:srgbClr val="E5E7EB"/>
+                      </a:solidFill>
+                      <a:prstDash val="solid"/>
+                      <a:round/>
+                      <a:headEnd type="none" w="med" len="med"/>
+                      <a:tailEnd type="none" w="med" len="med"/>
+                    </a:lnB>
+                  </a:tcPr>
+                </a:tc>
+              </a:tr>
+              <a:tr h="0">
+                <a:tc>
+                  <a:txBody>
+                    <a:bodyPr/>
+                    <a:lstStyle/>
+                    <a:p>
+                      <a:pPr indent="0" marL="0">
+                        <a:buNone/>
+                      </a:pPr>
+                      <a:r>
+                        <a:rPr lang="en-US" sz="1500" dirty="0">
+                          <a:solidFill>
+                            <a:srgbClr val="4A4A4A"/>
+                          </a:solidFill>
+                          <a:latin typeface="Calibri" pitchFamily="34" charset="0"/>
+                          <a:ea typeface="Calibri" pitchFamily="34" charset="-122"/>
+                          <a:cs typeface="Calibri" pitchFamily="34" charset="-120"/>
+                        </a:rPr>
+                        <a:t>Sign-up bonus</a:t>
+                      </a:r>
+                      <a:endParaRPr lang="en-US" sz="1500" dirty="0">
+                        <a:latin typeface="Calibri" charset="0"/>
+                        <a:ea typeface="Calibri" charset="0"/>
+                        <a:cs typeface="Calibri" charset="0"/>
+                      </a:endParaRPr>
+                    </a:p>
+                  </a:txBody>
+                  <a:tcPr marL="91440" marR="91440" marT="45720" marB="45720">
+                    <a:lnL w="6350" cap="flat" cmpd="sng" algn="ctr">
+                      <a:solidFill>
+                        <a:srgbClr val="E5E7EB"/>
+                      </a:solidFill>
+                      <a:prstDash val="solid"/>
+                      <a:round/>
+                      <a:headEnd type="none" w="med" len="med"/>
+                      <a:tailEnd type="none" w="med" len="med"/>
+                    </a:lnL>
+                    <a:lnR w="6350" cap="flat" cmpd="sng" algn="ctr">
+                      <a:solidFill>
+                        <a:srgbClr val="E5E7EB"/>
+                      </a:solidFill>
+                      <a:prstDash val="solid"/>
+                      <a:round/>
+                      <a:headEnd type="none" w="med" len="med"/>
+                      <a:tailEnd type="none" w="med" len="med"/>
+                    </a:lnR>
+                    <a:lnT w="6350" cap="flat" cmpd="sng" algn="ctr">
+                      <a:solidFill>
+                        <a:srgbClr val="E5E7EB"/>
+                      </a:solidFill>
+                      <a:prstDash val="solid"/>
+                      <a:round/>
+                      <a:headEnd type="none" w="med" len="med"/>
+                      <a:tailEnd type="none" w="med" len="med"/>
+                    </a:lnT>
+                    <a:lnB w="6350" cap="flat" cmpd="sng" algn="ctr">
+                      <a:solidFill>
+                        <a:srgbClr val="E5E7EB"/>
+                      </a:solidFill>
+                      <a:prstDash val="solid"/>
+                      <a:round/>
+                      <a:headEnd type="none" w="med" len="med"/>
+                      <a:tailEnd type="none" w="med" len="med"/>
+                    </a:lnB>
+                  </a:tcPr>
+                </a:tc>
+                <a:tc>
+                  <a:txBody>
+                    <a:bodyPr/>
+                    <a:lstStyle/>
+                    <a:p>
+                      <a:pPr indent="0" marL="0">
+                        <a:buNone/>
+                      </a:pPr>
+                      <a:r>
+                        <a:rPr lang="en-US" sz="1500" dirty="0">
+                          <a:solidFill>
+                            <a:srgbClr val="4A4A4A"/>
+                          </a:solidFill>
+                          <a:latin typeface="Calibri" pitchFamily="34" charset="0"/>
+                          <a:ea typeface="Calibri" pitchFamily="34" charset="-122"/>
+                          <a:cs typeface="Calibri" pitchFamily="34" charset="-120"/>
+                        </a:rPr>
+                        <a:t>500 pts</a:t>
+                      </a:r>
+                      <a:endParaRPr lang="en-US" sz="1500" dirty="0">
+                        <a:latin typeface="Calibri" charset="0"/>
+                        <a:ea typeface="Calibri" charset="0"/>
+                        <a:cs typeface="Calibri" charset="0"/>
+                      </a:endParaRPr>
+                    </a:p>
+                  </a:txBody>
+                  <a:tcPr marL="91440" marR="91440" marT="45720" marB="45720">
+                    <a:lnL w="6350" cap="flat" cmpd="sng" algn="ctr">
+                      <a:solidFill>
+                        <a:srgbClr val="E5E7EB"/>
+                      </a:solidFill>
+                      <a:prstDash val="solid"/>
+                      <a:round/>
+                      <a:headEnd type="none" w="med" len="med"/>
+                      <a:tailEnd type="none" w="med" len="med"/>
+                    </a:lnL>
+                    <a:lnR w="6350" cap="flat" cmpd="sng" algn="ctr">
+                      <a:solidFill>
+                        <a:srgbClr val="E5E7EB"/>
+                      </a:solidFill>
+                      <a:prstDash val="solid"/>
+                      <a:round/>
+                      <a:headEnd type="none" w="med" len="med"/>
+                      <a:tailEnd type="none" w="med" len="med"/>
+                    </a:lnR>
+                    <a:lnT w="6350" cap="flat" cmpd="sng" algn="ctr">
+                      <a:solidFill>
+                        <a:srgbClr val="E5E7EB"/>
+                      </a:solidFill>
+                      <a:prstDash val="solid"/>
+                      <a:round/>
+                      <a:headEnd type="none" w="med" len="med"/>
+                      <a:tailEnd type="none" w="med" len="med"/>
+                    </a:lnT>
+                    <a:lnB w="6350" cap="flat" cmpd="sng" algn="ctr">
+                      <a:solidFill>
+                        <a:srgbClr val="E5E7EB"/>
+                      </a:solidFill>
+                      <a:prstDash val="solid"/>
+                      <a:round/>
+                      <a:headEnd type="none" w="med" len="med"/>
+                      <a:tailEnd type="none" w="med" len="med"/>
+                    </a:lnB>
+                  </a:tcPr>
+                </a:tc>
+                <a:tc>
+                  <a:txBody>
+                    <a:bodyPr/>
+                    <a:lstStyle/>
+                    <a:p>
+                      <a:pPr indent="0" marL="0">
+                        <a:buNone/>
+                      </a:pPr>
+                      <a:r>
+                        <a:rPr lang="en-US" sz="1500" b="1" dirty="0">
+                          <a:solidFill>
+                            <a:srgbClr val="4A4A4A"/>
+                          </a:solidFill>
+                          <a:latin typeface="Calibri" pitchFamily="34" charset="0"/>
+                          <a:ea typeface="Calibri" pitchFamily="34" charset="-122"/>
+                          <a:cs typeface="Calibri" pitchFamily="34" charset="-120"/>
+                        </a:rPr>
+                        <a:t>500 pts (keep)</a:t>
+                      </a:r>
+                      <a:endParaRPr lang="en-US" sz="1500" dirty="0">
+                        <a:latin typeface="Calibri" charset="0"/>
+                        <a:ea typeface="Calibri" charset="0"/>
+                        <a:cs typeface="Calibri" charset="0"/>
+                      </a:endParaRPr>
+                    </a:p>
+                  </a:txBody>
+                  <a:tcPr marL="91440" marR="91440" marT="45720" marB="45720">
+                    <a:lnL w="6350" cap="flat" cmpd="sng" algn="ctr">
+                      <a:solidFill>
+                        <a:srgbClr val="E5E7EB"/>
+                      </a:solidFill>
+                      <a:prstDash val="solid"/>
+                      <a:round/>
+                      <a:headEnd type="none" w="med" len="med"/>
+                      <a:tailEnd type="none" w="med" len="med"/>
+                    </a:lnL>
+                    <a:lnR w="6350" cap="flat" cmpd="sng" algn="ctr">
+                      <a:solidFill>
+                        <a:srgbClr val="E5E7EB"/>
+                      </a:solidFill>
+                      <a:prstDash val="solid"/>
+                      <a:round/>
+                      <a:headEnd type="none" w="med" len="med"/>
+                      <a:tailEnd type="none" w="med" len="med"/>
+                    </a:lnR>
+                    <a:lnT w="6350" cap="flat" cmpd="sng" algn="ctr">
+                      <a:solidFill>
+                        <a:srgbClr val="E5E7EB"/>
+                      </a:solidFill>
+                      <a:prstDash val="solid"/>
+                      <a:round/>
+                      <a:headEnd type="none" w="med" len="med"/>
+                      <a:tailEnd type="none" w="med" len="med"/>
+                    </a:lnT>
+                    <a:lnB w="6350" cap="flat" cmpd="sng" algn="ctr">
+                      <a:solidFill>
+                        <a:srgbClr val="E5E7EB"/>
+                      </a:solidFill>
+                      <a:prstDash val="solid"/>
+                      <a:round/>
+                      <a:headEnd type="none" w="med" len="med"/>
+                      <a:tailEnd type="none" w="med" len="med"/>
+                    </a:lnB>
+                  </a:tcPr>
+                </a:tc>
+                <a:tc>
+                  <a:txBody>
+                    <a:bodyPr/>
+                    <a:lstStyle/>
+                    <a:p>
+                      <a:pPr indent="0" marL="0">
+                        <a:buNone/>
+                      </a:pPr>
+                      <a:r>
+                        <a:rPr lang="en-US" sz="1500" dirty="0">
+                          <a:solidFill>
+                            <a:srgbClr val="4A4A4A"/>
+                          </a:solidFill>
+                          <a:latin typeface="Calibri" pitchFamily="34" charset="0"/>
+                          <a:ea typeface="Calibri" pitchFamily="34" charset="-122"/>
+                          <a:cs typeface="Calibri" pitchFamily="34" charset="-120"/>
+                        </a:rPr>
+                        <a:t>Already strong under the new ratio</a:t>
+                      </a:r>
+                      <a:endParaRPr lang="en-US" sz="1500" dirty="0">
+                        <a:latin typeface="Calibri" charset="0"/>
+                        <a:ea typeface="Calibri" charset="0"/>
+                        <a:cs typeface="Calibri" charset="0"/>
+                      </a:endParaRPr>
+                    </a:p>
+                  </a:txBody>
+                  <a:tcPr marL="91440" marR="91440" marT="45720" marB="45720">
+                    <a:lnL w="6350" cap="flat" cmpd="sng" algn="ctr">
+                      <a:solidFill>
+                        <a:srgbClr val="E5E7EB"/>
+                      </a:solidFill>
+                      <a:prstDash val="solid"/>
+                      <a:round/>
+                      <a:headEnd type="none" w="med" len="med"/>
+                      <a:tailEnd type="none" w="med" len="med"/>
+                    </a:lnL>
+                    <a:lnR w="6350" cap="flat" cmpd="sng" algn="ctr">
+                      <a:solidFill>
+                        <a:srgbClr val="E5E7EB"/>
+                      </a:solidFill>
+                      <a:prstDash val="solid"/>
+                      <a:round/>
+                      <a:headEnd type="none" w="med" len="med"/>
+                      <a:tailEnd type="none" w="med" len="med"/>
+                    </a:lnR>
+                    <a:lnT w="6350" cap="flat" cmpd="sng" algn="ctr">
+                      <a:solidFill>
+                        <a:srgbClr val="E5E7EB"/>
+                      </a:solidFill>
+                      <a:prstDash val="solid"/>
+                      <a:round/>
+                      <a:headEnd type="none" w="med" len="med"/>
+                      <a:tailEnd type="none" w="med" len="med"/>
+                    </a:lnT>
+                    <a:lnB w="6350" cap="flat" cmpd="sng" algn="ctr">
+                      <a:solidFill>
+                        <a:srgbClr val="E5E7EB"/>
+                      </a:solidFill>
+                      <a:prstDash val="solid"/>
+                      <a:round/>
+                      <a:headEnd type="none" w="med" len="med"/>
+                      <a:tailEnd type="none" w="med" len="med"/>
+                    </a:lnB>
+                  </a:tcPr>
+                </a:tc>
+              </a:tr>
+              <a:tr h="0">
+                <a:tc>
+                  <a:txBody>
+                    <a:bodyPr/>
+                    <a:lstStyle/>
+                    <a:p>
+                      <a:pPr indent="0" marL="0">
+                        <a:buNone/>
+                      </a:pPr>
+                      <a:r>
+                        <a:rPr lang="en-US" sz="1500" dirty="0">
+                          <a:solidFill>
+                            <a:srgbClr val="4A4A4A"/>
+                          </a:solidFill>
+                          <a:latin typeface="Calibri" pitchFamily="34" charset="0"/>
+                          <a:ea typeface="Calibri" pitchFamily="34" charset="-122"/>
+                          <a:cs typeface="Calibri" pitchFamily="34" charset="-120"/>
+                        </a:rPr>
+                        <a:t>Plan &amp; accessory rules</a:t>
+                      </a:r>
+                      <a:endParaRPr lang="en-US" sz="1500" dirty="0">
+                        <a:latin typeface="Calibri" charset="0"/>
+                        <a:ea typeface="Calibri" charset="0"/>
+                        <a:cs typeface="Calibri" charset="0"/>
+                      </a:endParaRPr>
+                    </a:p>
+                  </a:txBody>
+                  <a:tcPr marL="91440" marR="91440" marT="45720" marB="45720">
+                    <a:lnL w="6350" cap="flat" cmpd="sng" algn="ctr">
+                      <a:solidFill>
+                        <a:srgbClr val="E5E7EB"/>
+                      </a:solidFill>
+                      <a:prstDash val="solid"/>
+                      <a:round/>
+                      <a:headEnd type="none" w="med" len="med"/>
+                      <a:tailEnd type="none" w="med" len="med"/>
+                    </a:lnL>
+                    <a:lnR w="6350" cap="flat" cmpd="sng" algn="ctr">
+                      <a:solidFill>
+                        <a:srgbClr val="E5E7EB"/>
+                      </a:solidFill>
+                      <a:prstDash val="solid"/>
+                      <a:round/>
+                      <a:headEnd type="none" w="med" len="med"/>
+                      <a:tailEnd type="none" w="med" len="med"/>
+                    </a:lnR>
+                    <a:lnT w="6350" cap="flat" cmpd="sng" algn="ctr">
+                      <a:solidFill>
+                        <a:srgbClr val="E5E7EB"/>
+                      </a:solidFill>
+                      <a:prstDash val="solid"/>
+                      <a:round/>
+                      <a:headEnd type="none" w="med" len="med"/>
+                      <a:tailEnd type="none" w="med" len="med"/>
+                    </a:lnT>
+                    <a:lnB w="6350" cap="flat" cmpd="sng" algn="ctr">
+                      <a:solidFill>
+                        <a:srgbClr val="E5E7EB"/>
+                      </a:solidFill>
+                      <a:prstDash val="solid"/>
+                      <a:round/>
+                      <a:headEnd type="none" w="med" len="med"/>
+                      <a:tailEnd type="none" w="med" len="med"/>
+                    </a:lnB>
+                  </a:tcPr>
+                </a:tc>
+                <a:tc>
+                  <a:txBody>
+                    <a:bodyPr/>
+                    <a:lstStyle/>
+                    <a:p>
+                      <a:pPr indent="0" marL="0">
+                        <a:buNone/>
+                      </a:pPr>
+                      <a:r>
+                        <a:rPr lang="en-US" sz="1500" dirty="0">
+                          <a:solidFill>
+                            <a:srgbClr val="4A4A4A"/>
+                          </a:solidFill>
+                          <a:latin typeface="Calibri" pitchFamily="34" charset="0"/>
+                          <a:ea typeface="Calibri" pitchFamily="34" charset="-122"/>
+                          <a:cs typeface="Calibri" pitchFamily="34" charset="-120"/>
+                        </a:rPr>
+                        <a:t>No change</a:t>
+                      </a:r>
+                      <a:endParaRPr lang="en-US" sz="1500" dirty="0">
+                        <a:latin typeface="Calibri" charset="0"/>
+                        <a:ea typeface="Calibri" charset="0"/>
+                        <a:cs typeface="Calibri" charset="0"/>
+                      </a:endParaRPr>
+                    </a:p>
+                  </a:txBody>
+                  <a:tcPr marL="91440" marR="91440" marT="45720" marB="45720">
+                    <a:lnL w="6350" cap="flat" cmpd="sng" algn="ctr">
+                      <a:solidFill>
+                        <a:srgbClr val="E5E7EB"/>
+                      </a:solidFill>
+                      <a:prstDash val="solid"/>
+                      <a:round/>
+                      <a:headEnd type="none" w="med" len="med"/>
+                      <a:tailEnd type="none" w="med" len="med"/>
+                    </a:lnL>
+                    <a:lnR w="6350" cap="flat" cmpd="sng" algn="ctr">
+                      <a:solidFill>
+                        <a:srgbClr val="E5E7EB"/>
+                      </a:solidFill>
+                      <a:prstDash val="solid"/>
+                      <a:round/>
+                      <a:headEnd type="none" w="med" len="med"/>
+                      <a:tailEnd type="none" w="med" len="med"/>
+                    </a:lnR>
+                    <a:lnT w="6350" cap="flat" cmpd="sng" algn="ctr">
+                      <a:solidFill>
+                        <a:srgbClr val="E5E7EB"/>
+                      </a:solidFill>
+                      <a:prstDash val="solid"/>
+                      <a:round/>
+                      <a:headEnd type="none" w="med" len="med"/>
+                      <a:tailEnd type="none" w="med" len="med"/>
+                    </a:lnT>
+                    <a:lnB w="6350" cap="flat" cmpd="sng" algn="ctr">
+                      <a:solidFill>
+                        <a:srgbClr val="E5E7EB"/>
+                      </a:solidFill>
+                      <a:prstDash val="solid"/>
+                      <a:round/>
+                      <a:headEnd type="none" w="med" len="med"/>
+                      <a:tailEnd type="none" w="med" len="med"/>
+                    </a:lnB>
+                  </a:tcPr>
+                </a:tc>
+                <a:tc>
+                  <a:txBody>
+                    <a:bodyPr/>
+                    <a:lstStyle/>
+                    <a:p>
+                      <a:pPr indent="0" marL="0">
+                        <a:buNone/>
+                      </a:pPr>
+                      <a:r>
+                        <a:rPr lang="en-US" sz="1500" b="1" dirty="0">
+                          <a:solidFill>
+                            <a:srgbClr val="4A4A4A"/>
+                          </a:solidFill>
+                          <a:latin typeface="Calibri" pitchFamily="34" charset="0"/>
+                          <a:ea typeface="Calibri" pitchFamily="34" charset="-122"/>
+                          <a:cs typeface="Calibri" pitchFamily="34" charset="-120"/>
+                        </a:rPr>
+                        <a:t>No change</a:t>
+                      </a:r>
+                      <a:endParaRPr lang="en-US" sz="1500" dirty="0">
+                        <a:latin typeface="Calibri" charset="0"/>
+                        <a:ea typeface="Calibri" charset="0"/>
+                        <a:cs typeface="Calibri" charset="0"/>
+                      </a:endParaRPr>
+                    </a:p>
+                  </a:txBody>
+                  <a:tcPr marL="91440" marR="91440" marT="45720" marB="45720">
+                    <a:lnL w="6350" cap="flat" cmpd="sng" algn="ctr">
+                      <a:solidFill>
+                        <a:srgbClr val="E5E7EB"/>
+                      </a:solidFill>
+                      <a:prstDash val="solid"/>
+                      <a:round/>
+                      <a:headEnd type="none" w="med" len="med"/>
+                      <a:tailEnd type="none" w="med" len="med"/>
+                    </a:lnL>
+                    <a:lnR w="6350" cap="flat" cmpd="sng" algn="ctr">
+                      <a:solidFill>
+                        <a:srgbClr val="E5E7EB"/>
+                      </a:solidFill>
+                      <a:prstDash val="solid"/>
+                      <a:round/>
+                      <a:headEnd type="none" w="med" len="med"/>
+                      <a:tailEnd type="none" w="med" len="med"/>
+                    </a:lnR>
+                    <a:lnT w="6350" cap="flat" cmpd="sng" algn="ctr">
+                      <a:solidFill>
+                        <a:srgbClr val="E5E7EB"/>
+                      </a:solidFill>
+                      <a:prstDash val="solid"/>
+                      <a:round/>
+                      <a:headEnd type="none" w="med" len="med"/>
+                      <a:tailEnd type="none" w="med" len="med"/>
+                    </a:lnT>
+                    <a:lnB w="6350" cap="flat" cmpd="sng" algn="ctr">
+                      <a:solidFill>
+                        <a:srgbClr val="E5E7EB"/>
+                      </a:solidFill>
+                      <a:prstDash val="solid"/>
+                      <a:round/>
+                      <a:headEnd type="none" w="med" len="med"/>
+                      <a:tailEnd type="none" w="med" len="med"/>
+                    </a:lnB>
+                  </a:tcPr>
+                </a:tc>
+                <a:tc>
+                  <a:txBody>
+                    <a:bodyPr/>
+                    <a:lstStyle/>
+                    <a:p>
+                      <a:pPr indent="0" marL="0">
+                        <a:buNone/>
+                      </a:pPr>
+                      <a:r>
+                        <a:rPr lang="en-US" sz="1500" dirty="0">
+                          <a:solidFill>
+                            <a:srgbClr val="4A4A4A"/>
+                          </a:solidFill>
+                          <a:latin typeface="Calibri" pitchFamily="34" charset="0"/>
+                          <a:ea typeface="Calibri" pitchFamily="34" charset="-122"/>
+                          <a:cs typeface="Calibri" pitchFamily="34" charset="-120"/>
+                        </a:rPr>
+                        <a:t>Auto-revalues with new conversion</a:t>
+                      </a:r>
+                      <a:endParaRPr lang="en-US" sz="1500" dirty="0">
+                        <a:latin typeface="Calibri" charset="0"/>
+                        <a:ea typeface="Calibri" charset="0"/>
+                        <a:cs typeface="Calibri" charset="0"/>
+                      </a:endParaRPr>
+                    </a:p>
+                  </a:txBody>
+                  <a:tcPr marL="91440" marR="91440" marT="45720" marB="45720">
+                    <a:lnL w="6350" cap="flat" cmpd="sng" algn="ctr">
+                      <a:solidFill>
+                        <a:srgbClr val="E5E7EB"/>
+                      </a:solidFill>
+                      <a:prstDash val="solid"/>
+                      <a:round/>
+                      <a:headEnd type="none" w="med" len="med"/>
+                      <a:tailEnd type="none" w="med" len="med"/>
+                    </a:lnL>
+                    <a:lnR w="6350" cap="flat" cmpd="sng" algn="ctr">
+                      <a:solidFill>
+                        <a:srgbClr val="E5E7EB"/>
+                      </a:solidFill>
+                      <a:prstDash val="solid"/>
+                      <a:round/>
+                      <a:headEnd type="none" w="med" len="med"/>
+                      <a:tailEnd type="none" w="med" len="med"/>
+                    </a:lnR>
+                    <a:lnT w="6350" cap="flat" cmpd="sng" algn="ctr">
+                      <a:solidFill>
+                        <a:srgbClr val="E5E7EB"/>
+                      </a:solidFill>
+                      <a:prstDash val="solid"/>
+                      <a:round/>
+                      <a:headEnd type="none" w="med" len="med"/>
+                      <a:tailEnd type="none" w="med" len="med"/>
+                    </a:lnT>
+                    <a:lnB w="6350" cap="flat" cmpd="sng" algn="ctr">
+                      <a:solidFill>
+                        <a:srgbClr val="E5E7EB"/>
+                      </a:solidFill>
+                      <a:prstDash val="solid"/>
+                      <a:round/>
+                      <a:headEnd type="none" w="med" len="med"/>
+                      <a:tailEnd type="none" w="med" len="med"/>
+                    </a:lnB>
+                  </a:tcPr>
+                </a:tc>
+              </a:tr>
+            </a:tbl>
+          </a:graphicData>
+        </a:graphic>
+      </p:graphicFrame>
       <p:sp>
         <p:nvSpPr>
-          <p:cNvPr id="14" name="Text 12"/>
+          <p:cNvPr id="9" name="Shape 6"/>
           <p:cNvSpPr/>
           <p:nvPr/>
         </p:nvSpPr>
         <p:spPr>
           <a:xfrm>
-            <a:off x="6245352" y="3291840"/>
-            <a:ext cx="5029200" cy="365760"/>
+            <a:off x="457200" y="5120640"/>
+            <a:ext cx="11274552" cy="914400"/>
+          </a:xfrm>
+          <a:prstGeom prst="rect">
+            <a:avLst/>
+          </a:prstGeom>
+          <a:solidFill>
+            <a:srgbClr val="FEF3C7"/>
+          </a:solidFill>
+          <a:ln w="38100">
+            <a:solidFill>
+              <a:srgbClr val="FDC800"/>
+            </a:solidFill>
+            <a:prstDash val="solid"/>
+          </a:ln>
+        </p:spPr>
+      </p:sp>
+      <p:sp>
+        <p:nvSpPr>
+          <p:cNvPr id="10" name="Text 7"/>
+          <p:cNvSpPr/>
+          <p:nvPr/>
+        </p:nvSpPr>
+        <p:spPr>
+          <a:xfrm>
+            <a:off x="640080" y="5166360"/>
+            <a:ext cx="10908792" cy="822960"/>
           </a:xfrm>
           <a:prstGeom prst="rect">
             <a:avLst/>
@@ -3826,34 +6923,91 @@
           <a:bodyPr wrap="square" rtlCol="0" anchor="ctr"/>
           <a:lstStyle/>
           <a:p>
-            <a:pPr algn="ctr" indent="0" marL="0">
+            <a:pPr indent="0" marL="0">
               <a:buNone/>
             </a:pPr>
             <a:r>
-              <a:rPr lang="en-US" sz="1300" b="1" dirty="0">
+              <a:rPr lang="en-US" sz="1400" dirty="0">
                 <a:solidFill>
-                  <a:srgbClr val="A7A9AC"/>
+                  <a:srgbClr val="3C3C3B"/>
                 </a:solidFill>
                 <a:latin typeface="Calibri" pitchFamily="34" charset="0"/>
                 <a:ea typeface="Calibri" pitchFamily="34" charset="-122"/>
                 <a:cs typeface="Calibri" pitchFamily="34" charset="-120"/>
               </a:rPr>
-              <a:t>20 PTS PER R1 AIRTIME</a:t>
+              <a:t>Why both? Bumping only the earn rate inflates the points economy. Fixing the conversion lifts every existing rule (plans, accessories, signup) in proportion.</a:t>
             </a:r>
-            <a:endParaRPr lang="en-US" sz="1300" dirty="0"/>
+            <a:endParaRPr lang="en-US" sz="1400" dirty="0"/>
           </a:p>
         </p:txBody>
       </p:sp>
+    </p:spTree>
+  </p:cSld>
+  <p:clrMapOvr>
+    <a:masterClrMapping/>
+  </p:clrMapOvr>
+</p:sld>
+</file>
+
+<file path=ppt/slides/slide6.xml><?xml version="1.0" encoding="utf-8"?>
+<p:sld xmlns:a="http://schemas.openxmlformats.org/drawingml/2006/main" xmlns:r="http://schemas.openxmlformats.org/officeDocument/2006/relationships" xmlns:p="http://schemas.openxmlformats.org/presentationml/2006/main">
+  <p:cSld name="Slide 6">
+    <p:bg>
+      <p:bgPr>
+        <a:solidFill>
+          <a:srgbClr val="FFFFFF"/>
+        </a:solidFill>
+      </p:bgPr>
+    </p:bg>
+    <p:spTree>
+      <p:nvGrpSpPr>
+        <p:cNvPr id="1" name=""/>
+        <p:cNvGrpSpPr/>
+        <p:nvPr/>
+      </p:nvGrpSpPr>
+      <p:grpSpPr>
+        <a:xfrm>
+          <a:off x="0" y="0"/>
+          <a:ext cx="0" cy="0"/>
+          <a:chOff x="0" y="0"/>
+          <a:chExt cx="0" cy="0"/>
+        </a:xfrm>
+      </p:grpSpPr>
       <p:sp>
         <p:nvSpPr>
-          <p:cNvPr id="15" name="Text 13"/>
+          <p:cNvPr id="2" name="Shape 0"/>
           <p:cNvSpPr/>
           <p:nvPr/>
         </p:nvSpPr>
         <p:spPr>
           <a:xfrm>
-            <a:off x="6428232" y="3703320"/>
-            <a:ext cx="4663440" cy="640080"/>
+            <a:off x="0" y="0"/>
+            <a:ext cx="12188952" cy="109728"/>
+          </a:xfrm>
+          <a:prstGeom prst="rect">
+            <a:avLst/>
+          </a:prstGeom>
+          <a:solidFill>
+            <a:srgbClr val="FDC800"/>
+          </a:solidFill>
+          <a:ln w="12700">
+            <a:solidFill>
+              <a:srgbClr val="FDC800"/>
+            </a:solidFill>
+            <a:prstDash val="solid"/>
+          </a:ln>
+        </p:spPr>
+      </p:sp>
+      <p:sp>
+        <p:nvSpPr>
+          <p:cNvPr id="3" name="Text 1"/>
+          <p:cNvSpPr/>
+          <p:nvPr/>
+        </p:nvSpPr>
+        <p:spPr>
+          <a:xfrm>
+            <a:off x="457200" y="6446520"/>
+            <a:ext cx="4572000" cy="274320"/>
           </a:xfrm>
           <a:prstGeom prst="rect">
             <a:avLst/>
@@ -3865,34 +7019,1359 @@
           <a:bodyPr wrap="square" rtlCol="0" anchor="ctr"/>
           <a:lstStyle/>
           <a:p>
-            <a:pPr algn="ctr" indent="0" marL="0">
+            <a:pPr indent="0" marL="0">
               <a:buNone/>
             </a:pPr>
             <a:r>
-              <a:rPr lang="en-US" sz="1400" dirty="0">
+              <a:rPr lang="en-US" sz="1000" b="1" dirty="0">
                 <a:solidFill>
-                  <a:srgbClr val="4A4A4A"/>
+                  <a:srgbClr val="A7A9AC"/>
                 </a:solidFill>
                 <a:latin typeface="Calibri" pitchFamily="34" charset="0"/>
                 <a:ea typeface="Calibri" pitchFamily="34" charset="-122"/>
                 <a:cs typeface="Calibri" pitchFamily="34" charset="-120"/>
               </a:rPr>
-              <a:t>Cheapest reward reachable after ~R250 in airtime spend.</a:t>
+              <a:t>MAVERICK LOYALTY</a:t>
             </a:r>
-            <a:endParaRPr lang="en-US" sz="1400" dirty="0"/>
+            <a:endParaRPr lang="en-US" sz="1000" dirty="0"/>
           </a:p>
         </p:txBody>
       </p:sp>
       <p:sp>
         <p:nvSpPr>
-          <p:cNvPr id="16" name="Shape 14"/>
+          <p:cNvPr id="4" name="Text 2"/>
           <p:cNvSpPr/>
           <p:nvPr/>
         </p:nvSpPr>
         <p:spPr>
           <a:xfrm>
-            <a:off x="457200" y="4846320"/>
-            <a:ext cx="11274552" cy="1280160"/>
+            <a:off x="10817352" y="6446520"/>
+            <a:ext cx="914400" cy="274320"/>
+          </a:xfrm>
+          <a:prstGeom prst="rect">
+            <a:avLst/>
+          </a:prstGeom>
+          <a:noFill/>
+          <a:ln/>
+        </p:spPr>
+        <p:txBody>
+          <a:bodyPr wrap="square" rtlCol="0" anchor="ctr"/>
+          <a:lstStyle/>
+          <a:p>
+            <a:pPr algn="r" indent="0" marL="0">
+              <a:buNone/>
+            </a:pPr>
+            <a:r>
+              <a:rPr lang="en-US" sz="1000" dirty="0">
+                <a:solidFill>
+                  <a:srgbClr val="A7A9AC"/>
+                </a:solidFill>
+                <a:latin typeface="Calibri" pitchFamily="34" charset="0"/>
+                <a:ea typeface="Calibri" pitchFamily="34" charset="-122"/>
+                <a:cs typeface="Calibri" pitchFamily="34" charset="-120"/>
+              </a:rPr>
+              <a:t>6 / 7</a:t>
+            </a:r>
+            <a:endParaRPr lang="en-US" sz="1000" dirty="0"/>
+          </a:p>
+        </p:txBody>
+      </p:sp>
+      <p:sp>
+        <p:nvSpPr>
+          <p:cNvPr id="5" name="Text 3"/>
+          <p:cNvSpPr/>
+          <p:nvPr/>
+        </p:nvSpPr>
+        <p:spPr>
+          <a:xfrm>
+            <a:off x="457200" y="365760"/>
+            <a:ext cx="11274552" cy="640080"/>
+          </a:xfrm>
+          <a:prstGeom prst="rect">
+            <a:avLst/>
+          </a:prstGeom>
+          <a:noFill/>
+          <a:ln/>
+        </p:spPr>
+        <p:txBody>
+          <a:bodyPr wrap="square" rtlCol="0" anchor="ctr"/>
+          <a:lstStyle/>
+          <a:p>
+            <a:pPr indent="0" marL="0">
+              <a:buNone/>
+            </a:pPr>
+            <a:r>
+              <a:rPr lang="en-US" sz="3200" b="1" dirty="0">
+                <a:solidFill>
+                  <a:srgbClr val="3C3C3B"/>
+                </a:solidFill>
+                <a:latin typeface="Calibri" pitchFamily="34" charset="0"/>
+                <a:ea typeface="Calibri" pitchFamily="34" charset="-122"/>
+                <a:cs typeface="Calibri" pitchFamily="34" charset="-120"/>
+              </a:rPr>
+              <a:t>What This Looks Like in Practice</a:t>
+            </a:r>
+            <a:endParaRPr lang="en-US" sz="3200" dirty="0"/>
+          </a:p>
+        </p:txBody>
+      </p:sp>
+      <p:sp>
+        <p:nvSpPr>
+          <p:cNvPr id="6" name="Shape 4"/>
+          <p:cNvSpPr/>
+          <p:nvPr/>
+        </p:nvSpPr>
+        <p:spPr>
+          <a:xfrm>
+            <a:off x="457200" y="960120"/>
+            <a:ext cx="2743200" cy="45720"/>
+          </a:xfrm>
+          <a:prstGeom prst="rect">
+            <a:avLst/>
+          </a:prstGeom>
+          <a:solidFill>
+            <a:srgbClr val="FDC800"/>
+          </a:solidFill>
+          <a:ln w="12700">
+            <a:solidFill>
+              <a:srgbClr val="FDC800"/>
+            </a:solidFill>
+            <a:prstDash val="solid"/>
+          </a:ln>
+        </p:spPr>
+      </p:sp>
+      <p:graphicFrame>
+        <p:nvGraphicFramePr>
+          <p:cNvPr id="7" name="Table 0"/>
+          <p:cNvGraphicFramePr>
+            <a:graphicFrameLocks noGrp="1"/>
+          </p:cNvGraphicFramePr>
+          <p:nvPr>
+            <p:extLst>
+              <p:ext uri="{D42A27DB-BD31-4B8C-83A1-F6EECF244321}">
+                <p14:modId xmlns:p14="http://schemas.microsoft.com/office/powerpoint/2010/main" val="1579011935"/>
+              </p:ext>
+            </p:extLst>
+          </p:nvPr>
+        </p:nvGraphicFramePr>
+        <p:xfrm>
+          <a:off x="457200" y="1234440"/>
+          <a:ext cx="11274552" cy="914400"/>
+        </p:xfrm>
+        <a:graphic>
+          <a:graphicData uri="http://schemas.openxmlformats.org/drawingml/2006/table">
+            <a:tbl>
+              <a:tblPr/>
+              <a:tblGrid>
+                <a:gridCol w="3758184"/>
+                <a:gridCol w="3758184"/>
+                <a:gridCol w="3758184"/>
+              </a:tblGrid>
+              <a:tr h="502920">
+                <a:tc>
+                  <a:txBody>
+                    <a:bodyPr/>
+                    <a:lstStyle/>
+                    <a:p>
+                      <a:pPr indent="0" marL="0">
+                        <a:buNone/>
+                      </a:pPr>
+                      <a:r>
+                        <a:rPr lang="en-US" sz="1600" b="1" dirty="0">
+                          <a:solidFill>
+                            <a:srgbClr val="3C3C3B"/>
+                          </a:solidFill>
+                          <a:latin typeface="Calibri" pitchFamily="34" charset="0"/>
+                          <a:ea typeface="Calibri" pitchFamily="34" charset="-122"/>
+                          <a:cs typeface="Calibri" pitchFamily="34" charset="-120"/>
+                        </a:rPr>
+                        <a:t>Scenario</a:t>
+                      </a:r>
+                      <a:endParaRPr lang="en-US" sz="1600" dirty="0">
+                        <a:latin typeface="Calibri" charset="0"/>
+                        <a:ea typeface="Calibri" charset="0"/>
+                        <a:cs typeface="Calibri" charset="0"/>
+                      </a:endParaRPr>
+                    </a:p>
+                  </a:txBody>
+                  <a:tcPr marL="91440" marR="91440" marT="45720" marB="45720">
+                    <a:lnL w="6350" cap="flat" cmpd="sng" algn="ctr">
+                      <a:solidFill>
+                        <a:srgbClr val="E5E7EB"/>
+                      </a:solidFill>
+                      <a:prstDash val="solid"/>
+                      <a:round/>
+                      <a:headEnd type="none" w="med" len="med"/>
+                      <a:tailEnd type="none" w="med" len="med"/>
+                    </a:lnL>
+                    <a:lnR w="6350" cap="flat" cmpd="sng" algn="ctr">
+                      <a:solidFill>
+                        <a:srgbClr val="E5E7EB"/>
+                      </a:solidFill>
+                      <a:prstDash val="solid"/>
+                      <a:round/>
+                      <a:headEnd type="none" w="med" len="med"/>
+                      <a:tailEnd type="none" w="med" len="med"/>
+                    </a:lnR>
+                    <a:lnT w="6350" cap="flat" cmpd="sng" algn="ctr">
+                      <a:solidFill>
+                        <a:srgbClr val="E5E7EB"/>
+                      </a:solidFill>
+                      <a:prstDash val="solid"/>
+                      <a:round/>
+                      <a:headEnd type="none" w="med" len="med"/>
+                      <a:tailEnd type="none" w="med" len="med"/>
+                    </a:lnT>
+                    <a:lnB w="6350" cap="flat" cmpd="sng" algn="ctr">
+                      <a:solidFill>
+                        <a:srgbClr val="E5E7EB"/>
+                      </a:solidFill>
+                      <a:prstDash val="solid"/>
+                      <a:round/>
+                      <a:headEnd type="none" w="med" len="med"/>
+                      <a:tailEnd type="none" w="med" len="med"/>
+                    </a:lnB>
+                    <a:solidFill>
+                      <a:srgbClr val="FDC800"/>
+                    </a:solidFill>
+                  </a:tcPr>
+                </a:tc>
+                <a:tc>
+                  <a:txBody>
+                    <a:bodyPr/>
+                    <a:lstStyle/>
+                    <a:p>
+                      <a:pPr indent="0" marL="0">
+                        <a:buNone/>
+                      </a:pPr>
+                      <a:r>
+                        <a:rPr lang="en-US" sz="1600" b="1" dirty="0">
+                          <a:solidFill>
+                            <a:srgbClr val="3C3C3B"/>
+                          </a:solidFill>
+                          <a:latin typeface="Calibri" pitchFamily="34" charset="0"/>
+                          <a:ea typeface="Calibri" pitchFamily="34" charset="-122"/>
+                          <a:cs typeface="Calibri" pitchFamily="34" charset="-120"/>
+                        </a:rPr>
+                        <a:t>Today</a:t>
+                      </a:r>
+                      <a:endParaRPr lang="en-US" sz="1600" dirty="0">
+                        <a:latin typeface="Calibri" charset="0"/>
+                        <a:ea typeface="Calibri" charset="0"/>
+                        <a:cs typeface="Calibri" charset="0"/>
+                      </a:endParaRPr>
+                    </a:p>
+                  </a:txBody>
+                  <a:tcPr marL="91440" marR="91440" marT="45720" marB="45720">
+                    <a:lnL w="6350" cap="flat" cmpd="sng" algn="ctr">
+                      <a:solidFill>
+                        <a:srgbClr val="E5E7EB"/>
+                      </a:solidFill>
+                      <a:prstDash val="solid"/>
+                      <a:round/>
+                      <a:headEnd type="none" w="med" len="med"/>
+                      <a:tailEnd type="none" w="med" len="med"/>
+                    </a:lnL>
+                    <a:lnR w="6350" cap="flat" cmpd="sng" algn="ctr">
+                      <a:solidFill>
+                        <a:srgbClr val="E5E7EB"/>
+                      </a:solidFill>
+                      <a:prstDash val="solid"/>
+                      <a:round/>
+                      <a:headEnd type="none" w="med" len="med"/>
+                      <a:tailEnd type="none" w="med" len="med"/>
+                    </a:lnR>
+                    <a:lnT w="6350" cap="flat" cmpd="sng" algn="ctr">
+                      <a:solidFill>
+                        <a:srgbClr val="E5E7EB"/>
+                      </a:solidFill>
+                      <a:prstDash val="solid"/>
+                      <a:round/>
+                      <a:headEnd type="none" w="med" len="med"/>
+                      <a:tailEnd type="none" w="med" len="med"/>
+                    </a:lnT>
+                    <a:lnB w="6350" cap="flat" cmpd="sng" algn="ctr">
+                      <a:solidFill>
+                        <a:srgbClr val="E5E7EB"/>
+                      </a:solidFill>
+                      <a:prstDash val="solid"/>
+                      <a:round/>
+                      <a:headEnd type="none" w="med" len="med"/>
+                      <a:tailEnd type="none" w="med" len="med"/>
+                    </a:lnB>
+                    <a:solidFill>
+                      <a:srgbClr val="FDC800"/>
+                    </a:solidFill>
+                  </a:tcPr>
+                </a:tc>
+                <a:tc>
+                  <a:txBody>
+                    <a:bodyPr/>
+                    <a:lstStyle/>
+                    <a:p>
+                      <a:pPr indent="0" marL="0">
+                        <a:buNone/>
+                      </a:pPr>
+                      <a:r>
+                        <a:rPr lang="en-US" sz="1600" b="1" dirty="0">
+                          <a:solidFill>
+                            <a:srgbClr val="3C3C3B"/>
+                          </a:solidFill>
+                          <a:latin typeface="Calibri" pitchFamily="34" charset="0"/>
+                          <a:ea typeface="Calibri" pitchFamily="34" charset="-122"/>
+                          <a:cs typeface="Calibri" pitchFamily="34" charset="-120"/>
+                        </a:rPr>
+                        <a:t>Proposed</a:t>
+                      </a:r>
+                      <a:endParaRPr lang="en-US" sz="1600" dirty="0">
+                        <a:latin typeface="Calibri" charset="0"/>
+                        <a:ea typeface="Calibri" charset="0"/>
+                        <a:cs typeface="Calibri" charset="0"/>
+                      </a:endParaRPr>
+                    </a:p>
+                  </a:txBody>
+                  <a:tcPr marL="91440" marR="91440" marT="45720" marB="45720">
+                    <a:lnL w="6350" cap="flat" cmpd="sng" algn="ctr">
+                      <a:solidFill>
+                        <a:srgbClr val="E5E7EB"/>
+                      </a:solidFill>
+                      <a:prstDash val="solid"/>
+                      <a:round/>
+                      <a:headEnd type="none" w="med" len="med"/>
+                      <a:tailEnd type="none" w="med" len="med"/>
+                    </a:lnL>
+                    <a:lnR w="6350" cap="flat" cmpd="sng" algn="ctr">
+                      <a:solidFill>
+                        <a:srgbClr val="E5E7EB"/>
+                      </a:solidFill>
+                      <a:prstDash val="solid"/>
+                      <a:round/>
+                      <a:headEnd type="none" w="med" len="med"/>
+                      <a:tailEnd type="none" w="med" len="med"/>
+                    </a:lnR>
+                    <a:lnT w="6350" cap="flat" cmpd="sng" algn="ctr">
+                      <a:solidFill>
+                        <a:srgbClr val="E5E7EB"/>
+                      </a:solidFill>
+                      <a:prstDash val="solid"/>
+                      <a:round/>
+                      <a:headEnd type="none" w="med" len="med"/>
+                      <a:tailEnd type="none" w="med" len="med"/>
+                    </a:lnT>
+                    <a:lnB w="6350" cap="flat" cmpd="sng" algn="ctr">
+                      <a:solidFill>
+                        <a:srgbClr val="E5E7EB"/>
+                      </a:solidFill>
+                      <a:prstDash val="solid"/>
+                      <a:round/>
+                      <a:headEnd type="none" w="med" len="med"/>
+                      <a:tailEnd type="none" w="med" len="med"/>
+                    </a:lnB>
+                    <a:solidFill>
+                      <a:srgbClr val="FDC800"/>
+                    </a:solidFill>
+                  </a:tcPr>
+                </a:tc>
+              </a:tr>
+              <a:tr h="502920">
+                <a:tc>
+                  <a:txBody>
+                    <a:bodyPr/>
+                    <a:lstStyle/>
+                    <a:p>
+                      <a:pPr indent="0" marL="0">
+                        <a:buNone/>
+                      </a:pPr>
+                      <a:r>
+                        <a:rPr lang="en-US" sz="1600" dirty="0">
+                          <a:solidFill>
+                            <a:srgbClr val="4A4A4A"/>
+                          </a:solidFill>
+                          <a:latin typeface="Calibri" pitchFamily="34" charset="0"/>
+                          <a:ea typeface="Calibri" pitchFamily="34" charset="-122"/>
+                          <a:cs typeface="Calibri" pitchFamily="34" charset="-120"/>
+                        </a:rPr>
+                        <a:t>Cappuccino (R45) costs</a:t>
+                      </a:r>
+                      <a:endParaRPr lang="en-US" sz="1600" dirty="0">
+                        <a:latin typeface="Calibri" charset="0"/>
+                        <a:ea typeface="Calibri" charset="0"/>
+                        <a:cs typeface="Calibri" charset="0"/>
+                      </a:endParaRPr>
+                    </a:p>
+                  </a:txBody>
+                  <a:tcPr marL="91440" marR="91440" marT="45720" marB="45720">
+                    <a:lnL w="6350" cap="flat" cmpd="sng" algn="ctr">
+                      <a:solidFill>
+                        <a:srgbClr val="E5E7EB"/>
+                      </a:solidFill>
+                      <a:prstDash val="solid"/>
+                      <a:round/>
+                      <a:headEnd type="none" w="med" len="med"/>
+                      <a:tailEnd type="none" w="med" len="med"/>
+                    </a:lnL>
+                    <a:lnR w="6350" cap="flat" cmpd="sng" algn="ctr">
+                      <a:solidFill>
+                        <a:srgbClr val="E5E7EB"/>
+                      </a:solidFill>
+                      <a:prstDash val="solid"/>
+                      <a:round/>
+                      <a:headEnd type="none" w="med" len="med"/>
+                      <a:tailEnd type="none" w="med" len="med"/>
+                    </a:lnR>
+                    <a:lnT w="6350" cap="flat" cmpd="sng" algn="ctr">
+                      <a:solidFill>
+                        <a:srgbClr val="E5E7EB"/>
+                      </a:solidFill>
+                      <a:prstDash val="solid"/>
+                      <a:round/>
+                      <a:headEnd type="none" w="med" len="med"/>
+                      <a:tailEnd type="none" w="med" len="med"/>
+                    </a:lnT>
+                    <a:lnB w="6350" cap="flat" cmpd="sng" algn="ctr">
+                      <a:solidFill>
+                        <a:srgbClr val="E5E7EB"/>
+                      </a:solidFill>
+                      <a:prstDash val="solid"/>
+                      <a:round/>
+                      <a:headEnd type="none" w="med" len="med"/>
+                      <a:tailEnd type="none" w="med" len="med"/>
+                    </a:lnB>
+                  </a:tcPr>
+                </a:tc>
+                <a:tc>
+                  <a:txBody>
+                    <a:bodyPr/>
+                    <a:lstStyle/>
+                    <a:p>
+                      <a:pPr indent="0" marL="0">
+                        <a:buNone/>
+                      </a:pPr>
+                      <a:r>
+                        <a:rPr lang="en-US" sz="1600" dirty="0">
+                          <a:solidFill>
+                            <a:srgbClr val="4A4A4A"/>
+                          </a:solidFill>
+                          <a:latin typeface="Calibri" pitchFamily="34" charset="0"/>
+                          <a:ea typeface="Calibri" pitchFamily="34" charset="-122"/>
+                          <a:cs typeface="Calibri" pitchFamily="34" charset="-120"/>
+                        </a:rPr>
+                        <a:t>5 294 pts</a:t>
+                      </a:r>
+                      <a:endParaRPr lang="en-US" sz="1600" dirty="0">
+                        <a:latin typeface="Calibri" charset="0"/>
+                        <a:ea typeface="Calibri" charset="0"/>
+                        <a:cs typeface="Calibri" charset="0"/>
+                      </a:endParaRPr>
+                    </a:p>
+                  </a:txBody>
+                  <a:tcPr marL="91440" marR="91440" marT="45720" marB="45720">
+                    <a:lnL w="6350" cap="flat" cmpd="sng" algn="ctr">
+                      <a:solidFill>
+                        <a:srgbClr val="E5E7EB"/>
+                      </a:solidFill>
+                      <a:prstDash val="solid"/>
+                      <a:round/>
+                      <a:headEnd type="none" w="med" len="med"/>
+                      <a:tailEnd type="none" w="med" len="med"/>
+                    </a:lnL>
+                    <a:lnR w="6350" cap="flat" cmpd="sng" algn="ctr">
+                      <a:solidFill>
+                        <a:srgbClr val="E5E7EB"/>
+                      </a:solidFill>
+                      <a:prstDash val="solid"/>
+                      <a:round/>
+                      <a:headEnd type="none" w="med" len="med"/>
+                      <a:tailEnd type="none" w="med" len="med"/>
+                    </a:lnR>
+                    <a:lnT w="6350" cap="flat" cmpd="sng" algn="ctr">
+                      <a:solidFill>
+                        <a:srgbClr val="E5E7EB"/>
+                      </a:solidFill>
+                      <a:prstDash val="solid"/>
+                      <a:round/>
+                      <a:headEnd type="none" w="med" len="med"/>
+                      <a:tailEnd type="none" w="med" len="med"/>
+                    </a:lnT>
+                    <a:lnB w="6350" cap="flat" cmpd="sng" algn="ctr">
+                      <a:solidFill>
+                        <a:srgbClr val="E5E7EB"/>
+                      </a:solidFill>
+                      <a:prstDash val="solid"/>
+                      <a:round/>
+                      <a:headEnd type="none" w="med" len="med"/>
+                      <a:tailEnd type="none" w="med" len="med"/>
+                    </a:lnB>
+                  </a:tcPr>
+                </a:tc>
+                <a:tc>
+                  <a:txBody>
+                    <a:bodyPr/>
+                    <a:lstStyle/>
+                    <a:p>
+                      <a:pPr indent="0" marL="0">
+                        <a:buNone/>
+                      </a:pPr>
+                      <a:r>
+                        <a:rPr lang="en-US" sz="1600" b="1" dirty="0">
+                          <a:solidFill>
+                            <a:srgbClr val="047857"/>
+                          </a:solidFill>
+                          <a:latin typeface="Calibri" pitchFamily="34" charset="0"/>
+                          <a:ea typeface="Calibri" pitchFamily="34" charset="-122"/>
+                          <a:cs typeface="Calibri" pitchFamily="34" charset="-120"/>
+                        </a:rPr>
+                        <a:t>900 pts</a:t>
+                      </a:r>
+                      <a:endParaRPr lang="en-US" sz="1600" dirty="0">
+                        <a:latin typeface="Calibri" charset="0"/>
+                        <a:ea typeface="Calibri" charset="0"/>
+                        <a:cs typeface="Calibri" charset="0"/>
+                      </a:endParaRPr>
+                    </a:p>
+                  </a:txBody>
+                  <a:tcPr marL="91440" marR="91440" marT="45720" marB="45720">
+                    <a:lnL w="6350" cap="flat" cmpd="sng" algn="ctr">
+                      <a:solidFill>
+                        <a:srgbClr val="E5E7EB"/>
+                      </a:solidFill>
+                      <a:prstDash val="solid"/>
+                      <a:round/>
+                      <a:headEnd type="none" w="med" len="med"/>
+                      <a:tailEnd type="none" w="med" len="med"/>
+                    </a:lnL>
+                    <a:lnR w="6350" cap="flat" cmpd="sng" algn="ctr">
+                      <a:solidFill>
+                        <a:srgbClr val="E5E7EB"/>
+                      </a:solidFill>
+                      <a:prstDash val="solid"/>
+                      <a:round/>
+                      <a:headEnd type="none" w="med" len="med"/>
+                      <a:tailEnd type="none" w="med" len="med"/>
+                    </a:lnR>
+                    <a:lnT w="6350" cap="flat" cmpd="sng" algn="ctr">
+                      <a:solidFill>
+                        <a:srgbClr val="E5E7EB"/>
+                      </a:solidFill>
+                      <a:prstDash val="solid"/>
+                      <a:round/>
+                      <a:headEnd type="none" w="med" len="med"/>
+                      <a:tailEnd type="none" w="med" len="med"/>
+                    </a:lnT>
+                    <a:lnB w="6350" cap="flat" cmpd="sng" algn="ctr">
+                      <a:solidFill>
+                        <a:srgbClr val="E5E7EB"/>
+                      </a:solidFill>
+                      <a:prstDash val="solid"/>
+                      <a:round/>
+                      <a:headEnd type="none" w="med" len="med"/>
+                      <a:tailEnd type="none" w="med" len="med"/>
+                    </a:lnB>
+                  </a:tcPr>
+                </a:tc>
+              </a:tr>
+              <a:tr h="502920">
+                <a:tc>
+                  <a:txBody>
+                    <a:bodyPr/>
+                    <a:lstStyle/>
+                    <a:p>
+                      <a:pPr indent="0" marL="0">
+                        <a:buNone/>
+                      </a:pPr>
+                      <a:r>
+                        <a:rPr lang="en-US" sz="1600" dirty="0">
+                          <a:solidFill>
+                            <a:srgbClr val="4A4A4A"/>
+                          </a:solidFill>
+                          <a:latin typeface="Calibri" pitchFamily="34" charset="0"/>
+                          <a:ea typeface="Calibri" pitchFamily="34" charset="-122"/>
+                          <a:cs typeface="Calibri" pitchFamily="34" charset="-120"/>
+                        </a:rPr>
+                        <a:t>Sign-up bonus value</a:t>
+                      </a:r>
+                      <a:endParaRPr lang="en-US" sz="1600" dirty="0">
+                        <a:latin typeface="Calibri" charset="0"/>
+                        <a:ea typeface="Calibri" charset="0"/>
+                        <a:cs typeface="Calibri" charset="0"/>
+                      </a:endParaRPr>
+                    </a:p>
+                  </a:txBody>
+                  <a:tcPr marL="91440" marR="91440" marT="45720" marB="45720">
+                    <a:lnL w="6350" cap="flat" cmpd="sng" algn="ctr">
+                      <a:solidFill>
+                        <a:srgbClr val="E5E7EB"/>
+                      </a:solidFill>
+                      <a:prstDash val="solid"/>
+                      <a:round/>
+                      <a:headEnd type="none" w="med" len="med"/>
+                      <a:tailEnd type="none" w="med" len="med"/>
+                    </a:lnL>
+                    <a:lnR w="6350" cap="flat" cmpd="sng" algn="ctr">
+                      <a:solidFill>
+                        <a:srgbClr val="E5E7EB"/>
+                      </a:solidFill>
+                      <a:prstDash val="solid"/>
+                      <a:round/>
+                      <a:headEnd type="none" w="med" len="med"/>
+                      <a:tailEnd type="none" w="med" len="med"/>
+                    </a:lnR>
+                    <a:lnT w="6350" cap="flat" cmpd="sng" algn="ctr">
+                      <a:solidFill>
+                        <a:srgbClr val="E5E7EB"/>
+                      </a:solidFill>
+                      <a:prstDash val="solid"/>
+                      <a:round/>
+                      <a:headEnd type="none" w="med" len="med"/>
+                      <a:tailEnd type="none" w="med" len="med"/>
+                    </a:lnT>
+                    <a:lnB w="6350" cap="flat" cmpd="sng" algn="ctr">
+                      <a:solidFill>
+                        <a:srgbClr val="E5E7EB"/>
+                      </a:solidFill>
+                      <a:prstDash val="solid"/>
+                      <a:round/>
+                      <a:headEnd type="none" w="med" len="med"/>
+                      <a:tailEnd type="none" w="med" len="med"/>
+                    </a:lnB>
+                  </a:tcPr>
+                </a:tc>
+                <a:tc>
+                  <a:txBody>
+                    <a:bodyPr/>
+                    <a:lstStyle/>
+                    <a:p>
+                      <a:pPr indent="0" marL="0">
+                        <a:buNone/>
+                      </a:pPr>
+                      <a:r>
+                        <a:rPr lang="en-US" sz="1600" dirty="0">
+                          <a:solidFill>
+                            <a:srgbClr val="4A4A4A"/>
+                          </a:solidFill>
+                          <a:latin typeface="Calibri" pitchFamily="34" charset="0"/>
+                          <a:ea typeface="Calibri" pitchFamily="34" charset="-122"/>
+                          <a:cs typeface="Calibri" pitchFamily="34" charset="-120"/>
+                        </a:rPr>
+                        <a:t>~R4</a:t>
+                      </a:r>
+                      <a:endParaRPr lang="en-US" sz="1600" dirty="0">
+                        <a:latin typeface="Calibri" charset="0"/>
+                        <a:ea typeface="Calibri" charset="0"/>
+                        <a:cs typeface="Calibri" charset="0"/>
+                      </a:endParaRPr>
+                    </a:p>
+                  </a:txBody>
+                  <a:tcPr marL="91440" marR="91440" marT="45720" marB="45720">
+                    <a:lnL w="6350" cap="flat" cmpd="sng" algn="ctr">
+                      <a:solidFill>
+                        <a:srgbClr val="E5E7EB"/>
+                      </a:solidFill>
+                      <a:prstDash val="solid"/>
+                      <a:round/>
+                      <a:headEnd type="none" w="med" len="med"/>
+                      <a:tailEnd type="none" w="med" len="med"/>
+                    </a:lnL>
+                    <a:lnR w="6350" cap="flat" cmpd="sng" algn="ctr">
+                      <a:solidFill>
+                        <a:srgbClr val="E5E7EB"/>
+                      </a:solidFill>
+                      <a:prstDash val="solid"/>
+                      <a:round/>
+                      <a:headEnd type="none" w="med" len="med"/>
+                      <a:tailEnd type="none" w="med" len="med"/>
+                    </a:lnR>
+                    <a:lnT w="6350" cap="flat" cmpd="sng" algn="ctr">
+                      <a:solidFill>
+                        <a:srgbClr val="E5E7EB"/>
+                      </a:solidFill>
+                      <a:prstDash val="solid"/>
+                      <a:round/>
+                      <a:headEnd type="none" w="med" len="med"/>
+                      <a:tailEnd type="none" w="med" len="med"/>
+                    </a:lnT>
+                    <a:lnB w="6350" cap="flat" cmpd="sng" algn="ctr">
+                      <a:solidFill>
+                        <a:srgbClr val="E5E7EB"/>
+                      </a:solidFill>
+                      <a:prstDash val="solid"/>
+                      <a:round/>
+                      <a:headEnd type="none" w="med" len="med"/>
+                      <a:tailEnd type="none" w="med" len="med"/>
+                    </a:lnB>
+                  </a:tcPr>
+                </a:tc>
+                <a:tc>
+                  <a:txBody>
+                    <a:bodyPr/>
+                    <a:lstStyle/>
+                    <a:p>
+                      <a:pPr indent="0" marL="0">
+                        <a:buNone/>
+                      </a:pPr>
+                      <a:r>
+                        <a:rPr lang="en-US" sz="1600" b="1" dirty="0">
+                          <a:solidFill>
+                            <a:srgbClr val="047857"/>
+                          </a:solidFill>
+                          <a:latin typeface="Calibri" pitchFamily="34" charset="0"/>
+                          <a:ea typeface="Calibri" pitchFamily="34" charset="-122"/>
+                          <a:cs typeface="Calibri" pitchFamily="34" charset="-120"/>
+                        </a:rPr>
+                        <a:t>~R25</a:t>
+                      </a:r>
+                      <a:endParaRPr lang="en-US" sz="1600" dirty="0">
+                        <a:latin typeface="Calibri" charset="0"/>
+                        <a:ea typeface="Calibri" charset="0"/>
+                        <a:cs typeface="Calibri" charset="0"/>
+                      </a:endParaRPr>
+                    </a:p>
+                  </a:txBody>
+                  <a:tcPr marL="91440" marR="91440" marT="45720" marB="45720">
+                    <a:lnL w="6350" cap="flat" cmpd="sng" algn="ctr">
+                      <a:solidFill>
+                        <a:srgbClr val="E5E7EB"/>
+                      </a:solidFill>
+                      <a:prstDash val="solid"/>
+                      <a:round/>
+                      <a:headEnd type="none" w="med" len="med"/>
+                      <a:tailEnd type="none" w="med" len="med"/>
+                    </a:lnL>
+                    <a:lnR w="6350" cap="flat" cmpd="sng" algn="ctr">
+                      <a:solidFill>
+                        <a:srgbClr val="E5E7EB"/>
+                      </a:solidFill>
+                      <a:prstDash val="solid"/>
+                      <a:round/>
+                      <a:headEnd type="none" w="med" len="med"/>
+                      <a:tailEnd type="none" w="med" len="med"/>
+                    </a:lnR>
+                    <a:lnT w="6350" cap="flat" cmpd="sng" algn="ctr">
+                      <a:solidFill>
+                        <a:srgbClr val="E5E7EB"/>
+                      </a:solidFill>
+                      <a:prstDash val="solid"/>
+                      <a:round/>
+                      <a:headEnd type="none" w="med" len="med"/>
+                      <a:tailEnd type="none" w="med" len="med"/>
+                    </a:lnT>
+                    <a:lnB w="6350" cap="flat" cmpd="sng" algn="ctr">
+                      <a:solidFill>
+                        <a:srgbClr val="E5E7EB"/>
+                      </a:solidFill>
+                      <a:prstDash val="solid"/>
+                      <a:round/>
+                      <a:headEnd type="none" w="med" len="med"/>
+                      <a:tailEnd type="none" w="med" len="med"/>
+                    </a:lnB>
+                  </a:tcPr>
+                </a:tc>
+              </a:tr>
+              <a:tr h="502920">
+                <a:tc>
+                  <a:txBody>
+                    <a:bodyPr/>
+                    <a:lstStyle/>
+                    <a:p>
+                      <a:pPr indent="0" marL="0">
+                        <a:buNone/>
+                      </a:pPr>
+                      <a:r>
+                        <a:rPr lang="en-US" sz="1600" dirty="0">
+                          <a:solidFill>
+                            <a:srgbClr val="4A4A4A"/>
+                          </a:solidFill>
+                          <a:latin typeface="Calibri" pitchFamily="34" charset="0"/>
+                          <a:ea typeface="Calibri" pitchFamily="34" charset="-122"/>
+                          <a:cs typeface="Calibri" pitchFamily="34" charset="-120"/>
+                        </a:rPr>
+                        <a:t>R500/month airtime spender earns</a:t>
+                      </a:r>
+                      <a:endParaRPr lang="en-US" sz="1600" dirty="0">
+                        <a:latin typeface="Calibri" charset="0"/>
+                        <a:ea typeface="Calibri" charset="0"/>
+                        <a:cs typeface="Calibri" charset="0"/>
+                      </a:endParaRPr>
+                    </a:p>
+                  </a:txBody>
+                  <a:tcPr marL="91440" marR="91440" marT="45720" marB="45720">
+                    <a:lnL w="6350" cap="flat" cmpd="sng" algn="ctr">
+                      <a:solidFill>
+                        <a:srgbClr val="E5E7EB"/>
+                      </a:solidFill>
+                      <a:prstDash val="solid"/>
+                      <a:round/>
+                      <a:headEnd type="none" w="med" len="med"/>
+                      <a:tailEnd type="none" w="med" len="med"/>
+                    </a:lnL>
+                    <a:lnR w="6350" cap="flat" cmpd="sng" algn="ctr">
+                      <a:solidFill>
+                        <a:srgbClr val="E5E7EB"/>
+                      </a:solidFill>
+                      <a:prstDash val="solid"/>
+                      <a:round/>
+                      <a:headEnd type="none" w="med" len="med"/>
+                      <a:tailEnd type="none" w="med" len="med"/>
+                    </a:lnR>
+                    <a:lnT w="6350" cap="flat" cmpd="sng" algn="ctr">
+                      <a:solidFill>
+                        <a:srgbClr val="E5E7EB"/>
+                      </a:solidFill>
+                      <a:prstDash val="solid"/>
+                      <a:round/>
+                      <a:headEnd type="none" w="med" len="med"/>
+                      <a:tailEnd type="none" w="med" len="med"/>
+                    </a:lnT>
+                    <a:lnB w="6350" cap="flat" cmpd="sng" algn="ctr">
+                      <a:solidFill>
+                        <a:srgbClr val="E5E7EB"/>
+                      </a:solidFill>
+                      <a:prstDash val="solid"/>
+                      <a:round/>
+                      <a:headEnd type="none" w="med" len="med"/>
+                      <a:tailEnd type="none" w="med" len="med"/>
+                    </a:lnB>
+                  </a:tcPr>
+                </a:tc>
+                <a:tc>
+                  <a:txBody>
+                    <a:bodyPr/>
+                    <a:lstStyle/>
+                    <a:p>
+                      <a:pPr indent="0" marL="0">
+                        <a:buNone/>
+                      </a:pPr>
+                      <a:r>
+                        <a:rPr lang="en-US" sz="1600" dirty="0">
+                          <a:solidFill>
+                            <a:srgbClr val="4A4A4A"/>
+                          </a:solidFill>
+                          <a:latin typeface="Calibri" pitchFamily="34" charset="0"/>
+                          <a:ea typeface="Calibri" pitchFamily="34" charset="-122"/>
+                          <a:cs typeface="Calibri" pitchFamily="34" charset="-120"/>
+                        </a:rPr>
+                        <a:t>500 pts/month (R4)</a:t>
+                      </a:r>
+                      <a:endParaRPr lang="en-US" sz="1600" dirty="0">
+                        <a:latin typeface="Calibri" charset="0"/>
+                        <a:ea typeface="Calibri" charset="0"/>
+                        <a:cs typeface="Calibri" charset="0"/>
+                      </a:endParaRPr>
+                    </a:p>
+                  </a:txBody>
+                  <a:tcPr marL="91440" marR="91440" marT="45720" marB="45720">
+                    <a:lnL w="6350" cap="flat" cmpd="sng" algn="ctr">
+                      <a:solidFill>
+                        <a:srgbClr val="E5E7EB"/>
+                      </a:solidFill>
+                      <a:prstDash val="solid"/>
+                      <a:round/>
+                      <a:headEnd type="none" w="med" len="med"/>
+                      <a:tailEnd type="none" w="med" len="med"/>
+                    </a:lnL>
+                    <a:lnR w="6350" cap="flat" cmpd="sng" algn="ctr">
+                      <a:solidFill>
+                        <a:srgbClr val="E5E7EB"/>
+                      </a:solidFill>
+                      <a:prstDash val="solid"/>
+                      <a:round/>
+                      <a:headEnd type="none" w="med" len="med"/>
+                      <a:tailEnd type="none" w="med" len="med"/>
+                    </a:lnR>
+                    <a:lnT w="6350" cap="flat" cmpd="sng" algn="ctr">
+                      <a:solidFill>
+                        <a:srgbClr val="E5E7EB"/>
+                      </a:solidFill>
+                      <a:prstDash val="solid"/>
+                      <a:round/>
+                      <a:headEnd type="none" w="med" len="med"/>
+                      <a:tailEnd type="none" w="med" len="med"/>
+                    </a:lnT>
+                    <a:lnB w="6350" cap="flat" cmpd="sng" algn="ctr">
+                      <a:solidFill>
+                        <a:srgbClr val="E5E7EB"/>
+                      </a:solidFill>
+                      <a:prstDash val="solid"/>
+                      <a:round/>
+                      <a:headEnd type="none" w="med" len="med"/>
+                      <a:tailEnd type="none" w="med" len="med"/>
+                    </a:lnB>
+                  </a:tcPr>
+                </a:tc>
+                <a:tc>
+                  <a:txBody>
+                    <a:bodyPr/>
+                    <a:lstStyle/>
+                    <a:p>
+                      <a:pPr indent="0" marL="0">
+                        <a:buNone/>
+                      </a:pPr>
+                      <a:r>
+                        <a:rPr lang="en-US" sz="1600" b="1" dirty="0">
+                          <a:solidFill>
+                            <a:srgbClr val="047857"/>
+                          </a:solidFill>
+                          <a:latin typeface="Calibri" pitchFamily="34" charset="0"/>
+                          <a:ea typeface="Calibri" pitchFamily="34" charset="-122"/>
+                          <a:cs typeface="Calibri" pitchFamily="34" charset="-120"/>
+                        </a:rPr>
+                        <a:t>1 000 pts/month (R50)</a:t>
+                      </a:r>
+                      <a:endParaRPr lang="en-US" sz="1600" dirty="0">
+                        <a:latin typeface="Calibri" charset="0"/>
+                        <a:ea typeface="Calibri" charset="0"/>
+                        <a:cs typeface="Calibri" charset="0"/>
+                      </a:endParaRPr>
+                    </a:p>
+                  </a:txBody>
+                  <a:tcPr marL="91440" marR="91440" marT="45720" marB="45720">
+                    <a:lnL w="6350" cap="flat" cmpd="sng" algn="ctr">
+                      <a:solidFill>
+                        <a:srgbClr val="E5E7EB"/>
+                      </a:solidFill>
+                      <a:prstDash val="solid"/>
+                      <a:round/>
+                      <a:headEnd type="none" w="med" len="med"/>
+                      <a:tailEnd type="none" w="med" len="med"/>
+                    </a:lnL>
+                    <a:lnR w="6350" cap="flat" cmpd="sng" algn="ctr">
+                      <a:solidFill>
+                        <a:srgbClr val="E5E7EB"/>
+                      </a:solidFill>
+                      <a:prstDash val="solid"/>
+                      <a:round/>
+                      <a:headEnd type="none" w="med" len="med"/>
+                      <a:tailEnd type="none" w="med" len="med"/>
+                    </a:lnR>
+                    <a:lnT w="6350" cap="flat" cmpd="sng" algn="ctr">
+                      <a:solidFill>
+                        <a:srgbClr val="E5E7EB"/>
+                      </a:solidFill>
+                      <a:prstDash val="solid"/>
+                      <a:round/>
+                      <a:headEnd type="none" w="med" len="med"/>
+                      <a:tailEnd type="none" w="med" len="med"/>
+                    </a:lnT>
+                    <a:lnB w="6350" cap="flat" cmpd="sng" algn="ctr">
+                      <a:solidFill>
+                        <a:srgbClr val="E5E7EB"/>
+                      </a:solidFill>
+                      <a:prstDash val="solid"/>
+                      <a:round/>
+                      <a:headEnd type="none" w="med" len="med"/>
+                      <a:tailEnd type="none" w="med" len="med"/>
+                    </a:lnB>
+                  </a:tcPr>
+                </a:tc>
+              </a:tr>
+              <a:tr h="502920">
+                <a:tc>
+                  <a:txBody>
+                    <a:bodyPr/>
+                    <a:lstStyle/>
+                    <a:p>
+                      <a:pPr indent="0" marL="0">
+                        <a:buNone/>
+                      </a:pPr>
+                      <a:r>
+                        <a:rPr lang="en-US" sz="1600" dirty="0">
+                          <a:solidFill>
+                            <a:srgbClr val="4A4A4A"/>
+                          </a:solidFill>
+                          <a:latin typeface="Calibri" pitchFamily="34" charset="0"/>
+                          <a:ea typeface="Calibri" pitchFamily="34" charset="-122"/>
+                          <a:cs typeface="Calibri" pitchFamily="34" charset="-120"/>
+                        </a:rPr>
+                        <a:t>Time to first coffee at R500/mo airtime</a:t>
+                      </a:r>
+                      <a:endParaRPr lang="en-US" sz="1600" dirty="0">
+                        <a:latin typeface="Calibri" charset="0"/>
+                        <a:ea typeface="Calibri" charset="0"/>
+                        <a:cs typeface="Calibri" charset="0"/>
+                      </a:endParaRPr>
+                    </a:p>
+                  </a:txBody>
+                  <a:tcPr marL="91440" marR="91440" marT="45720" marB="45720">
+                    <a:lnL w="6350" cap="flat" cmpd="sng" algn="ctr">
+                      <a:solidFill>
+                        <a:srgbClr val="E5E7EB"/>
+                      </a:solidFill>
+                      <a:prstDash val="solid"/>
+                      <a:round/>
+                      <a:headEnd type="none" w="med" len="med"/>
+                      <a:tailEnd type="none" w="med" len="med"/>
+                    </a:lnL>
+                    <a:lnR w="6350" cap="flat" cmpd="sng" algn="ctr">
+                      <a:solidFill>
+                        <a:srgbClr val="E5E7EB"/>
+                      </a:solidFill>
+                      <a:prstDash val="solid"/>
+                      <a:round/>
+                      <a:headEnd type="none" w="med" len="med"/>
+                      <a:tailEnd type="none" w="med" len="med"/>
+                    </a:lnR>
+                    <a:lnT w="6350" cap="flat" cmpd="sng" algn="ctr">
+                      <a:solidFill>
+                        <a:srgbClr val="E5E7EB"/>
+                      </a:solidFill>
+                      <a:prstDash val="solid"/>
+                      <a:round/>
+                      <a:headEnd type="none" w="med" len="med"/>
+                      <a:tailEnd type="none" w="med" len="med"/>
+                    </a:lnT>
+                    <a:lnB w="6350" cap="flat" cmpd="sng" algn="ctr">
+                      <a:solidFill>
+                        <a:srgbClr val="E5E7EB"/>
+                      </a:solidFill>
+                      <a:prstDash val="solid"/>
+                      <a:round/>
+                      <a:headEnd type="none" w="med" len="med"/>
+                      <a:tailEnd type="none" w="med" len="med"/>
+                    </a:lnB>
+                  </a:tcPr>
+                </a:tc>
+                <a:tc>
+                  <a:txBody>
+                    <a:bodyPr/>
+                    <a:lstStyle/>
+                    <a:p>
+                      <a:pPr indent="0" marL="0">
+                        <a:buNone/>
+                      </a:pPr>
+                      <a:r>
+                        <a:rPr lang="en-US" sz="1600" dirty="0">
+                          <a:solidFill>
+                            <a:srgbClr val="4A4A4A"/>
+                          </a:solidFill>
+                          <a:latin typeface="Calibri" pitchFamily="34" charset="0"/>
+                          <a:ea typeface="Calibri" pitchFamily="34" charset="-122"/>
+                          <a:cs typeface="Calibri" pitchFamily="34" charset="-120"/>
+                        </a:rPr>
+                        <a:t>~10 months</a:t>
+                      </a:r>
+                      <a:endParaRPr lang="en-US" sz="1600" dirty="0">
+                        <a:latin typeface="Calibri" charset="0"/>
+                        <a:ea typeface="Calibri" charset="0"/>
+                        <a:cs typeface="Calibri" charset="0"/>
+                      </a:endParaRPr>
+                    </a:p>
+                  </a:txBody>
+                  <a:tcPr marL="91440" marR="91440" marT="45720" marB="45720">
+                    <a:lnL w="6350" cap="flat" cmpd="sng" algn="ctr">
+                      <a:solidFill>
+                        <a:srgbClr val="E5E7EB"/>
+                      </a:solidFill>
+                      <a:prstDash val="solid"/>
+                      <a:round/>
+                      <a:headEnd type="none" w="med" len="med"/>
+                      <a:tailEnd type="none" w="med" len="med"/>
+                    </a:lnL>
+                    <a:lnR w="6350" cap="flat" cmpd="sng" algn="ctr">
+                      <a:solidFill>
+                        <a:srgbClr val="E5E7EB"/>
+                      </a:solidFill>
+                      <a:prstDash val="solid"/>
+                      <a:round/>
+                      <a:headEnd type="none" w="med" len="med"/>
+                      <a:tailEnd type="none" w="med" len="med"/>
+                    </a:lnR>
+                    <a:lnT w="6350" cap="flat" cmpd="sng" algn="ctr">
+                      <a:solidFill>
+                        <a:srgbClr val="E5E7EB"/>
+                      </a:solidFill>
+                      <a:prstDash val="solid"/>
+                      <a:round/>
+                      <a:headEnd type="none" w="med" len="med"/>
+                      <a:tailEnd type="none" w="med" len="med"/>
+                    </a:lnT>
+                    <a:lnB w="6350" cap="flat" cmpd="sng" algn="ctr">
+                      <a:solidFill>
+                        <a:srgbClr val="E5E7EB"/>
+                      </a:solidFill>
+                      <a:prstDash val="solid"/>
+                      <a:round/>
+                      <a:headEnd type="none" w="med" len="med"/>
+                      <a:tailEnd type="none" w="med" len="med"/>
+                    </a:lnB>
+                  </a:tcPr>
+                </a:tc>
+                <a:tc>
+                  <a:txBody>
+                    <a:bodyPr/>
+                    <a:lstStyle/>
+                    <a:p>
+                      <a:pPr indent="0" marL="0">
+                        <a:buNone/>
+                      </a:pPr>
+                      <a:r>
+                        <a:rPr lang="en-US" sz="1600" b="1" dirty="0">
+                          <a:solidFill>
+                            <a:srgbClr val="047857"/>
+                          </a:solidFill>
+                          <a:latin typeface="Calibri" pitchFamily="34" charset="0"/>
+                          <a:ea typeface="Calibri" pitchFamily="34" charset="-122"/>
+                          <a:cs typeface="Calibri" pitchFamily="34" charset="-120"/>
+                        </a:rPr>
+                        <a:t>~1 month</a:t>
+                      </a:r>
+                      <a:endParaRPr lang="en-US" sz="1600" dirty="0">
+                        <a:latin typeface="Calibri" charset="0"/>
+                        <a:ea typeface="Calibri" charset="0"/>
+                        <a:cs typeface="Calibri" charset="0"/>
+                      </a:endParaRPr>
+                    </a:p>
+                  </a:txBody>
+                  <a:tcPr marL="91440" marR="91440" marT="45720" marB="45720">
+                    <a:lnL w="6350" cap="flat" cmpd="sng" algn="ctr">
+                      <a:solidFill>
+                        <a:srgbClr val="E5E7EB"/>
+                      </a:solidFill>
+                      <a:prstDash val="solid"/>
+                      <a:round/>
+                      <a:headEnd type="none" w="med" len="med"/>
+                      <a:tailEnd type="none" w="med" len="med"/>
+                    </a:lnL>
+                    <a:lnR w="6350" cap="flat" cmpd="sng" algn="ctr">
+                      <a:solidFill>
+                        <a:srgbClr val="E5E7EB"/>
+                      </a:solidFill>
+                      <a:prstDash val="solid"/>
+                      <a:round/>
+                      <a:headEnd type="none" w="med" len="med"/>
+                      <a:tailEnd type="none" w="med" len="med"/>
+                    </a:lnR>
+                    <a:lnT w="6350" cap="flat" cmpd="sng" algn="ctr">
+                      <a:solidFill>
+                        <a:srgbClr val="E5E7EB"/>
+                      </a:solidFill>
+                      <a:prstDash val="solid"/>
+                      <a:round/>
+                      <a:headEnd type="none" w="med" len="med"/>
+                      <a:tailEnd type="none" w="med" len="med"/>
+                    </a:lnT>
+                    <a:lnB w="6350" cap="flat" cmpd="sng" algn="ctr">
+                      <a:solidFill>
+                        <a:srgbClr val="E5E7EB"/>
+                      </a:solidFill>
+                      <a:prstDash val="solid"/>
+                      <a:round/>
+                      <a:headEnd type="none" w="med" len="med"/>
+                      <a:tailEnd type="none" w="med" len="med"/>
+                    </a:lnB>
+                  </a:tcPr>
+                </a:tc>
+              </a:tr>
+              <a:tr h="502920">
+                <a:tc>
+                  <a:txBody>
+                    <a:bodyPr/>
+                    <a:lstStyle/>
+                    <a:p>
+                      <a:pPr indent="0" marL="0">
+                        <a:buNone/>
+                      </a:pPr>
+                      <a:r>
+                        <a:rPr lang="en-US" sz="1600" dirty="0">
+                          <a:solidFill>
+                            <a:srgbClr val="4A4A4A"/>
+                          </a:solidFill>
+                          <a:latin typeface="Calibri" pitchFamily="34" charset="0"/>
+                          <a:ea typeface="Calibri" pitchFamily="34" charset="-122"/>
+                          <a:cs typeface="Calibri" pitchFamily="34" charset="-120"/>
+                        </a:rPr>
+                        <a:t>Effective reward rate</a:t>
+                      </a:r>
+                      <a:endParaRPr lang="en-US" sz="1600" dirty="0">
+                        <a:latin typeface="Calibri" charset="0"/>
+                        <a:ea typeface="Calibri" charset="0"/>
+                        <a:cs typeface="Calibri" charset="0"/>
+                      </a:endParaRPr>
+                    </a:p>
+                  </a:txBody>
+                  <a:tcPr marL="91440" marR="91440" marT="45720" marB="45720">
+                    <a:lnL w="6350" cap="flat" cmpd="sng" algn="ctr">
+                      <a:solidFill>
+                        <a:srgbClr val="E5E7EB"/>
+                      </a:solidFill>
+                      <a:prstDash val="solid"/>
+                      <a:round/>
+                      <a:headEnd type="none" w="med" len="med"/>
+                      <a:tailEnd type="none" w="med" len="med"/>
+                    </a:lnL>
+                    <a:lnR w="6350" cap="flat" cmpd="sng" algn="ctr">
+                      <a:solidFill>
+                        <a:srgbClr val="E5E7EB"/>
+                      </a:solidFill>
+                      <a:prstDash val="solid"/>
+                      <a:round/>
+                      <a:headEnd type="none" w="med" len="med"/>
+                      <a:tailEnd type="none" w="med" len="med"/>
+                    </a:lnR>
+                    <a:lnT w="6350" cap="flat" cmpd="sng" algn="ctr">
+                      <a:solidFill>
+                        <a:srgbClr val="E5E7EB"/>
+                      </a:solidFill>
+                      <a:prstDash val="solid"/>
+                      <a:round/>
+                      <a:headEnd type="none" w="med" len="med"/>
+                      <a:tailEnd type="none" w="med" len="med"/>
+                    </a:lnT>
+                    <a:lnB w="6350" cap="flat" cmpd="sng" algn="ctr">
+                      <a:solidFill>
+                        <a:srgbClr val="E5E7EB"/>
+                      </a:solidFill>
+                      <a:prstDash val="solid"/>
+                      <a:round/>
+                      <a:headEnd type="none" w="med" len="med"/>
+                      <a:tailEnd type="none" w="med" len="med"/>
+                    </a:lnB>
+                  </a:tcPr>
+                </a:tc>
+                <a:tc>
+                  <a:txBody>
+                    <a:bodyPr/>
+                    <a:lstStyle/>
+                    <a:p>
+                      <a:pPr indent="0" marL="0">
+                        <a:buNone/>
+                      </a:pPr>
+                      <a:r>
+                        <a:rPr lang="en-US" sz="1600" dirty="0">
+                          <a:solidFill>
+                            <a:srgbClr val="4A4A4A"/>
+                          </a:solidFill>
+                          <a:latin typeface="Calibri" pitchFamily="34" charset="0"/>
+                          <a:ea typeface="Calibri" pitchFamily="34" charset="-122"/>
+                          <a:cs typeface="Calibri" pitchFamily="34" charset="-120"/>
+                        </a:rPr>
+                        <a:t>~0.85%</a:t>
+                      </a:r>
+                      <a:endParaRPr lang="en-US" sz="1600" dirty="0">
+                        <a:latin typeface="Calibri" charset="0"/>
+                        <a:ea typeface="Calibri" charset="0"/>
+                        <a:cs typeface="Calibri" charset="0"/>
+                      </a:endParaRPr>
+                    </a:p>
+                  </a:txBody>
+                  <a:tcPr marL="91440" marR="91440" marT="45720" marB="45720">
+                    <a:lnL w="6350" cap="flat" cmpd="sng" algn="ctr">
+                      <a:solidFill>
+                        <a:srgbClr val="E5E7EB"/>
+                      </a:solidFill>
+                      <a:prstDash val="solid"/>
+                      <a:round/>
+                      <a:headEnd type="none" w="med" len="med"/>
+                      <a:tailEnd type="none" w="med" len="med"/>
+                    </a:lnL>
+                    <a:lnR w="6350" cap="flat" cmpd="sng" algn="ctr">
+                      <a:solidFill>
+                        <a:srgbClr val="E5E7EB"/>
+                      </a:solidFill>
+                      <a:prstDash val="solid"/>
+                      <a:round/>
+                      <a:headEnd type="none" w="med" len="med"/>
+                      <a:tailEnd type="none" w="med" len="med"/>
+                    </a:lnR>
+                    <a:lnT w="6350" cap="flat" cmpd="sng" algn="ctr">
+                      <a:solidFill>
+                        <a:srgbClr val="E5E7EB"/>
+                      </a:solidFill>
+                      <a:prstDash val="solid"/>
+                      <a:round/>
+                      <a:headEnd type="none" w="med" len="med"/>
+                      <a:tailEnd type="none" w="med" len="med"/>
+                    </a:lnT>
+                    <a:lnB w="6350" cap="flat" cmpd="sng" algn="ctr">
+                      <a:solidFill>
+                        <a:srgbClr val="E5E7EB"/>
+                      </a:solidFill>
+                      <a:prstDash val="solid"/>
+                      <a:round/>
+                      <a:headEnd type="none" w="med" len="med"/>
+                      <a:tailEnd type="none" w="med" len="med"/>
+                    </a:lnB>
+                  </a:tcPr>
+                </a:tc>
+                <a:tc>
+                  <a:txBody>
+                    <a:bodyPr/>
+                    <a:lstStyle/>
+                    <a:p>
+                      <a:pPr indent="0" marL="0">
+                        <a:buNone/>
+                      </a:pPr>
+                      <a:r>
+                        <a:rPr lang="en-US" sz="1600" b="1" dirty="0">
+                          <a:solidFill>
+                            <a:srgbClr val="047857"/>
+                          </a:solidFill>
+                          <a:latin typeface="Calibri" pitchFamily="34" charset="0"/>
+                          <a:ea typeface="Calibri" pitchFamily="34" charset="-122"/>
+                          <a:cs typeface="Calibri" pitchFamily="34" charset="-120"/>
+                        </a:rPr>
+                        <a:t>~2.2%</a:t>
+                      </a:r>
+                      <a:endParaRPr lang="en-US" sz="1600" dirty="0">
+                        <a:latin typeface="Calibri" charset="0"/>
+                        <a:ea typeface="Calibri" charset="0"/>
+                        <a:cs typeface="Calibri" charset="0"/>
+                      </a:endParaRPr>
+                    </a:p>
+                  </a:txBody>
+                  <a:tcPr marL="91440" marR="91440" marT="45720" marB="45720">
+                    <a:lnL w="6350" cap="flat" cmpd="sng" algn="ctr">
+                      <a:solidFill>
+                        <a:srgbClr val="E5E7EB"/>
+                      </a:solidFill>
+                      <a:prstDash val="solid"/>
+                      <a:round/>
+                      <a:headEnd type="none" w="med" len="med"/>
+                      <a:tailEnd type="none" w="med" len="med"/>
+                    </a:lnL>
+                    <a:lnR w="6350" cap="flat" cmpd="sng" algn="ctr">
+                      <a:solidFill>
+                        <a:srgbClr val="E5E7EB"/>
+                      </a:solidFill>
+                      <a:prstDash val="solid"/>
+                      <a:round/>
+                      <a:headEnd type="none" w="med" len="med"/>
+                      <a:tailEnd type="none" w="med" len="med"/>
+                    </a:lnR>
+                    <a:lnT w="6350" cap="flat" cmpd="sng" algn="ctr">
+                      <a:solidFill>
+                        <a:srgbClr val="E5E7EB"/>
+                      </a:solidFill>
+                      <a:prstDash val="solid"/>
+                      <a:round/>
+                      <a:headEnd type="none" w="med" len="med"/>
+                      <a:tailEnd type="none" w="med" len="med"/>
+                    </a:lnT>
+                    <a:lnB w="6350" cap="flat" cmpd="sng" algn="ctr">
+                      <a:solidFill>
+                        <a:srgbClr val="E5E7EB"/>
+                      </a:solidFill>
+                      <a:prstDash val="solid"/>
+                      <a:round/>
+                      <a:headEnd type="none" w="med" len="med"/>
+                      <a:tailEnd type="none" w="med" len="med"/>
+                    </a:lnB>
+                  </a:tcPr>
+                </a:tc>
+              </a:tr>
+            </a:tbl>
+          </a:graphicData>
+        </a:graphic>
+      </p:graphicFrame>
+      <p:sp>
+        <p:nvSpPr>
+          <p:cNvPr id="8" name="Shape 5"/>
+          <p:cNvSpPr/>
+          <p:nvPr/>
+        </p:nvSpPr>
+        <p:spPr>
+          <a:xfrm>
+            <a:off x="457200" y="5120640"/>
+            <a:ext cx="11274552" cy="914400"/>
           </a:xfrm>
           <a:prstGeom prst="rect">
             <a:avLst/>
@@ -3910,14 +8389,14 @@
       </p:sp>
       <p:sp>
         <p:nvSpPr>
-          <p:cNvPr id="17" name="Text 15"/>
+          <p:cNvPr id="9" name="Text 6"/>
           <p:cNvSpPr/>
           <p:nvPr/>
         </p:nvSpPr>
         <p:spPr>
           <a:xfrm>
-            <a:off x="731520" y="4937760"/>
-            <a:ext cx="10725912" cy="1097280"/>
+            <a:off x="640080" y="5166360"/>
+            <a:ext cx="10908792" cy="822960"/>
           </a:xfrm>
           <a:prstGeom prst="rect">
             <a:avLst/>
@@ -3933,7 +8412,7 @@
               <a:buNone/>
             </a:pPr>
             <a:r>
-              <a:rPr lang="en-US" sz="1600" b="1" dirty="0">
+              <a:rPr lang="en-US" sz="1500" dirty="0">
                 <a:solidFill>
                   <a:srgbClr val="FFFFFF"/>
                 </a:solidFill>
@@ -3941,7 +8420,524 @@
                 <a:ea typeface="Calibri" pitchFamily="34" charset="-122"/>
                 <a:cs typeface="Calibri" pitchFamily="34" charset="-120"/>
               </a:rPr>
-              <a:t>Decision needed: </a:t>
+              <a:t>New clients now use their sign-up bonus + one month of airtime to claim their first reward — that is the activation hook the programme is missing today.</a:t>
+            </a:r>
+            <a:endParaRPr lang="en-US" sz="1500" dirty="0"/>
+          </a:p>
+        </p:txBody>
+      </p:sp>
+    </p:spTree>
+  </p:cSld>
+  <p:clrMapOvr>
+    <a:masterClrMapping/>
+  </p:clrMapOvr>
+</p:sld>
+</file>
+
+<file path=ppt/slides/slide7.xml><?xml version="1.0" encoding="utf-8"?>
+<p:sld xmlns:a="http://schemas.openxmlformats.org/drawingml/2006/main" xmlns:r="http://schemas.openxmlformats.org/officeDocument/2006/relationships" xmlns:p="http://schemas.openxmlformats.org/presentationml/2006/main">
+  <p:cSld name="Slide 7">
+    <p:bg>
+      <p:bgPr>
+        <a:solidFill>
+          <a:srgbClr val="FFFFFF"/>
+        </a:solidFill>
+      </p:bgPr>
+    </p:bg>
+    <p:spTree>
+      <p:nvGrpSpPr>
+        <p:cNvPr id="1" name=""/>
+        <p:cNvGrpSpPr/>
+        <p:nvPr/>
+      </p:nvGrpSpPr>
+      <p:grpSpPr>
+        <a:xfrm>
+          <a:off x="0" y="0"/>
+          <a:ext cx="0" cy="0"/>
+          <a:chOff x="0" y="0"/>
+          <a:chExt cx="0" cy="0"/>
+        </a:xfrm>
+      </p:grpSpPr>
+      <p:sp>
+        <p:nvSpPr>
+          <p:cNvPr id="2" name="Shape 0"/>
+          <p:cNvSpPr/>
+          <p:nvPr/>
+        </p:nvSpPr>
+        <p:spPr>
+          <a:xfrm>
+            <a:off x="0" y="0"/>
+            <a:ext cx="12188952" cy="109728"/>
+          </a:xfrm>
+          <a:prstGeom prst="rect">
+            <a:avLst/>
+          </a:prstGeom>
+          <a:solidFill>
+            <a:srgbClr val="FDC800"/>
+          </a:solidFill>
+          <a:ln w="12700">
+            <a:solidFill>
+              <a:srgbClr val="FDC800"/>
+            </a:solidFill>
+            <a:prstDash val="solid"/>
+          </a:ln>
+        </p:spPr>
+      </p:sp>
+      <p:sp>
+        <p:nvSpPr>
+          <p:cNvPr id="3" name="Text 1"/>
+          <p:cNvSpPr/>
+          <p:nvPr/>
+        </p:nvSpPr>
+        <p:spPr>
+          <a:xfrm>
+            <a:off x="457200" y="6446520"/>
+            <a:ext cx="4572000" cy="274320"/>
+          </a:xfrm>
+          <a:prstGeom prst="rect">
+            <a:avLst/>
+          </a:prstGeom>
+          <a:noFill/>
+          <a:ln/>
+        </p:spPr>
+        <p:txBody>
+          <a:bodyPr wrap="square" rtlCol="0" anchor="ctr"/>
+          <a:lstStyle/>
+          <a:p>
+            <a:pPr indent="0" marL="0">
+              <a:buNone/>
+            </a:pPr>
+            <a:r>
+              <a:rPr lang="en-US" sz="1000" b="1" dirty="0">
+                <a:solidFill>
+                  <a:srgbClr val="A7A9AC"/>
+                </a:solidFill>
+                <a:latin typeface="Calibri" pitchFamily="34" charset="0"/>
+                <a:ea typeface="Calibri" pitchFamily="34" charset="-122"/>
+                <a:cs typeface="Calibri" pitchFamily="34" charset="-120"/>
+              </a:rPr>
+              <a:t>MAVERICK LOYALTY</a:t>
+            </a:r>
+            <a:endParaRPr lang="en-US" sz="1000" dirty="0"/>
+          </a:p>
+        </p:txBody>
+      </p:sp>
+      <p:sp>
+        <p:nvSpPr>
+          <p:cNvPr id="4" name="Text 2"/>
+          <p:cNvSpPr/>
+          <p:nvPr/>
+        </p:nvSpPr>
+        <p:spPr>
+          <a:xfrm>
+            <a:off x="10817352" y="6446520"/>
+            <a:ext cx="914400" cy="274320"/>
+          </a:xfrm>
+          <a:prstGeom prst="rect">
+            <a:avLst/>
+          </a:prstGeom>
+          <a:noFill/>
+          <a:ln/>
+        </p:spPr>
+        <p:txBody>
+          <a:bodyPr wrap="square" rtlCol="0" anchor="ctr"/>
+          <a:lstStyle/>
+          <a:p>
+            <a:pPr algn="r" indent="0" marL="0">
+              <a:buNone/>
+            </a:pPr>
+            <a:r>
+              <a:rPr lang="en-US" sz="1000" dirty="0">
+                <a:solidFill>
+                  <a:srgbClr val="A7A9AC"/>
+                </a:solidFill>
+                <a:latin typeface="Calibri" pitchFamily="34" charset="0"/>
+                <a:ea typeface="Calibri" pitchFamily="34" charset="-122"/>
+                <a:cs typeface="Calibri" pitchFamily="34" charset="-120"/>
+              </a:rPr>
+              <a:t>7 / 7</a:t>
+            </a:r>
+            <a:endParaRPr lang="en-US" sz="1000" dirty="0"/>
+          </a:p>
+        </p:txBody>
+      </p:sp>
+      <p:sp>
+        <p:nvSpPr>
+          <p:cNvPr id="5" name="Text 3"/>
+          <p:cNvSpPr/>
+          <p:nvPr/>
+        </p:nvSpPr>
+        <p:spPr>
+          <a:xfrm>
+            <a:off x="457200" y="365760"/>
+            <a:ext cx="11274552" cy="640080"/>
+          </a:xfrm>
+          <a:prstGeom prst="rect">
+            <a:avLst/>
+          </a:prstGeom>
+          <a:noFill/>
+          <a:ln/>
+        </p:spPr>
+        <p:txBody>
+          <a:bodyPr wrap="square" rtlCol="0" anchor="ctr"/>
+          <a:lstStyle/>
+          <a:p>
+            <a:pPr indent="0" marL="0">
+              <a:buNone/>
+            </a:pPr>
+            <a:r>
+              <a:rPr lang="en-US" sz="3200" b="1" dirty="0">
+                <a:solidFill>
+                  <a:srgbClr val="3C3C3B"/>
+                </a:solidFill>
+                <a:latin typeface="Calibri" pitchFamily="34" charset="0"/>
+                <a:ea typeface="Calibri" pitchFamily="34" charset="-122"/>
+                <a:cs typeface="Calibri" pitchFamily="34" charset="-120"/>
+              </a:rPr>
+              <a:t>Optional Levers &amp; Decision</a:t>
+            </a:r>
+            <a:endParaRPr lang="en-US" sz="3200" dirty="0"/>
+          </a:p>
+        </p:txBody>
+      </p:sp>
+      <p:sp>
+        <p:nvSpPr>
+          <p:cNvPr id="6" name="Shape 4"/>
+          <p:cNvSpPr/>
+          <p:nvPr/>
+        </p:nvSpPr>
+        <p:spPr>
+          <a:xfrm>
+            <a:off x="457200" y="960120"/>
+            <a:ext cx="2743200" cy="45720"/>
+          </a:xfrm>
+          <a:prstGeom prst="rect">
+            <a:avLst/>
+          </a:prstGeom>
+          <a:solidFill>
+            <a:srgbClr val="FDC800"/>
+          </a:solidFill>
+          <a:ln w="12700">
+            <a:solidFill>
+              <a:srgbClr val="FDC800"/>
+            </a:solidFill>
+            <a:prstDash val="solid"/>
+          </a:ln>
+        </p:spPr>
+      </p:sp>
+      <p:sp>
+        <p:nvSpPr>
+          <p:cNvPr id="7" name="Text 5"/>
+          <p:cNvSpPr/>
+          <p:nvPr/>
+        </p:nvSpPr>
+        <p:spPr>
+          <a:xfrm>
+            <a:off x="457200" y="1234440"/>
+            <a:ext cx="11274552" cy="365760"/>
+          </a:xfrm>
+          <a:prstGeom prst="rect">
+            <a:avLst/>
+          </a:prstGeom>
+          <a:noFill/>
+          <a:ln/>
+        </p:spPr>
+        <p:txBody>
+          <a:bodyPr wrap="square" rtlCol="0" anchor="ctr"/>
+          <a:lstStyle/>
+          <a:p>
+            <a:pPr indent="0" marL="0">
+              <a:buNone/>
+            </a:pPr>
+            <a:r>
+              <a:rPr lang="en-US" sz="2000" b="1" dirty="0">
+                <a:solidFill>
+                  <a:srgbClr val="3C3C3B"/>
+                </a:solidFill>
+                <a:latin typeface="Calibri" pitchFamily="34" charset="0"/>
+                <a:ea typeface="Calibri" pitchFamily="34" charset="-122"/>
+                <a:cs typeface="Calibri" pitchFamily="34" charset="-120"/>
+              </a:rPr>
+              <a:t>Extra levers worth considering</a:t>
+            </a:r>
+            <a:endParaRPr lang="en-US" sz="2000" dirty="0"/>
+          </a:p>
+        </p:txBody>
+      </p:sp>
+      <p:sp>
+        <p:nvSpPr>
+          <p:cNvPr id="8" name="Text 6"/>
+          <p:cNvSpPr/>
+          <p:nvPr/>
+        </p:nvSpPr>
+        <p:spPr>
+          <a:xfrm>
+            <a:off x="640080" y="1691640"/>
+            <a:ext cx="10972800" cy="457200"/>
+          </a:xfrm>
+          <a:prstGeom prst="rect">
+            <a:avLst/>
+          </a:prstGeom>
+          <a:noFill/>
+          <a:ln/>
+        </p:spPr>
+        <p:txBody>
+          <a:bodyPr wrap="square" rtlCol="0" anchor="ctr"/>
+          <a:lstStyle/>
+          <a:p>
+            <a:pPr marL="342900" indent="-342900">
+              <a:buSzPct val="100000"/>
+              <a:buChar char="•"/>
+            </a:pPr>
+            <a:r>
+              <a:rPr lang="en-US" sz="1600" b="1" dirty="0">
+                <a:solidFill>
+                  <a:srgbClr val="4A4A4A"/>
+                </a:solidFill>
+                <a:latin typeface="Calibri" pitchFamily="34" charset="0"/>
+                <a:ea typeface="Calibri" pitchFamily="34" charset="-122"/>
+                <a:cs typeface="Calibri" pitchFamily="34" charset="-120"/>
+              </a:rPr>
+              <a:t>Tier multipliers — </a:t>
+            </a:r>
+            <a:pPr indent="0" marL="0">
+              <a:buNone/>
+            </a:pPr>
+            <a:r>
+              <a:rPr lang="en-US" sz="1600" dirty="0">
+                <a:solidFill>
+                  <a:srgbClr val="4A4A4A"/>
+                </a:solidFill>
+                <a:latin typeface="Calibri" pitchFamily="34" charset="0"/>
+                <a:ea typeface="Calibri" pitchFamily="34" charset="-122"/>
+                <a:cs typeface="Calibri" pitchFamily="34" charset="-120"/>
+              </a:rPr>
+              <a:t>Champion = 1.5×, Elite = 2× earn rate. Rewards loyalty and drives tier-chasing behaviour.</a:t>
+            </a:r>
+            <a:endParaRPr lang="en-US" sz="1600" dirty="0"/>
+          </a:p>
+        </p:txBody>
+      </p:sp>
+      <p:sp>
+        <p:nvSpPr>
+          <p:cNvPr id="9" name="Text 7"/>
+          <p:cNvSpPr/>
+          <p:nvPr/>
+        </p:nvSpPr>
+        <p:spPr>
+          <a:xfrm>
+            <a:off x="640080" y="2331720"/>
+            <a:ext cx="10972800" cy="640080"/>
+          </a:xfrm>
+          <a:prstGeom prst="rect">
+            <a:avLst/>
+          </a:prstGeom>
+          <a:noFill/>
+          <a:ln/>
+        </p:spPr>
+        <p:txBody>
+          <a:bodyPr wrap="square" rtlCol="0" anchor="ctr"/>
+          <a:lstStyle/>
+          <a:p>
+            <a:pPr marL="342900" indent="-342900">
+              <a:buSzPct val="100000"/>
+              <a:buChar char="•"/>
+            </a:pPr>
+            <a:r>
+              <a:rPr lang="en-US" sz="1600" b="1" dirty="0">
+                <a:solidFill>
+                  <a:srgbClr val="4A4A4A"/>
+                </a:solidFill>
+                <a:latin typeface="Calibri" pitchFamily="34" charset="0"/>
+                <a:ea typeface="Calibri" pitchFamily="34" charset="-122"/>
+                <a:cs typeface="Calibri" pitchFamily="34" charset="-120"/>
+              </a:rPr>
+              <a:t>Bonus categories — </a:t>
+            </a:r>
+            <a:pPr indent="0" marL="0">
+              <a:buNone/>
+            </a:pPr>
+            <a:r>
+              <a:rPr lang="en-US" sz="1600" dirty="0">
+                <a:solidFill>
+                  <a:srgbClr val="4A4A4A"/>
+                </a:solidFill>
+                <a:latin typeface="Calibri" pitchFamily="34" charset="0"/>
+                <a:ea typeface="Calibri" pitchFamily="34" charset="-122"/>
+                <a:cs typeface="Calibri" pitchFamily="34" charset="-120"/>
+              </a:rPr>
+              <a:t>Double points on accessories during launch month, or 3× on contract renewals. Cheap to run, drives the behaviour you actually want.</a:t>
+            </a:r>
+            <a:endParaRPr lang="en-US" sz="1600" dirty="0"/>
+          </a:p>
+        </p:txBody>
+      </p:sp>
+      <p:sp>
+        <p:nvSpPr>
+          <p:cNvPr id="10" name="Text 8"/>
+          <p:cNvSpPr/>
+          <p:nvPr/>
+        </p:nvSpPr>
+        <p:spPr>
+          <a:xfrm>
+            <a:off x="640080" y="3154680"/>
+            <a:ext cx="10972800" cy="640080"/>
+          </a:xfrm>
+          <a:prstGeom prst="rect">
+            <a:avLst/>
+          </a:prstGeom>
+          <a:noFill/>
+          <a:ln/>
+        </p:spPr>
+        <p:txBody>
+          <a:bodyPr wrap="square" rtlCol="0" anchor="ctr"/>
+          <a:lstStyle/>
+          <a:p>
+            <a:pPr marL="342900" indent="-342900">
+              <a:buSzPct val="100000"/>
+              <a:buChar char="•"/>
+            </a:pPr>
+            <a:r>
+              <a:rPr lang="en-US" sz="1600" b="1" dirty="0">
+                <a:solidFill>
+                  <a:srgbClr val="4A4A4A"/>
+                </a:solidFill>
+                <a:latin typeface="Calibri" pitchFamily="34" charset="0"/>
+                <a:ea typeface="Calibri" pitchFamily="34" charset="-122"/>
+                <a:cs typeface="Calibri" pitchFamily="34" charset="-120"/>
+              </a:rPr>
+              <a:t>Birthday / anniversary bonus — </a:t>
+            </a:r>
+            <a:pPr indent="0" marL="0">
+              <a:buNone/>
+            </a:pPr>
+            <a:r>
+              <a:rPr lang="en-US" sz="1600" dirty="0">
+                <a:solidFill>
+                  <a:srgbClr val="4A4A4A"/>
+                </a:solidFill>
+                <a:latin typeface="Calibri" pitchFamily="34" charset="0"/>
+                <a:ea typeface="Calibri" pitchFamily="34" charset="-122"/>
+                <a:cs typeface="Calibri" pitchFamily="34" charset="-120"/>
+              </a:rPr>
+              <a:t>200–500 pts on key dates keeps the programme top-of-mind without affecting the unit economics.</a:t>
+            </a:r>
+            <a:endParaRPr lang="en-US" sz="1600" dirty="0"/>
+          </a:p>
+        </p:txBody>
+      </p:sp>
+      <p:sp>
+        <p:nvSpPr>
+          <p:cNvPr id="11" name="Shape 9"/>
+          <p:cNvSpPr/>
+          <p:nvPr/>
+        </p:nvSpPr>
+        <p:spPr>
+          <a:xfrm>
+            <a:off x="457200" y="4206240"/>
+            <a:ext cx="11274552" cy="1828800"/>
+          </a:xfrm>
+          <a:prstGeom prst="rect">
+            <a:avLst/>
+          </a:prstGeom>
+          <a:solidFill>
+            <a:srgbClr val="3C3C3B"/>
+          </a:solidFill>
+          <a:ln w="12700">
+            <a:solidFill>
+              <a:srgbClr val="3C3C3B"/>
+            </a:solidFill>
+            <a:prstDash val="solid"/>
+          </a:ln>
+        </p:spPr>
+      </p:sp>
+      <p:sp>
+        <p:nvSpPr>
+          <p:cNvPr id="12" name="Text 10"/>
+          <p:cNvSpPr/>
+          <p:nvPr/>
+        </p:nvSpPr>
+        <p:spPr>
+          <a:xfrm>
+            <a:off x="640080" y="4343400"/>
+            <a:ext cx="10972800" cy="365760"/>
+          </a:xfrm>
+          <a:prstGeom prst="rect">
+            <a:avLst/>
+          </a:prstGeom>
+          <a:noFill/>
+          <a:ln/>
+        </p:spPr>
+        <p:txBody>
+          <a:bodyPr wrap="square" rtlCol="0" anchor="ctr"/>
+          <a:lstStyle/>
+          <a:p>
+            <a:pPr indent="0" marL="0">
+              <a:buNone/>
+            </a:pPr>
+            <a:r>
+              <a:rPr lang="en-US" sz="1300" b="1" spc="200" kern="0" dirty="0">
+                <a:solidFill>
+                  <a:srgbClr val="FDC800"/>
+                </a:solidFill>
+                <a:latin typeface="Calibri" pitchFamily="34" charset="0"/>
+                <a:ea typeface="Calibri" pitchFamily="34" charset="-122"/>
+                <a:cs typeface="Calibri" pitchFamily="34" charset="-120"/>
+              </a:rPr>
+              <a:t>DECISION REQUESTED</a:t>
+            </a:r>
+            <a:endParaRPr lang="en-US" sz="1300" dirty="0"/>
+          </a:p>
+        </p:txBody>
+      </p:sp>
+      <p:sp>
+        <p:nvSpPr>
+          <p:cNvPr id="13" name="Text 11"/>
+          <p:cNvSpPr/>
+          <p:nvPr/>
+        </p:nvSpPr>
+        <p:spPr>
+          <a:xfrm>
+            <a:off x="640080" y="4709160"/>
+            <a:ext cx="10908792" cy="1280160"/>
+          </a:xfrm>
+          <a:prstGeom prst="rect">
+            <a:avLst/>
+          </a:prstGeom>
+          <a:noFill/>
+          <a:ln/>
+        </p:spPr>
+        <p:txBody>
+          <a:bodyPr wrap="square" rtlCol="0" anchor="t"/>
+          <a:lstStyle/>
+          <a:p>
+            <a:pPr indent="0" marL="0">
+              <a:buNone/>
+            </a:pPr>
+            <a:r>
+              <a:rPr lang="en-US" sz="1600" dirty="0">
+                <a:solidFill>
+                  <a:srgbClr val="FFFFFF"/>
+                </a:solidFill>
+                <a:latin typeface="Calibri" pitchFamily="34" charset="0"/>
+                <a:ea typeface="Calibri" pitchFamily="34" charset="-122"/>
+                <a:cs typeface="Calibri" pitchFamily="34" charset="-120"/>
+              </a:rPr>
+              <a:t>Approve the move to </a:t>
+            </a:r>
+            <a:pPr indent="0" marL="0">
+              <a:buNone/>
+            </a:pPr>
+            <a:r>
+              <a:rPr lang="en-US" sz="1600" b="1" dirty="0">
+                <a:solidFill>
+                  <a:srgbClr val="FDC800"/>
+                </a:solidFill>
+                <a:latin typeface="Calibri" pitchFamily="34" charset="0"/>
+                <a:ea typeface="Calibri" pitchFamily="34" charset="-122"/>
+                <a:cs typeface="Calibri" pitchFamily="34" charset="-120"/>
+              </a:rPr>
+              <a:t>2 pts / R1 airtime</a:t>
             </a:r>
             <a:pPr indent="0" marL="0">
               <a:buNone/>
@@ -3955,7 +8951,7 @@
                 <a:ea typeface="Calibri" pitchFamily="34" charset="-122"/>
                 <a:cs typeface="Calibri" pitchFamily="34" charset="-120"/>
               </a:rPr>
-              <a:t>pick a new earning rate (suggested </a:t>
+              <a:t> and </a:t>
             </a:r>
             <a:pPr indent="0" marL="0">
               <a:buNone/>
@@ -3969,7 +8965,7 @@
                 <a:ea typeface="Calibri" pitchFamily="34" charset="-122"/>
                 <a:cs typeface="Calibri" pitchFamily="34" charset="-120"/>
               </a:rPr>
-              <a:t>10–20 pts / R1</a:t>
+              <a:t>1 pt = R0.05 redemption value</a:t>
             </a:r>
             <a:pPr indent="0" marL="0">
               <a:buNone/>
@@ -3983,7 +8979,7 @@
                 <a:ea typeface="Calibri" pitchFamily="34" charset="-122"/>
                 <a:cs typeface="Calibri" pitchFamily="34" charset="-120"/>
               </a:rPr>
-              <a:t>) so the loyalty programme actually rewards everyday customer behaviour.</a:t>
+              <a:t>. This brings Maverick in line with the ~2% telco benchmark, makes the cheapest reward reachable in roughly one month of normal airtime use, and turns the sign-up bonus into a genuine activation hook.</a:t>
             </a:r>
             <a:endParaRPr lang="en-US" sz="1600" dirty="0"/>
           </a:p>
